--- a/figs/experimental_design_time.pptx
+++ b/figs/experimental_design_time.pptx
@@ -2,7 +2,7 @@
 <file path=ppt/presentation.xml><?xml version="1.0" encoding="utf-8"?>
 <p:presentation xmlns:a="http://schemas.openxmlformats.org/drawingml/2006/main" xmlns:r="http://schemas.openxmlformats.org/officeDocument/2006/relationships" xmlns:p="http://schemas.openxmlformats.org/presentationml/2006/main" saveSubsetFonts="1">
   <p:sldMasterIdLst>
-    <p:sldMasterId id="2147483648" r:id="rId1"/>
+    <p:sldMasterId id="2147483708" r:id="rId1"/>
   </p:sldMasterIdLst>
   <p:notesMasterIdLst>
     <p:notesMasterId r:id="rId3"/>
@@ -10,13 +10,13 @@
   <p:sldIdLst>
     <p:sldId id="257" r:id="rId2"/>
   </p:sldIdLst>
-  <p:sldSz cx="12192000" cy="6858000"/>
+  <p:sldSz cx="11155363" cy="6675438"/>
   <p:notesSz cx="6858000" cy="9144000"/>
   <p:defaultTextStyle>
     <a:defPPr>
       <a:defRPr lang="en-US"/>
     </a:defPPr>
-    <a:lvl1pPr marL="0" algn="l" defTabSz="914400" rtl="0" eaLnBrk="1" latinLnBrk="0" hangingPunct="1">
+    <a:lvl1pPr marL="0" algn="l" defTabSz="457200" rtl="0" eaLnBrk="1" latinLnBrk="0" hangingPunct="1">
       <a:defRPr sz="1800" kern="1200">
         <a:solidFill>
           <a:schemeClr val="tx1"/>
@@ -26,7 +26,7 @@
         <a:cs typeface="+mn-cs"/>
       </a:defRPr>
     </a:lvl1pPr>
-    <a:lvl2pPr marL="457200" algn="l" defTabSz="914400" rtl="0" eaLnBrk="1" latinLnBrk="0" hangingPunct="1">
+    <a:lvl2pPr marL="457200" algn="l" defTabSz="457200" rtl="0" eaLnBrk="1" latinLnBrk="0" hangingPunct="1">
       <a:defRPr sz="1800" kern="1200">
         <a:solidFill>
           <a:schemeClr val="tx1"/>
@@ -36,7 +36,7 @@
         <a:cs typeface="+mn-cs"/>
       </a:defRPr>
     </a:lvl2pPr>
-    <a:lvl3pPr marL="914400" algn="l" defTabSz="914400" rtl="0" eaLnBrk="1" latinLnBrk="0" hangingPunct="1">
+    <a:lvl3pPr marL="914400" algn="l" defTabSz="457200" rtl="0" eaLnBrk="1" latinLnBrk="0" hangingPunct="1">
       <a:defRPr sz="1800" kern="1200">
         <a:solidFill>
           <a:schemeClr val="tx1"/>
@@ -46,7 +46,7 @@
         <a:cs typeface="+mn-cs"/>
       </a:defRPr>
     </a:lvl3pPr>
-    <a:lvl4pPr marL="1371600" algn="l" defTabSz="914400" rtl="0" eaLnBrk="1" latinLnBrk="0" hangingPunct="1">
+    <a:lvl4pPr marL="1371600" algn="l" defTabSz="457200" rtl="0" eaLnBrk="1" latinLnBrk="0" hangingPunct="1">
       <a:defRPr sz="1800" kern="1200">
         <a:solidFill>
           <a:schemeClr val="tx1"/>
@@ -56,7 +56,7 @@
         <a:cs typeface="+mn-cs"/>
       </a:defRPr>
     </a:lvl4pPr>
-    <a:lvl5pPr marL="1828800" algn="l" defTabSz="914400" rtl="0" eaLnBrk="1" latinLnBrk="0" hangingPunct="1">
+    <a:lvl5pPr marL="1828800" algn="l" defTabSz="457200" rtl="0" eaLnBrk="1" latinLnBrk="0" hangingPunct="1">
       <a:defRPr sz="1800" kern="1200">
         <a:solidFill>
           <a:schemeClr val="tx1"/>
@@ -66,7 +66,7 @@
         <a:cs typeface="+mn-cs"/>
       </a:defRPr>
     </a:lvl5pPr>
-    <a:lvl6pPr marL="2286000" algn="l" defTabSz="914400" rtl="0" eaLnBrk="1" latinLnBrk="0" hangingPunct="1">
+    <a:lvl6pPr marL="2286000" algn="l" defTabSz="457200" rtl="0" eaLnBrk="1" latinLnBrk="0" hangingPunct="1">
       <a:defRPr sz="1800" kern="1200">
         <a:solidFill>
           <a:schemeClr val="tx1"/>
@@ -76,7 +76,7 @@
         <a:cs typeface="+mn-cs"/>
       </a:defRPr>
     </a:lvl6pPr>
-    <a:lvl7pPr marL="2743200" algn="l" defTabSz="914400" rtl="0" eaLnBrk="1" latinLnBrk="0" hangingPunct="1">
+    <a:lvl7pPr marL="2743200" algn="l" defTabSz="457200" rtl="0" eaLnBrk="1" latinLnBrk="0" hangingPunct="1">
       <a:defRPr sz="1800" kern="1200">
         <a:solidFill>
           <a:schemeClr val="tx1"/>
@@ -86,7 +86,7 @@
         <a:cs typeface="+mn-cs"/>
       </a:defRPr>
     </a:lvl7pPr>
-    <a:lvl8pPr marL="3200400" algn="l" defTabSz="914400" rtl="0" eaLnBrk="1" latinLnBrk="0" hangingPunct="1">
+    <a:lvl8pPr marL="3200400" algn="l" defTabSz="457200" rtl="0" eaLnBrk="1" latinLnBrk="0" hangingPunct="1">
       <a:defRPr sz="1800" kern="1200">
         <a:solidFill>
           <a:schemeClr val="tx1"/>
@@ -96,7 +96,7 @@
         <a:cs typeface="+mn-cs"/>
       </a:defRPr>
     </a:lvl8pPr>
-    <a:lvl9pPr marL="3657600" algn="l" defTabSz="914400" rtl="0" eaLnBrk="1" latinLnBrk="0" hangingPunct="1">
+    <a:lvl9pPr marL="3657600" algn="l" defTabSz="457200" rtl="0" eaLnBrk="1" latinLnBrk="0" hangingPunct="1">
       <a:defRPr sz="1800" kern="1200">
         <a:solidFill>
           <a:schemeClr val="tx1"/>
@@ -115,12 +115,20 @@
 </p:presentation>
 </file>
 
+<file path=ppt/revisionInfo.xml><?xml version="1.0" encoding="utf-8"?>
+<p1510:revInfo xmlns:a="http://schemas.openxmlformats.org/drawingml/2006/main" xmlns:r="http://schemas.openxmlformats.org/officeDocument/2006/relationships" xmlns:p1510="http://schemas.microsoft.com/office/powerpoint/2015/10/main">
+  <p1510:revLst>
+    <p1510:client id="{1F7F7D6D-8BB7-4E7D-9555-BFEE691BE3D3}" v="34" dt="2026-07-08T22:38:15.756"/>
+  </p1510:revLst>
+</p1510:revInfo>
+</file>
+
 <file path=ppt/changesInfos/changesInfo1.xml><?xml version="1.0" encoding="utf-8"?>
 <pc:chgInfo xmlns:a="http://schemas.openxmlformats.org/drawingml/2006/main" xmlns:r="http://schemas.openxmlformats.org/officeDocument/2006/relationships" xmlns:ac="http://schemas.microsoft.com/office/drawing/2013/main/command" xmlns:pc="http://schemas.microsoft.com/office/powerpoint/2013/main/command">
   <pc:docChgLst>
     <pc:chgData name="Zachary Randell" userId="4632875424_tp_dropbox_plus" providerId="OAuth2" clId="{94F170DD-8542-47A7-905C-5CC9F103855A}"/>
-    <pc:docChg chg="delSld modSld">
-      <pc:chgData name="Zachary Randell" userId="4632875424_tp_dropbox_plus" providerId="OAuth2" clId="{94F170DD-8542-47A7-905C-5CC9F103855A}" dt="2026-06-05T20:50:55.081" v="10" actId="47"/>
+    <pc:docChg chg="undo custSel delSld modSld modMainMaster modNotesMaster">
+      <pc:chgData name="Zachary Randell" userId="4632875424_tp_dropbox_plus" providerId="OAuth2" clId="{94F170DD-8542-47A7-905C-5CC9F103855A}" dt="2026-07-08T22:41:50.102" v="374" actId="1076"/>
       <pc:docMkLst>
         <pc:docMk/>
       </pc:docMkLst>
@@ -131,29 +139,1789 @@
           <pc:sldMk cId="1105578165" sldId="256"/>
         </pc:sldMkLst>
       </pc:sldChg>
-      <pc:sldChg chg="modSp mod">
-        <pc:chgData name="Zachary Randell" userId="4632875424_tp_dropbox_plus" providerId="OAuth2" clId="{94F170DD-8542-47A7-905C-5CC9F103855A}" dt="2026-06-05T20:47:39.495" v="9" actId="1076"/>
+      <pc:sldChg chg="addSp delSp modSp mod modNotes">
+        <pc:chgData name="Zachary Randell" userId="4632875424_tp_dropbox_plus" providerId="OAuth2" clId="{94F170DD-8542-47A7-905C-5CC9F103855A}" dt="2026-07-08T22:41:50.102" v="374" actId="1076"/>
         <pc:sldMkLst>
           <pc:docMk/>
           <pc:sldMk cId="2849075591" sldId="257"/>
         </pc:sldMkLst>
-        <pc:spChg chg="mod">
-          <ac:chgData name="Zachary Randell" userId="4632875424_tp_dropbox_plus" providerId="OAuth2" clId="{94F170DD-8542-47A7-905C-5CC9F103855A}" dt="2026-06-05T20:47:27.109" v="8" actId="1076"/>
+        <pc:spChg chg="add mod">
+          <ac:chgData name="Zachary Randell" userId="4632875424_tp_dropbox_plus" providerId="OAuth2" clId="{94F170DD-8542-47A7-905C-5CC9F103855A}" dt="2026-07-08T22:30:50.587" v="314" actId="1035"/>
           <ac:spMkLst>
             <pc:docMk/>
             <pc:sldMk cId="2849075591" sldId="257"/>
-            <ac:spMk id="92" creationId="{CDE78603-3D13-B381-ACE1-1D7119B2B07D}"/>
+            <ac:spMk id="2" creationId="{BCB49A15-9E4E-9DD9-36A0-F59887725B5C}"/>
+          </ac:spMkLst>
+        </pc:spChg>
+        <pc:spChg chg="add mod">
+          <ac:chgData name="Zachary Randell" userId="4632875424_tp_dropbox_plus" providerId="OAuth2" clId="{94F170DD-8542-47A7-905C-5CC9F103855A}" dt="2026-07-08T22:22:43.471" v="183" actId="14100"/>
+          <ac:spMkLst>
+            <pc:docMk/>
+            <pc:sldMk cId="2849075591" sldId="257"/>
+            <ac:spMk id="3" creationId="{40432DBF-1891-684C-29D8-944D319DFEC8}"/>
+          </ac:spMkLst>
+        </pc:spChg>
+        <pc:spChg chg="add del mod">
+          <ac:chgData name="Zachary Randell" userId="4632875424_tp_dropbox_plus" providerId="OAuth2" clId="{94F170DD-8542-47A7-905C-5CC9F103855A}" dt="2026-07-08T22:19:31.878" v="160" actId="478"/>
+          <ac:spMkLst>
+            <pc:docMk/>
+            <pc:sldMk cId="2849075591" sldId="257"/>
+            <ac:spMk id="4" creationId="{2069F89A-1CDC-C968-7382-26686E756CAB}"/>
+          </ac:spMkLst>
+        </pc:spChg>
+        <pc:spChg chg="add del mod">
+          <ac:chgData name="Zachary Randell" userId="4632875424_tp_dropbox_plus" providerId="OAuth2" clId="{94F170DD-8542-47A7-905C-5CC9F103855A}" dt="2026-07-08T22:19:32.812" v="161" actId="478"/>
+          <ac:spMkLst>
+            <pc:docMk/>
+            <pc:sldMk cId="2849075591" sldId="257"/>
+            <ac:spMk id="5" creationId="{94274F56-9E98-04E3-C123-EE5D33610591}"/>
+          </ac:spMkLst>
+        </pc:spChg>
+        <pc:spChg chg="add mod">
+          <ac:chgData name="Zachary Randell" userId="4632875424_tp_dropbox_plus" providerId="OAuth2" clId="{94F170DD-8542-47A7-905C-5CC9F103855A}" dt="2026-07-08T22:22:43.471" v="183" actId="14100"/>
+          <ac:spMkLst>
+            <pc:docMk/>
+            <pc:sldMk cId="2849075591" sldId="257"/>
+            <ac:spMk id="6" creationId="{689ED5F1-D754-1AF2-278D-3A394CD16D80}"/>
+          </ac:spMkLst>
+        </pc:spChg>
+        <pc:spChg chg="add mod">
+          <ac:chgData name="Zachary Randell" userId="4632875424_tp_dropbox_plus" providerId="OAuth2" clId="{94F170DD-8542-47A7-905C-5CC9F103855A}" dt="2026-07-08T22:22:43.471" v="183" actId="14100"/>
+          <ac:spMkLst>
+            <pc:docMk/>
+            <pc:sldMk cId="2849075591" sldId="257"/>
+            <ac:spMk id="7" creationId="{2F5FBA4C-371A-F9C7-444E-84BE2A495ED3}"/>
+          </ac:spMkLst>
+        </pc:spChg>
+        <pc:spChg chg="add mod ord">
+          <ac:chgData name="Zachary Randell" userId="4632875424_tp_dropbox_plus" providerId="OAuth2" clId="{94F170DD-8542-47A7-905C-5CC9F103855A}" dt="2026-07-08T22:30:50.587" v="314" actId="1035"/>
+          <ac:spMkLst>
+            <pc:docMk/>
+            <pc:sldMk cId="2849075591" sldId="257"/>
+            <ac:spMk id="8" creationId="{52749A71-B24D-04EF-E2F8-4D6BA7F7D5BF}"/>
+          </ac:spMkLst>
+        </pc:spChg>
+        <pc:spChg chg="add mod ord">
+          <ac:chgData name="Zachary Randell" userId="4632875424_tp_dropbox_plus" providerId="OAuth2" clId="{94F170DD-8542-47A7-905C-5CC9F103855A}" dt="2026-07-08T22:30:50.587" v="314" actId="1035"/>
+          <ac:spMkLst>
+            <pc:docMk/>
+            <pc:sldMk cId="2849075591" sldId="257"/>
+            <ac:spMk id="9" creationId="{2C7F6973-6353-7E3C-79F2-F40AF40FF49D}"/>
+          </ac:spMkLst>
+        </pc:spChg>
+        <pc:spChg chg="add mod">
+          <ac:chgData name="Zachary Randell" userId="4632875424_tp_dropbox_plus" providerId="OAuth2" clId="{94F170DD-8542-47A7-905C-5CC9F103855A}" dt="2026-07-08T22:31:01.742" v="316" actId="113"/>
+          <ac:spMkLst>
+            <pc:docMk/>
+            <pc:sldMk cId="2849075591" sldId="257"/>
+            <ac:spMk id="48" creationId="{7428E576-E80C-B291-62C9-C68949747DBF}"/>
+          </ac:spMkLst>
+        </pc:spChg>
+        <pc:spChg chg="add mod">
+          <ac:chgData name="Zachary Randell" userId="4632875424_tp_dropbox_plus" providerId="OAuth2" clId="{94F170DD-8542-47A7-905C-5CC9F103855A}" dt="2026-07-08T22:30:58.844" v="315" actId="113"/>
+          <ac:spMkLst>
+            <pc:docMk/>
+            <pc:sldMk cId="2849075591" sldId="257"/>
+            <ac:spMk id="49" creationId="{F619EC85-CFC2-1A8A-754E-A51E3B6BEDAB}"/>
+          </ac:spMkLst>
+        </pc:spChg>
+        <pc:spChg chg="add mod">
+          <ac:chgData name="Zachary Randell" userId="4632875424_tp_dropbox_plus" providerId="OAuth2" clId="{94F170DD-8542-47A7-905C-5CC9F103855A}" dt="2026-07-08T22:32:19.728" v="326" actId="1076"/>
+          <ac:spMkLst>
+            <pc:docMk/>
+            <pc:sldMk cId="2849075591" sldId="257"/>
+            <ac:spMk id="50" creationId="{50C3CFC2-67A8-136D-5894-1D24997CA6B9}"/>
+          </ac:spMkLst>
+        </pc:spChg>
+        <pc:spChg chg="del mod">
+          <ac:chgData name="Zachary Randell" userId="4632875424_tp_dropbox_plus" providerId="OAuth2" clId="{94F170DD-8542-47A7-905C-5CC9F103855A}" dt="2026-07-08T22:10:31.162" v="142" actId="478"/>
+          <ac:spMkLst>
+            <pc:docMk/>
+            <pc:sldMk cId="2849075591" sldId="257"/>
+            <ac:spMk id="58" creationId="{482EE87C-5214-779E-8173-974CE82A394E}"/>
+          </ac:spMkLst>
+        </pc:spChg>
+        <pc:spChg chg="del mod">
+          <ac:chgData name="Zachary Randell" userId="4632875424_tp_dropbox_plus" providerId="OAuth2" clId="{94F170DD-8542-47A7-905C-5CC9F103855A}" dt="2026-07-08T22:14:07.365" v="155" actId="478"/>
+          <ac:spMkLst>
+            <pc:docMk/>
+            <pc:sldMk cId="2849075591" sldId="257"/>
+            <ac:spMk id="59" creationId="{DAFDA21A-26D8-E30F-B443-6F06602468B8}"/>
           </ac:spMkLst>
         </pc:spChg>
         <pc:spChg chg="mod">
-          <ac:chgData name="Zachary Randell" userId="4632875424_tp_dropbox_plus" providerId="OAuth2" clId="{94F170DD-8542-47A7-905C-5CC9F103855A}" dt="2026-06-05T20:47:39.495" v="9" actId="1076"/>
+          <ac:chgData name="Zachary Randell" userId="4632875424_tp_dropbox_plus" providerId="OAuth2" clId="{94F170DD-8542-47A7-905C-5CC9F103855A}" dt="2026-07-08T22:21:47.807" v="179" actId="1076"/>
+          <ac:spMkLst>
+            <pc:docMk/>
+            <pc:sldMk cId="2849075591" sldId="257"/>
+            <ac:spMk id="60" creationId="{271A9938-21E1-E49A-C9D2-397F0E19A105}"/>
+          </ac:spMkLst>
+        </pc:spChg>
+        <pc:spChg chg="del">
+          <ac:chgData name="Zachary Randell" userId="4632875424_tp_dropbox_plus" providerId="OAuth2" clId="{94F170DD-8542-47A7-905C-5CC9F103855A}" dt="2026-07-08T22:32:29.089" v="327" actId="478"/>
+          <ac:spMkLst>
+            <pc:docMk/>
+            <pc:sldMk cId="2849075591" sldId="257"/>
+            <ac:spMk id="62" creationId="{F1AC08C8-D216-DB1A-F6BF-07960E08E22E}"/>
+          </ac:spMkLst>
+        </pc:spChg>
+        <pc:spChg chg="del">
+          <ac:chgData name="Zachary Randell" userId="4632875424_tp_dropbox_plus" providerId="OAuth2" clId="{94F170DD-8542-47A7-905C-5CC9F103855A}" dt="2026-07-08T22:32:32.451" v="329" actId="478"/>
+          <ac:spMkLst>
+            <pc:docMk/>
+            <pc:sldMk cId="2849075591" sldId="257"/>
+            <ac:spMk id="63" creationId="{3C1B6B22-2898-5C3C-E57C-2BB5F2343942}"/>
+          </ac:spMkLst>
+        </pc:spChg>
+        <pc:spChg chg="del">
+          <ac:chgData name="Zachary Randell" userId="4632875424_tp_dropbox_plus" providerId="OAuth2" clId="{94F170DD-8542-47A7-905C-5CC9F103855A}" dt="2026-07-08T22:32:30.899" v="328" actId="478"/>
+          <ac:spMkLst>
+            <pc:docMk/>
+            <pc:sldMk cId="2849075591" sldId="257"/>
+            <ac:spMk id="64" creationId="{650E410A-CD5D-1A61-3292-DA001213AD5D}"/>
+          </ac:spMkLst>
+        </pc:spChg>
+        <pc:spChg chg="del">
+          <ac:chgData name="Zachary Randell" userId="4632875424_tp_dropbox_plus" providerId="OAuth2" clId="{94F170DD-8542-47A7-905C-5CC9F103855A}" dt="2026-07-08T22:32:34.312" v="330" actId="478"/>
+          <ac:spMkLst>
+            <pc:docMk/>
+            <pc:sldMk cId="2849075591" sldId="257"/>
+            <ac:spMk id="65" creationId="{959ECC21-24EC-F657-2D6A-60B3B7E4C0ED}"/>
+          </ac:spMkLst>
+        </pc:spChg>
+        <pc:spChg chg="mod">
+          <ac:chgData name="Zachary Randell" userId="4632875424_tp_dropbox_plus" providerId="OAuth2" clId="{94F170DD-8542-47A7-905C-5CC9F103855A}" dt="2026-07-08T22:34:07.890" v="344" actId="1076"/>
+          <ac:spMkLst>
+            <pc:docMk/>
+            <pc:sldMk cId="2849075591" sldId="257"/>
+            <ac:spMk id="68" creationId="{79BD61D0-959E-B497-E02C-3EB9F0522F12}"/>
+          </ac:spMkLst>
+        </pc:spChg>
+        <pc:spChg chg="mod">
+          <ac:chgData name="Zachary Randell" userId="4632875424_tp_dropbox_plus" providerId="OAuth2" clId="{94F170DD-8542-47A7-905C-5CC9F103855A}" dt="2026-07-08T22:38:14.547" v="371" actId="1076"/>
+          <ac:spMkLst>
+            <pc:docMk/>
+            <pc:sldMk cId="2849075591" sldId="257"/>
+            <ac:spMk id="69" creationId="{64B9D493-67C1-96C3-4CB6-3AFAD023A0CA}"/>
+          </ac:spMkLst>
+        </pc:spChg>
+        <pc:spChg chg="mod">
+          <ac:chgData name="Zachary Randell" userId="4632875424_tp_dropbox_plus" providerId="OAuth2" clId="{94F170DD-8542-47A7-905C-5CC9F103855A}" dt="2026-07-08T22:05:19.882" v="92"/>
+          <ac:spMkLst>
+            <pc:docMk/>
+            <pc:sldMk cId="2849075591" sldId="257"/>
+            <ac:spMk id="70" creationId="{C6420D9F-452A-AB9A-6FD7-43630FAFF0BD}"/>
+          </ac:spMkLst>
+        </pc:spChg>
+        <pc:spChg chg="mod">
+          <ac:chgData name="Zachary Randell" userId="4632875424_tp_dropbox_plus" providerId="OAuth2" clId="{94F170DD-8542-47A7-905C-5CC9F103855A}" dt="2026-07-08T22:06:55.372" v="104" actId="20577"/>
+          <ac:spMkLst>
+            <pc:docMk/>
+            <pc:sldMk cId="2849075591" sldId="257"/>
+            <ac:spMk id="71" creationId="{6202F462-7C63-ED02-1152-EFDA60BD9D12}"/>
+          </ac:spMkLst>
+        </pc:spChg>
+        <pc:spChg chg="mod">
+          <ac:chgData name="Zachary Randell" userId="4632875424_tp_dropbox_plus" providerId="OAuth2" clId="{94F170DD-8542-47A7-905C-5CC9F103855A}" dt="2026-07-08T22:02:47.749" v="88" actId="1037"/>
+          <ac:spMkLst>
+            <pc:docMk/>
+            <pc:sldMk cId="2849075591" sldId="257"/>
+            <ac:spMk id="78" creationId="{E91C133B-30A1-21CB-283B-5EEAD131B84A}"/>
+          </ac:spMkLst>
+        </pc:spChg>
+        <pc:spChg chg="mod">
+          <ac:chgData name="Zachary Randell" userId="4632875424_tp_dropbox_plus" providerId="OAuth2" clId="{94F170DD-8542-47A7-905C-5CC9F103855A}" dt="2026-07-08T22:32:48.495" v="331"/>
+          <ac:spMkLst>
+            <pc:docMk/>
+            <pc:sldMk cId="2849075591" sldId="257"/>
+            <ac:spMk id="79" creationId="{73CE7680-C45A-D7BA-B83E-E43D93AD72B8}"/>
+          </ac:spMkLst>
+        </pc:spChg>
+        <pc:spChg chg="mod">
+          <ac:chgData name="Zachary Randell" userId="4632875424_tp_dropbox_plus" providerId="OAuth2" clId="{94F170DD-8542-47A7-905C-5CC9F103855A}" dt="2026-07-08T22:32:48.495" v="331"/>
+          <ac:spMkLst>
+            <pc:docMk/>
+            <pc:sldMk cId="2849075591" sldId="257"/>
+            <ac:spMk id="82" creationId="{25623972-3B96-AE57-9FAD-5AEEADB0F3F9}"/>
+          </ac:spMkLst>
+        </pc:spChg>
+        <pc:spChg chg="mod">
+          <ac:chgData name="Zachary Randell" userId="4632875424_tp_dropbox_plus" providerId="OAuth2" clId="{94F170DD-8542-47A7-905C-5CC9F103855A}" dt="2026-07-08T22:32:48.495" v="331"/>
+          <ac:spMkLst>
+            <pc:docMk/>
+            <pc:sldMk cId="2849075591" sldId="257"/>
+            <ac:spMk id="83" creationId="{00CF6C20-EBB8-3F93-3E2D-1E1F9F2BF75B}"/>
+          </ac:spMkLst>
+        </pc:spChg>
+        <pc:spChg chg="mod">
+          <ac:chgData name="Zachary Randell" userId="4632875424_tp_dropbox_plus" providerId="OAuth2" clId="{94F170DD-8542-47A7-905C-5CC9F103855A}" dt="2026-07-08T22:32:48.495" v="331"/>
+          <ac:spMkLst>
+            <pc:docMk/>
+            <pc:sldMk cId="2849075591" sldId="257"/>
+            <ac:spMk id="85" creationId="{D36FDA26-9526-0000-1C31-E1ECCB73F0B6}"/>
+          </ac:spMkLst>
+        </pc:spChg>
+        <pc:spChg chg="mod">
+          <ac:chgData name="Zachary Randell" userId="4632875424_tp_dropbox_plus" providerId="OAuth2" clId="{94F170DD-8542-47A7-905C-5CC9F103855A}" dt="2026-07-08T22:32:48.495" v="331"/>
+          <ac:spMkLst>
+            <pc:docMk/>
+            <pc:sldMk cId="2849075591" sldId="257"/>
+            <ac:spMk id="86" creationId="{C454720B-B084-7578-87AA-AD55F2963252}"/>
+          </ac:spMkLst>
+        </pc:spChg>
+        <pc:spChg chg="mod">
+          <ac:chgData name="Zachary Randell" userId="4632875424_tp_dropbox_plus" providerId="OAuth2" clId="{94F170DD-8542-47A7-905C-5CC9F103855A}" dt="2026-07-08T22:32:48.495" v="331"/>
+          <ac:spMkLst>
+            <pc:docMk/>
+            <pc:sldMk cId="2849075591" sldId="257"/>
+            <ac:spMk id="87" creationId="{3995B05C-ECBE-3530-3FC8-2825A9B484FC}"/>
+          </ac:spMkLst>
+        </pc:spChg>
+        <pc:spChg chg="mod">
+          <ac:chgData name="Zachary Randell" userId="4632875424_tp_dropbox_plus" providerId="OAuth2" clId="{94F170DD-8542-47A7-905C-5CC9F103855A}" dt="2026-07-08T22:05:19.882" v="92"/>
+          <ac:spMkLst>
+            <pc:docMk/>
+            <pc:sldMk cId="2849075591" sldId="257"/>
+            <ac:spMk id="90" creationId="{AD9B560E-658F-4DD6-5798-EED5E98F1253}"/>
+          </ac:spMkLst>
+        </pc:spChg>
+        <pc:spChg chg="mod">
+          <ac:chgData name="Zachary Randell" userId="4632875424_tp_dropbox_plus" providerId="OAuth2" clId="{94F170DD-8542-47A7-905C-5CC9F103855A}" dt="2026-07-08T22:32:48.495" v="331"/>
+          <ac:spMkLst>
+            <pc:docMk/>
+            <pc:sldMk cId="2849075591" sldId="257"/>
+            <ac:spMk id="102" creationId="{EEF2C8FC-3E43-9655-A99C-7CA5DB4DF1BE}"/>
+          </ac:spMkLst>
+        </pc:spChg>
+        <pc:spChg chg="mod">
+          <ac:chgData name="Zachary Randell" userId="4632875424_tp_dropbox_plus" providerId="OAuth2" clId="{94F170DD-8542-47A7-905C-5CC9F103855A}" dt="2026-07-08T22:02:47.749" v="88" actId="1037"/>
           <ac:spMkLst>
             <pc:docMk/>
             <pc:sldMk cId="2849075591" sldId="257"/>
             <ac:spMk id="140" creationId="{7922CB01-1945-35AA-F19E-3AAA3C826CFB}"/>
           </ac:spMkLst>
         </pc:spChg>
+        <pc:spChg chg="mod">
+          <ac:chgData name="Zachary Randell" userId="4632875424_tp_dropbox_plus" providerId="OAuth2" clId="{94F170DD-8542-47A7-905C-5CC9F103855A}" dt="2026-07-08T22:05:19.882" v="92"/>
+          <ac:spMkLst>
+            <pc:docMk/>
+            <pc:sldMk cId="2849075591" sldId="257"/>
+            <ac:spMk id="154" creationId="{CCF40FE6-EB8D-0E6A-43DE-EC3BD2A66285}"/>
+          </ac:spMkLst>
+        </pc:spChg>
+        <pc:spChg chg="mod">
+          <ac:chgData name="Zachary Randell" userId="4632875424_tp_dropbox_plus" providerId="OAuth2" clId="{94F170DD-8542-47A7-905C-5CC9F103855A}" dt="2026-07-08T22:05:19.882" v="92"/>
+          <ac:spMkLst>
+            <pc:docMk/>
+            <pc:sldMk cId="2849075591" sldId="257"/>
+            <ac:spMk id="155" creationId="{639B6B91-17D5-4739-C5CA-928CE3FCAD48}"/>
+          </ac:spMkLst>
+        </pc:spChg>
+        <pc:spChg chg="mod">
+          <ac:chgData name="Zachary Randell" userId="4632875424_tp_dropbox_plus" providerId="OAuth2" clId="{94F170DD-8542-47A7-905C-5CC9F103855A}" dt="2026-07-08T22:02:47.749" v="88" actId="1037"/>
+          <ac:spMkLst>
+            <pc:docMk/>
+            <pc:sldMk cId="2849075591" sldId="257"/>
+            <ac:spMk id="163" creationId="{93594748-F0A7-F194-6AD8-E692CFF9386F}"/>
+          </ac:spMkLst>
+        </pc:spChg>
+        <pc:spChg chg="mod">
+          <ac:chgData name="Zachary Randell" userId="4632875424_tp_dropbox_plus" providerId="OAuth2" clId="{94F170DD-8542-47A7-905C-5CC9F103855A}" dt="2026-07-08T22:02:47.749" v="88" actId="1037"/>
+          <ac:spMkLst>
+            <pc:docMk/>
+            <pc:sldMk cId="2849075591" sldId="257"/>
+            <ac:spMk id="164" creationId="{E8C7157C-77C9-8E7A-32CF-AFA0461251D3}"/>
+          </ac:spMkLst>
+        </pc:spChg>
+        <pc:spChg chg="mod">
+          <ac:chgData name="Zachary Randell" userId="4632875424_tp_dropbox_plus" providerId="OAuth2" clId="{94F170DD-8542-47A7-905C-5CC9F103855A}" dt="2026-07-08T22:02:47.749" v="88" actId="1037"/>
+          <ac:spMkLst>
+            <pc:docMk/>
+            <pc:sldMk cId="2849075591" sldId="257"/>
+            <ac:spMk id="165" creationId="{2524D627-7392-87F4-0C8C-959CF96221C6}"/>
+          </ac:spMkLst>
+        </pc:spChg>
+        <pc:spChg chg="mod">
+          <ac:chgData name="Zachary Randell" userId="4632875424_tp_dropbox_plus" providerId="OAuth2" clId="{94F170DD-8542-47A7-905C-5CC9F103855A}" dt="2026-07-08T22:05:19.882" v="92"/>
+          <ac:spMkLst>
+            <pc:docMk/>
+            <pc:sldMk cId="2849075591" sldId="257"/>
+            <ac:spMk id="169" creationId="{57229D9F-AC75-8443-66F7-CFDA014CC715}"/>
+          </ac:spMkLst>
+        </pc:spChg>
+        <pc:spChg chg="mod">
+          <ac:chgData name="Zachary Randell" userId="4632875424_tp_dropbox_plus" providerId="OAuth2" clId="{94F170DD-8542-47A7-905C-5CC9F103855A}" dt="2026-07-08T22:30:00.183" v="297" actId="1076"/>
+          <ac:spMkLst>
+            <pc:docMk/>
+            <pc:sldMk cId="2849075591" sldId="257"/>
+            <ac:spMk id="170" creationId="{251B9749-3E67-800F-48E0-38D480210942}"/>
+          </ac:spMkLst>
+        </pc:spChg>
+        <pc:spChg chg="mod">
+          <ac:chgData name="Zachary Randell" userId="4632875424_tp_dropbox_plus" providerId="OAuth2" clId="{94F170DD-8542-47A7-905C-5CC9F103855A}" dt="2026-07-08T22:29:21.370" v="265" actId="1076"/>
+          <ac:spMkLst>
+            <pc:docMk/>
+            <pc:sldMk cId="2849075591" sldId="257"/>
+            <ac:spMk id="174" creationId="{224B5487-9DF4-6D5A-3D9C-62583EB782EB}"/>
+          </ac:spMkLst>
+        </pc:spChg>
+        <pc:spChg chg="mod">
+          <ac:chgData name="Zachary Randell" userId="4632875424_tp_dropbox_plus" providerId="OAuth2" clId="{94F170DD-8542-47A7-905C-5CC9F103855A}" dt="2026-07-08T22:29:51.906" v="296" actId="14100"/>
+          <ac:spMkLst>
+            <pc:docMk/>
+            <pc:sldMk cId="2849075591" sldId="257"/>
+            <ac:spMk id="175" creationId="{5E43FA61-B25D-05F8-3E1D-C84EC01D92B5}"/>
+          </ac:spMkLst>
+        </pc:spChg>
+        <pc:spChg chg="mod">
+          <ac:chgData name="Zachary Randell" userId="4632875424_tp_dropbox_plus" providerId="OAuth2" clId="{94F170DD-8542-47A7-905C-5CC9F103855A}" dt="2026-07-08T22:41:50.102" v="374" actId="1076"/>
+          <ac:spMkLst>
+            <pc:docMk/>
+            <pc:sldMk cId="2849075591" sldId="257"/>
+            <ac:spMk id="176" creationId="{F76AE89C-CA19-0316-8550-FDF40A5A2785}"/>
+          </ac:spMkLst>
+        </pc:spChg>
+        <pc:spChg chg="mod">
+          <ac:chgData name="Zachary Randell" userId="4632875424_tp_dropbox_plus" providerId="OAuth2" clId="{94F170DD-8542-47A7-905C-5CC9F103855A}" dt="2026-07-08T22:30:16.270" v="299" actId="1076"/>
+          <ac:spMkLst>
+            <pc:docMk/>
+            <pc:sldMk cId="2849075591" sldId="257"/>
+            <ac:spMk id="177" creationId="{0C22FA3D-EF00-3820-BAFD-E02381EB0211}"/>
+          </ac:spMkLst>
+        </pc:spChg>
+        <pc:spChg chg="mod">
+          <ac:chgData name="Zachary Randell" userId="4632875424_tp_dropbox_plus" providerId="OAuth2" clId="{94F170DD-8542-47A7-905C-5CC9F103855A}" dt="2026-07-08T22:08:20.905" v="118" actId="1076"/>
+          <ac:spMkLst>
+            <pc:docMk/>
+            <pc:sldMk cId="2849075591" sldId="257"/>
+            <ac:spMk id="178" creationId="{D5A37988-863B-A7FB-56C9-1909012F63E7}"/>
+          </ac:spMkLst>
+        </pc:spChg>
+        <pc:spChg chg="mod">
+          <ac:chgData name="Zachary Randell" userId="4632875424_tp_dropbox_plus" providerId="OAuth2" clId="{94F170DD-8542-47A7-905C-5CC9F103855A}" dt="2026-07-08T22:30:27.951" v="301" actId="1076"/>
+          <ac:spMkLst>
+            <pc:docMk/>
+            <pc:sldMk cId="2849075591" sldId="257"/>
+            <ac:spMk id="179" creationId="{93D76120-6DFD-699C-C3F2-B3DA0611E936}"/>
+          </ac:spMkLst>
+        </pc:spChg>
+        <pc:spChg chg="mod">
+          <ac:chgData name="Zachary Randell" userId="4632875424_tp_dropbox_plus" providerId="OAuth2" clId="{94F170DD-8542-47A7-905C-5CC9F103855A}" dt="2026-07-08T22:31:29.050" v="318" actId="688"/>
+          <ac:spMkLst>
+            <pc:docMk/>
+            <pc:sldMk cId="2849075591" sldId="257"/>
+            <ac:spMk id="180" creationId="{981FD99F-0992-F8C7-1AA8-E83E169BE699}"/>
+          </ac:spMkLst>
+        </pc:spChg>
+        <pc:spChg chg="mod">
+          <ac:chgData name="Zachary Randell" userId="4632875424_tp_dropbox_plus" providerId="OAuth2" clId="{94F170DD-8542-47A7-905C-5CC9F103855A}" dt="2026-07-08T22:34:11.449" v="345" actId="1076"/>
+          <ac:spMkLst>
+            <pc:docMk/>
+            <pc:sldMk cId="2849075591" sldId="257"/>
+            <ac:spMk id="181" creationId="{1311A8DC-03E2-DF59-67CE-6AC474CA3BEF}"/>
+          </ac:spMkLst>
+        </pc:spChg>
+        <pc:spChg chg="mod">
+          <ac:chgData name="Zachary Randell" userId="4632875424_tp_dropbox_plus" providerId="OAuth2" clId="{94F170DD-8542-47A7-905C-5CC9F103855A}" dt="2026-07-08T22:05:19.882" v="92"/>
+          <ac:spMkLst>
+            <pc:docMk/>
+            <pc:sldMk cId="2849075591" sldId="257"/>
+            <ac:spMk id="184" creationId="{C58ED22F-BCFB-F1A1-7591-0FD19B0EDA9E}"/>
+          </ac:spMkLst>
+        </pc:spChg>
+        <pc:spChg chg="mod">
+          <ac:chgData name="Zachary Randell" userId="4632875424_tp_dropbox_plus" providerId="OAuth2" clId="{94F170DD-8542-47A7-905C-5CC9F103855A}" dt="2026-07-08T22:05:19.882" v="92"/>
+          <ac:spMkLst>
+            <pc:docMk/>
+            <pc:sldMk cId="2849075591" sldId="257"/>
+            <ac:spMk id="186" creationId="{3CA1ED58-31C4-B429-9EB6-9B3F9CC7AE42}"/>
+          </ac:spMkLst>
+        </pc:spChg>
+        <pc:spChg chg="mod">
+          <ac:chgData name="Zachary Randell" userId="4632875424_tp_dropbox_plus" providerId="OAuth2" clId="{94F170DD-8542-47A7-905C-5CC9F103855A}" dt="2026-07-08T22:37:18.171" v="359" actId="1076"/>
+          <ac:spMkLst>
+            <pc:docMk/>
+            <pc:sldMk cId="2849075591" sldId="257"/>
+            <ac:spMk id="188" creationId="{99BCF955-DDA2-4244-E607-E93135E6E12F}"/>
+          </ac:spMkLst>
+        </pc:spChg>
+        <pc:spChg chg="mod">
+          <ac:chgData name="Zachary Randell" userId="4632875424_tp_dropbox_plus" providerId="OAuth2" clId="{94F170DD-8542-47A7-905C-5CC9F103855A}" dt="2026-07-08T22:05:19.882" v="92"/>
+          <ac:spMkLst>
+            <pc:docMk/>
+            <pc:sldMk cId="2849075591" sldId="257"/>
+            <ac:spMk id="189" creationId="{A12D21D9-DEC0-3020-DB26-B0A94B14E139}"/>
+          </ac:spMkLst>
+        </pc:spChg>
+        <pc:spChg chg="mod">
+          <ac:chgData name="Zachary Randell" userId="4632875424_tp_dropbox_plus" providerId="OAuth2" clId="{94F170DD-8542-47A7-905C-5CC9F103855A}" dt="2026-07-08T22:02:47.749" v="88" actId="1037"/>
+          <ac:spMkLst>
+            <pc:docMk/>
+            <pc:sldMk cId="2849075591" sldId="257"/>
+            <ac:spMk id="191" creationId="{35E1479C-9137-9450-DAB6-9E7725E1F1F5}"/>
+          </ac:spMkLst>
+        </pc:spChg>
+        <pc:spChg chg="mod">
+          <ac:chgData name="Zachary Randell" userId="4632875424_tp_dropbox_plus" providerId="OAuth2" clId="{94F170DD-8542-47A7-905C-5CC9F103855A}" dt="2026-07-08T22:02:47.749" v="88" actId="1037"/>
+          <ac:spMkLst>
+            <pc:docMk/>
+            <pc:sldMk cId="2849075591" sldId="257"/>
+            <ac:spMk id="192" creationId="{D0A2D86E-531B-2D21-9120-5BAEC519BE2E}"/>
+          </ac:spMkLst>
+        </pc:spChg>
+        <pc:spChg chg="mod">
+          <ac:chgData name="Zachary Randell" userId="4632875424_tp_dropbox_plus" providerId="OAuth2" clId="{94F170DD-8542-47A7-905C-5CC9F103855A}" dt="2026-07-08T22:05:19.882" v="92"/>
+          <ac:spMkLst>
+            <pc:docMk/>
+            <pc:sldMk cId="2849075591" sldId="257"/>
+            <ac:spMk id="193" creationId="{F093F7D5-3A5D-BF47-253D-0539C84C4493}"/>
+          </ac:spMkLst>
+        </pc:spChg>
+        <pc:spChg chg="mod">
+          <ac:chgData name="Zachary Randell" userId="4632875424_tp_dropbox_plus" providerId="OAuth2" clId="{94F170DD-8542-47A7-905C-5CC9F103855A}" dt="2026-07-08T22:27:21.804" v="208" actId="692"/>
+          <ac:spMkLst>
+            <pc:docMk/>
+            <pc:sldMk cId="2849075591" sldId="257"/>
+            <ac:spMk id="195" creationId="{F403216F-772A-CE45-1C3F-8A26A3047725}"/>
+          </ac:spMkLst>
+        </pc:spChg>
+        <pc:spChg chg="mod">
+          <ac:chgData name="Zachary Randell" userId="4632875424_tp_dropbox_plus" providerId="OAuth2" clId="{94F170DD-8542-47A7-905C-5CC9F103855A}" dt="2026-07-08T22:30:40.837" v="302" actId="1076"/>
+          <ac:spMkLst>
+            <pc:docMk/>
+            <pc:sldMk cId="2849075591" sldId="257"/>
+            <ac:spMk id="197" creationId="{080C925C-3619-FB99-480C-8BEADEA1C876}"/>
+          </ac:spMkLst>
+        </pc:spChg>
+        <pc:spChg chg="add mod">
+          <ac:chgData name="Zachary Randell" userId="4632875424_tp_dropbox_plus" providerId="OAuth2" clId="{94F170DD-8542-47A7-905C-5CC9F103855A}" dt="2026-07-08T22:32:48.495" v="331"/>
+          <ac:spMkLst>
+            <pc:docMk/>
+            <pc:sldMk cId="2849075591" sldId="257"/>
+            <ac:spMk id="207" creationId="{6CB2029F-34D2-1A49-DEE3-8E9053C16C18}"/>
+          </ac:spMkLst>
+        </pc:spChg>
+        <pc:spChg chg="add mod">
+          <ac:chgData name="Zachary Randell" userId="4632875424_tp_dropbox_plus" providerId="OAuth2" clId="{94F170DD-8542-47A7-905C-5CC9F103855A}" dt="2026-07-08T22:32:48.495" v="331"/>
+          <ac:spMkLst>
+            <pc:docMk/>
+            <pc:sldMk cId="2849075591" sldId="257"/>
+            <ac:spMk id="208" creationId="{309A433E-C3D7-D9B2-C58F-28B9861BAAC6}"/>
+          </ac:spMkLst>
+        </pc:spChg>
+        <pc:spChg chg="add mod">
+          <ac:chgData name="Zachary Randell" userId="4632875424_tp_dropbox_plus" providerId="OAuth2" clId="{94F170DD-8542-47A7-905C-5CC9F103855A}" dt="2026-07-08T22:32:48.495" v="331"/>
+          <ac:spMkLst>
+            <pc:docMk/>
+            <pc:sldMk cId="2849075591" sldId="257"/>
+            <ac:spMk id="209" creationId="{218CB663-42CC-9A96-26D0-682A972200BE}"/>
+          </ac:spMkLst>
+        </pc:spChg>
+        <pc:spChg chg="add mod">
+          <ac:chgData name="Zachary Randell" userId="4632875424_tp_dropbox_plus" providerId="OAuth2" clId="{94F170DD-8542-47A7-905C-5CC9F103855A}" dt="2026-07-08T22:33:05.815" v="333" actId="1076"/>
+          <ac:spMkLst>
+            <pc:docMk/>
+            <pc:sldMk cId="2849075591" sldId="257"/>
+            <ac:spMk id="210" creationId="{F904CA26-9B1A-9B8E-0571-9F83A3E48143}"/>
+          </ac:spMkLst>
+        </pc:spChg>
+        <pc:spChg chg="add mod">
+          <ac:chgData name="Zachary Randell" userId="4632875424_tp_dropbox_plus" providerId="OAuth2" clId="{94F170DD-8542-47A7-905C-5CC9F103855A}" dt="2026-07-08T22:33:17.262" v="335" actId="1076"/>
+          <ac:spMkLst>
+            <pc:docMk/>
+            <pc:sldMk cId="2849075591" sldId="257"/>
+            <ac:spMk id="211" creationId="{E9B3412E-B3F9-5C27-BFF7-1C4754206E22}"/>
+          </ac:spMkLst>
+        </pc:spChg>
+        <pc:spChg chg="add mod">
+          <ac:chgData name="Zachary Randell" userId="4632875424_tp_dropbox_plus" providerId="OAuth2" clId="{94F170DD-8542-47A7-905C-5CC9F103855A}" dt="2026-07-08T22:33:17.262" v="335" actId="1076"/>
+          <ac:spMkLst>
+            <pc:docMk/>
+            <pc:sldMk cId="2849075591" sldId="257"/>
+            <ac:spMk id="212" creationId="{87B7528A-E860-75D9-CCA0-DAEE1CCC2ECF}"/>
+          </ac:spMkLst>
+        </pc:spChg>
+        <pc:spChg chg="add mod">
+          <ac:chgData name="Zachary Randell" userId="4632875424_tp_dropbox_plus" providerId="OAuth2" clId="{94F170DD-8542-47A7-905C-5CC9F103855A}" dt="2026-07-08T22:33:17.262" v="335" actId="1076"/>
+          <ac:spMkLst>
+            <pc:docMk/>
+            <pc:sldMk cId="2849075591" sldId="257"/>
+            <ac:spMk id="213" creationId="{7E0CD7AA-E26A-867B-BA0A-C7E4CD9E715B}"/>
+          </ac:spMkLst>
+        </pc:spChg>
+        <pc:spChg chg="add mod">
+          <ac:chgData name="Zachary Randell" userId="4632875424_tp_dropbox_plus" providerId="OAuth2" clId="{94F170DD-8542-47A7-905C-5CC9F103855A}" dt="2026-07-08T22:33:26.013" v="337" actId="1076"/>
+          <ac:spMkLst>
+            <pc:docMk/>
+            <pc:sldMk cId="2849075591" sldId="257"/>
+            <ac:spMk id="214" creationId="{E2ED6F38-A368-73CC-F62E-ED3ABCF28C0E}"/>
+          </ac:spMkLst>
+        </pc:spChg>
+        <pc:spChg chg="add mod">
+          <ac:chgData name="Zachary Randell" userId="4632875424_tp_dropbox_plus" providerId="OAuth2" clId="{94F170DD-8542-47A7-905C-5CC9F103855A}" dt="2026-07-08T22:36:27.679" v="349" actId="1076"/>
+          <ac:spMkLst>
+            <pc:docMk/>
+            <pc:sldMk cId="2849075591" sldId="257"/>
+            <ac:spMk id="215" creationId="{E17981C2-8E90-7FC8-8C06-7DB460966024}"/>
+          </ac:spMkLst>
+        </pc:spChg>
+        <pc:spChg chg="add mod">
+          <ac:chgData name="Zachary Randell" userId="4632875424_tp_dropbox_plus" providerId="OAuth2" clId="{94F170DD-8542-47A7-905C-5CC9F103855A}" dt="2026-07-08T22:36:27.679" v="349" actId="1076"/>
+          <ac:spMkLst>
+            <pc:docMk/>
+            <pc:sldMk cId="2849075591" sldId="257"/>
+            <ac:spMk id="216" creationId="{E619E826-65E6-D710-4BA3-6FA54527602C}"/>
+          </ac:spMkLst>
+        </pc:spChg>
+        <pc:spChg chg="add mod">
+          <ac:chgData name="Zachary Randell" userId="4632875424_tp_dropbox_plus" providerId="OAuth2" clId="{94F170DD-8542-47A7-905C-5CC9F103855A}" dt="2026-07-08T22:36:27.679" v="349" actId="1076"/>
+          <ac:spMkLst>
+            <pc:docMk/>
+            <pc:sldMk cId="2849075591" sldId="257"/>
+            <ac:spMk id="217" creationId="{46DC274D-A801-D442-F41A-097722E4A451}"/>
+          </ac:spMkLst>
+        </pc:spChg>
+        <pc:spChg chg="add mod">
+          <ac:chgData name="Zachary Randell" userId="4632875424_tp_dropbox_plus" providerId="OAuth2" clId="{94F170DD-8542-47A7-905C-5CC9F103855A}" dt="2026-07-08T22:36:27.679" v="349" actId="1076"/>
+          <ac:spMkLst>
+            <pc:docMk/>
+            <pc:sldMk cId="2849075591" sldId="257"/>
+            <ac:spMk id="218" creationId="{9B0AD713-2710-AE06-A13E-7B9E97E68837}"/>
+          </ac:spMkLst>
+        </pc:spChg>
+        <pc:spChg chg="add mod">
+          <ac:chgData name="Zachary Randell" userId="4632875424_tp_dropbox_plus" providerId="OAuth2" clId="{94F170DD-8542-47A7-905C-5CC9F103855A}" dt="2026-07-08T22:36:27.679" v="349" actId="1076"/>
+          <ac:spMkLst>
+            <pc:docMk/>
+            <pc:sldMk cId="2849075591" sldId="257"/>
+            <ac:spMk id="219" creationId="{BDECCE29-FFBE-D9D5-2F39-2F6E18E6444E}"/>
+          </ac:spMkLst>
+        </pc:spChg>
+        <pc:spChg chg="add mod">
+          <ac:chgData name="Zachary Randell" userId="4632875424_tp_dropbox_plus" providerId="OAuth2" clId="{94F170DD-8542-47A7-905C-5CC9F103855A}" dt="2026-07-08T22:37:27.027" v="361" actId="1076"/>
+          <ac:spMkLst>
+            <pc:docMk/>
+            <pc:sldMk cId="2849075591" sldId="257"/>
+            <ac:spMk id="220" creationId="{E8D84639-F51D-FC2F-5288-60BA38F6217B}"/>
+          </ac:spMkLst>
+        </pc:spChg>
+        <pc:spChg chg="add mod">
+          <ac:chgData name="Zachary Randell" userId="4632875424_tp_dropbox_plus" providerId="OAuth2" clId="{94F170DD-8542-47A7-905C-5CC9F103855A}" dt="2026-07-08T22:37:39.851" v="363"/>
+          <ac:spMkLst>
+            <pc:docMk/>
+            <pc:sldMk cId="2849075591" sldId="257"/>
+            <ac:spMk id="221" creationId="{C1C3813F-35AA-4F8F-B979-4324C5D49B70}"/>
+          </ac:spMkLst>
+        </pc:spChg>
+        <pc:spChg chg="add mod">
+          <ac:chgData name="Zachary Randell" userId="4632875424_tp_dropbox_plus" providerId="OAuth2" clId="{94F170DD-8542-47A7-905C-5CC9F103855A}" dt="2026-07-08T22:37:39.851" v="363"/>
+          <ac:spMkLst>
+            <pc:docMk/>
+            <pc:sldMk cId="2849075591" sldId="257"/>
+            <ac:spMk id="222" creationId="{564B3B1C-2B05-03F8-A0C3-3CB828AA01AC}"/>
+          </ac:spMkLst>
+        </pc:spChg>
+        <pc:spChg chg="add mod">
+          <ac:chgData name="Zachary Randell" userId="4632875424_tp_dropbox_plus" providerId="OAuth2" clId="{94F170DD-8542-47A7-905C-5CC9F103855A}" dt="2026-07-08T22:37:52.498" v="367" actId="1076"/>
+          <ac:spMkLst>
+            <pc:docMk/>
+            <pc:sldMk cId="2849075591" sldId="257"/>
+            <ac:spMk id="223" creationId="{96784F57-6DDB-F1E3-DA1A-FAAE8627EF27}"/>
+          </ac:spMkLst>
+        </pc:spChg>
+        <pc:spChg chg="add del mod">
+          <ac:chgData name="Zachary Randell" userId="4632875424_tp_dropbox_plus" providerId="OAuth2" clId="{94F170DD-8542-47A7-905C-5CC9F103855A}" dt="2026-07-08T22:37:55.830" v="368" actId="478"/>
+          <ac:spMkLst>
+            <pc:docMk/>
+            <pc:sldMk cId="2849075591" sldId="257"/>
+            <ac:spMk id="224" creationId="{F03288CA-BAF8-BEA7-9DC3-DF263BFB13C6}"/>
+          </ac:spMkLst>
+        </pc:spChg>
+        <pc:spChg chg="add mod">
+          <ac:chgData name="Zachary Randell" userId="4632875424_tp_dropbox_plus" providerId="OAuth2" clId="{94F170DD-8542-47A7-905C-5CC9F103855A}" dt="2026-07-08T22:38:07.046" v="370" actId="1076"/>
+          <ac:spMkLst>
+            <pc:docMk/>
+            <pc:sldMk cId="2849075591" sldId="257"/>
+            <ac:spMk id="225" creationId="{D7C5B2B9-1844-E39F-A738-72289CC32AB9}"/>
+          </ac:spMkLst>
+        </pc:spChg>
+        <pc:spChg chg="add mod">
+          <ac:chgData name="Zachary Randell" userId="4632875424_tp_dropbox_plus" providerId="OAuth2" clId="{94F170DD-8542-47A7-905C-5CC9F103855A}" dt="2026-07-08T22:38:07.046" v="370" actId="1076"/>
+          <ac:spMkLst>
+            <pc:docMk/>
+            <pc:sldMk cId="2849075591" sldId="257"/>
+            <ac:spMk id="226" creationId="{D0CD8B7E-DD3B-CEFB-CFD5-DB3445135E40}"/>
+          </ac:spMkLst>
+        </pc:spChg>
+        <pc:spChg chg="add mod">
+          <ac:chgData name="Zachary Randell" userId="4632875424_tp_dropbox_plus" providerId="OAuth2" clId="{94F170DD-8542-47A7-905C-5CC9F103855A}" dt="2026-07-08T22:38:20.572" v="373" actId="1076"/>
+          <ac:spMkLst>
+            <pc:docMk/>
+            <pc:sldMk cId="2849075591" sldId="257"/>
+            <ac:spMk id="227" creationId="{1798572C-FB70-EEF2-F3FA-720B930E11A1}"/>
+          </ac:spMkLst>
+        </pc:spChg>
+        <pc:grpChg chg="del">
+          <ac:chgData name="Zachary Randell" userId="4632875424_tp_dropbox_plus" providerId="OAuth2" clId="{94F170DD-8542-47A7-905C-5CC9F103855A}" dt="2026-07-08T22:32:32.451" v="329" actId="478"/>
+          <ac:grpSpMkLst>
+            <pc:docMk/>
+            <pc:sldMk cId="2849075591" sldId="257"/>
+            <ac:grpSpMk id="61" creationId="{18E167C0-94D7-5A98-3055-6D08EFD01011}"/>
+          </ac:grpSpMkLst>
+        </pc:grpChg>
+        <pc:grpChg chg="del">
+          <ac:chgData name="Zachary Randell" userId="4632875424_tp_dropbox_plus" providerId="OAuth2" clId="{94F170DD-8542-47A7-905C-5CC9F103855A}" dt="2026-07-08T22:36:01.927" v="347" actId="478"/>
+          <ac:grpSpMkLst>
+            <pc:docMk/>
+            <pc:sldMk cId="2849075591" sldId="257"/>
+            <ac:grpSpMk id="152" creationId="{9C19FC45-9CFF-A7FC-A4EF-37FB2A3031B0}"/>
+          </ac:grpSpMkLst>
+        </pc:grpChg>
+        <pc:grpChg chg="del">
+          <ac:chgData name="Zachary Randell" userId="4632875424_tp_dropbox_plus" providerId="OAuth2" clId="{94F170DD-8542-47A7-905C-5CC9F103855A}" dt="2026-07-08T22:37:39.061" v="362" actId="478"/>
+          <ac:grpSpMkLst>
+            <pc:docMk/>
+            <pc:sldMk cId="2849075591" sldId="257"/>
+            <ac:grpSpMk id="158" creationId="{5E52FF83-AD58-BAE0-1C33-10976D596311}"/>
+          </ac:grpSpMkLst>
+        </pc:grpChg>
+        <pc:grpChg chg="mod">
+          <ac:chgData name="Zachary Randell" userId="4632875424_tp_dropbox_plus" providerId="OAuth2" clId="{94F170DD-8542-47A7-905C-5CC9F103855A}" dt="2026-07-08T22:37:47.091" v="366" actId="1076"/>
+          <ac:grpSpMkLst>
+            <pc:docMk/>
+            <pc:sldMk cId="2849075591" sldId="257"/>
+            <ac:grpSpMk id="190" creationId="{84B37B98-A221-73BA-CA61-8102598DD62C}"/>
+          </ac:grpSpMkLst>
+        </pc:grpChg>
+        <pc:grpChg chg="mod">
+          <ac:chgData name="Zachary Randell" userId="4632875424_tp_dropbox_plus" providerId="OAuth2" clId="{94F170DD-8542-47A7-905C-5CC9F103855A}" dt="2026-07-08T22:30:50.587" v="314" actId="1035"/>
+          <ac:grpSpMkLst>
+            <pc:docMk/>
+            <pc:sldMk cId="2849075591" sldId="257"/>
+            <ac:grpSpMk id="196" creationId="{38C89B93-8867-0EF3-51A5-69464A21CE39}"/>
+          </ac:grpSpMkLst>
+        </pc:grpChg>
+        <pc:picChg chg="del">
+          <ac:chgData name="Zachary Randell" userId="4632875424_tp_dropbox_plus" providerId="OAuth2" clId="{94F170DD-8542-47A7-905C-5CC9F103855A}" dt="2026-07-08T22:00:45.775" v="11" actId="478"/>
+          <ac:picMkLst>
+            <pc:docMk/>
+            <pc:sldMk cId="2849075591" sldId="257"/>
+            <ac:picMk id="171" creationId="{351EBC78-D79F-E8D3-335B-2283E7A6D3E2}"/>
+          </ac:picMkLst>
+        </pc:picChg>
+        <pc:picChg chg="del">
+          <ac:chgData name="Zachary Randell" userId="4632875424_tp_dropbox_plus" providerId="OAuth2" clId="{94F170DD-8542-47A7-905C-5CC9F103855A}" dt="2026-07-08T22:00:47.475" v="12" actId="478"/>
+          <ac:picMkLst>
+            <pc:docMk/>
+            <pc:sldMk cId="2849075591" sldId="257"/>
+            <ac:picMk id="172" creationId="{AC7A8F1F-75AA-05FD-2918-D5B9102F4CEE}"/>
+          </ac:picMkLst>
+        </pc:picChg>
+        <pc:picChg chg="del">
+          <ac:chgData name="Zachary Randell" userId="4632875424_tp_dropbox_plus" providerId="OAuth2" clId="{94F170DD-8542-47A7-905C-5CC9F103855A}" dt="2026-07-08T22:00:49.278" v="13" actId="478"/>
+          <ac:picMkLst>
+            <pc:docMk/>
+            <pc:sldMk cId="2849075591" sldId="257"/>
+            <ac:picMk id="173" creationId="{9602297B-9890-1291-9C8F-02EB6DCD4F5A}"/>
+          </ac:picMkLst>
+        </pc:picChg>
       </pc:sldChg>
+      <pc:sldMasterChg chg="modSp modSldLayout">
+        <pc:chgData name="Zachary Randell" userId="4632875424_tp_dropbox_plus" providerId="OAuth2" clId="{94F170DD-8542-47A7-905C-5CC9F103855A}" dt="2026-07-08T22:05:19.882" v="92"/>
+        <pc:sldMasterMkLst>
+          <pc:docMk/>
+          <pc:sldMasterMk cId="1580284056" sldId="2147483648"/>
+        </pc:sldMasterMkLst>
+        <pc:spChg chg="mod">
+          <ac:chgData name="Zachary Randell" userId="4632875424_tp_dropbox_plus" providerId="OAuth2" clId="{94F170DD-8542-47A7-905C-5CC9F103855A}" dt="2026-07-08T22:05:19.882" v="92"/>
+          <ac:spMkLst>
+            <pc:docMk/>
+            <pc:sldMasterMk cId="1580284056" sldId="2147483648"/>
+            <ac:spMk id="2" creationId="{DAF09356-AC00-2248-FAD8-139CDAB0B8C1}"/>
+          </ac:spMkLst>
+        </pc:spChg>
+        <pc:spChg chg="mod">
+          <ac:chgData name="Zachary Randell" userId="4632875424_tp_dropbox_plus" providerId="OAuth2" clId="{94F170DD-8542-47A7-905C-5CC9F103855A}" dt="2026-07-08T22:05:19.882" v="92"/>
+          <ac:spMkLst>
+            <pc:docMk/>
+            <pc:sldMasterMk cId="1580284056" sldId="2147483648"/>
+            <ac:spMk id="3" creationId="{C3F43D1F-96B9-3F1E-A247-D3CBD08632E8}"/>
+          </ac:spMkLst>
+        </pc:spChg>
+        <pc:spChg chg="mod">
+          <ac:chgData name="Zachary Randell" userId="4632875424_tp_dropbox_plus" providerId="OAuth2" clId="{94F170DD-8542-47A7-905C-5CC9F103855A}" dt="2026-07-08T22:05:19.882" v="92"/>
+          <ac:spMkLst>
+            <pc:docMk/>
+            <pc:sldMasterMk cId="1580284056" sldId="2147483648"/>
+            <ac:spMk id="4" creationId="{7FBCB3C1-3133-6926-CEB1-E4B9E5F2CC8F}"/>
+          </ac:spMkLst>
+        </pc:spChg>
+        <pc:spChg chg="mod">
+          <ac:chgData name="Zachary Randell" userId="4632875424_tp_dropbox_plus" providerId="OAuth2" clId="{94F170DD-8542-47A7-905C-5CC9F103855A}" dt="2026-07-08T22:05:19.882" v="92"/>
+          <ac:spMkLst>
+            <pc:docMk/>
+            <pc:sldMasterMk cId="1580284056" sldId="2147483648"/>
+            <ac:spMk id="5" creationId="{B6C063FE-BB49-AC04-787E-E63D968BB8CE}"/>
+          </ac:spMkLst>
+        </pc:spChg>
+        <pc:spChg chg="mod">
+          <ac:chgData name="Zachary Randell" userId="4632875424_tp_dropbox_plus" providerId="OAuth2" clId="{94F170DD-8542-47A7-905C-5CC9F103855A}" dt="2026-07-08T22:05:19.882" v="92"/>
+          <ac:spMkLst>
+            <pc:docMk/>
+            <pc:sldMasterMk cId="1580284056" sldId="2147483648"/>
+            <ac:spMk id="6" creationId="{70C4F7C2-9C48-C204-32EB-E2BA5565742E}"/>
+          </ac:spMkLst>
+        </pc:spChg>
+        <pc:sldLayoutChg chg="modSp">
+          <pc:chgData name="Zachary Randell" userId="4632875424_tp_dropbox_plus" providerId="OAuth2" clId="{94F170DD-8542-47A7-905C-5CC9F103855A}" dt="2026-07-08T22:05:19.882" v="92"/>
+          <pc:sldLayoutMkLst>
+            <pc:docMk/>
+            <pc:sldMasterMk cId="1580284056" sldId="2147483648"/>
+            <pc:sldLayoutMk cId="383430719" sldId="2147483649"/>
+          </pc:sldLayoutMkLst>
+          <pc:spChg chg="mod">
+            <ac:chgData name="Zachary Randell" userId="4632875424_tp_dropbox_plus" providerId="OAuth2" clId="{94F170DD-8542-47A7-905C-5CC9F103855A}" dt="2026-07-08T22:05:19.882" v="92"/>
+            <ac:spMkLst>
+              <pc:docMk/>
+              <pc:sldMasterMk cId="1580284056" sldId="2147483648"/>
+              <pc:sldLayoutMk cId="383430719" sldId="2147483649"/>
+              <ac:spMk id="2" creationId="{A2A7A047-71D4-CF28-2BF4-2B508E57D1C3}"/>
+            </ac:spMkLst>
+          </pc:spChg>
+          <pc:spChg chg="mod">
+            <ac:chgData name="Zachary Randell" userId="4632875424_tp_dropbox_plus" providerId="OAuth2" clId="{94F170DD-8542-47A7-905C-5CC9F103855A}" dt="2026-07-08T22:05:19.882" v="92"/>
+            <ac:spMkLst>
+              <pc:docMk/>
+              <pc:sldMasterMk cId="1580284056" sldId="2147483648"/>
+              <pc:sldLayoutMk cId="383430719" sldId="2147483649"/>
+              <ac:spMk id="3" creationId="{E75D9E69-8B4A-8ACD-A6ED-91FD6C01DAAC}"/>
+            </ac:spMkLst>
+          </pc:spChg>
+        </pc:sldLayoutChg>
+        <pc:sldLayoutChg chg="modSp">
+          <pc:chgData name="Zachary Randell" userId="4632875424_tp_dropbox_plus" providerId="OAuth2" clId="{94F170DD-8542-47A7-905C-5CC9F103855A}" dt="2026-07-08T22:05:19.882" v="92"/>
+          <pc:sldLayoutMkLst>
+            <pc:docMk/>
+            <pc:sldMasterMk cId="1580284056" sldId="2147483648"/>
+            <pc:sldLayoutMk cId="4180776640" sldId="2147483651"/>
+          </pc:sldLayoutMkLst>
+          <pc:spChg chg="mod">
+            <ac:chgData name="Zachary Randell" userId="4632875424_tp_dropbox_plus" providerId="OAuth2" clId="{94F170DD-8542-47A7-905C-5CC9F103855A}" dt="2026-07-08T22:05:19.882" v="92"/>
+            <ac:spMkLst>
+              <pc:docMk/>
+              <pc:sldMasterMk cId="1580284056" sldId="2147483648"/>
+              <pc:sldLayoutMk cId="4180776640" sldId="2147483651"/>
+              <ac:spMk id="2" creationId="{C734BE9E-6DDC-91F5-E15E-CF82C0100BD2}"/>
+            </ac:spMkLst>
+          </pc:spChg>
+          <pc:spChg chg="mod">
+            <ac:chgData name="Zachary Randell" userId="4632875424_tp_dropbox_plus" providerId="OAuth2" clId="{94F170DD-8542-47A7-905C-5CC9F103855A}" dt="2026-07-08T22:05:19.882" v="92"/>
+            <ac:spMkLst>
+              <pc:docMk/>
+              <pc:sldMasterMk cId="1580284056" sldId="2147483648"/>
+              <pc:sldLayoutMk cId="4180776640" sldId="2147483651"/>
+              <ac:spMk id="3" creationId="{05135131-4F76-6D11-CCA3-CBF991CEDC57}"/>
+            </ac:spMkLst>
+          </pc:spChg>
+        </pc:sldLayoutChg>
+        <pc:sldLayoutChg chg="modSp">
+          <pc:chgData name="Zachary Randell" userId="4632875424_tp_dropbox_plus" providerId="OAuth2" clId="{94F170DD-8542-47A7-905C-5CC9F103855A}" dt="2026-07-08T22:05:19.882" v="92"/>
+          <pc:sldLayoutMkLst>
+            <pc:docMk/>
+            <pc:sldMasterMk cId="1580284056" sldId="2147483648"/>
+            <pc:sldLayoutMk cId="1670312656" sldId="2147483652"/>
+          </pc:sldLayoutMkLst>
+          <pc:spChg chg="mod">
+            <ac:chgData name="Zachary Randell" userId="4632875424_tp_dropbox_plus" providerId="OAuth2" clId="{94F170DD-8542-47A7-905C-5CC9F103855A}" dt="2026-07-08T22:05:19.882" v="92"/>
+            <ac:spMkLst>
+              <pc:docMk/>
+              <pc:sldMasterMk cId="1580284056" sldId="2147483648"/>
+              <pc:sldLayoutMk cId="1670312656" sldId="2147483652"/>
+              <ac:spMk id="3" creationId="{20EDA6FE-1E0A-38DC-4EAD-96A264AF28BD}"/>
+            </ac:spMkLst>
+          </pc:spChg>
+          <pc:spChg chg="mod">
+            <ac:chgData name="Zachary Randell" userId="4632875424_tp_dropbox_plus" providerId="OAuth2" clId="{94F170DD-8542-47A7-905C-5CC9F103855A}" dt="2026-07-08T22:05:19.882" v="92"/>
+            <ac:spMkLst>
+              <pc:docMk/>
+              <pc:sldMasterMk cId="1580284056" sldId="2147483648"/>
+              <pc:sldLayoutMk cId="1670312656" sldId="2147483652"/>
+              <ac:spMk id="4" creationId="{01A19CAE-0FE8-6F29-7DE5-26D3CDE7689B}"/>
+            </ac:spMkLst>
+          </pc:spChg>
+        </pc:sldLayoutChg>
+        <pc:sldLayoutChg chg="modSp">
+          <pc:chgData name="Zachary Randell" userId="4632875424_tp_dropbox_plus" providerId="OAuth2" clId="{94F170DD-8542-47A7-905C-5CC9F103855A}" dt="2026-07-08T22:05:19.882" v="92"/>
+          <pc:sldLayoutMkLst>
+            <pc:docMk/>
+            <pc:sldMasterMk cId="1580284056" sldId="2147483648"/>
+            <pc:sldLayoutMk cId="2491723160" sldId="2147483653"/>
+          </pc:sldLayoutMkLst>
+          <pc:spChg chg="mod">
+            <ac:chgData name="Zachary Randell" userId="4632875424_tp_dropbox_plus" providerId="OAuth2" clId="{94F170DD-8542-47A7-905C-5CC9F103855A}" dt="2026-07-08T22:05:19.882" v="92"/>
+            <ac:spMkLst>
+              <pc:docMk/>
+              <pc:sldMasterMk cId="1580284056" sldId="2147483648"/>
+              <pc:sldLayoutMk cId="2491723160" sldId="2147483653"/>
+              <ac:spMk id="2" creationId="{63AB965B-663F-E2DC-C7C4-9DA2B81B53EB}"/>
+            </ac:spMkLst>
+          </pc:spChg>
+          <pc:spChg chg="mod">
+            <ac:chgData name="Zachary Randell" userId="4632875424_tp_dropbox_plus" providerId="OAuth2" clId="{94F170DD-8542-47A7-905C-5CC9F103855A}" dt="2026-07-08T22:05:19.882" v="92"/>
+            <ac:spMkLst>
+              <pc:docMk/>
+              <pc:sldMasterMk cId="1580284056" sldId="2147483648"/>
+              <pc:sldLayoutMk cId="2491723160" sldId="2147483653"/>
+              <ac:spMk id="3" creationId="{A7662A1E-ADEC-09BC-B2A2-FB48CF64E902}"/>
+            </ac:spMkLst>
+          </pc:spChg>
+          <pc:spChg chg="mod">
+            <ac:chgData name="Zachary Randell" userId="4632875424_tp_dropbox_plus" providerId="OAuth2" clId="{94F170DD-8542-47A7-905C-5CC9F103855A}" dt="2026-07-08T22:05:19.882" v="92"/>
+            <ac:spMkLst>
+              <pc:docMk/>
+              <pc:sldMasterMk cId="1580284056" sldId="2147483648"/>
+              <pc:sldLayoutMk cId="2491723160" sldId="2147483653"/>
+              <ac:spMk id="4" creationId="{491C07BB-0C61-6A52-EFCE-C45301D3EC95}"/>
+            </ac:spMkLst>
+          </pc:spChg>
+          <pc:spChg chg="mod">
+            <ac:chgData name="Zachary Randell" userId="4632875424_tp_dropbox_plus" providerId="OAuth2" clId="{94F170DD-8542-47A7-905C-5CC9F103855A}" dt="2026-07-08T22:05:19.882" v="92"/>
+            <ac:spMkLst>
+              <pc:docMk/>
+              <pc:sldMasterMk cId="1580284056" sldId="2147483648"/>
+              <pc:sldLayoutMk cId="2491723160" sldId="2147483653"/>
+              <ac:spMk id="5" creationId="{C6416D0D-C6D5-A2F4-5A37-9EFA2DA1DEDC}"/>
+            </ac:spMkLst>
+          </pc:spChg>
+          <pc:spChg chg="mod">
+            <ac:chgData name="Zachary Randell" userId="4632875424_tp_dropbox_plus" providerId="OAuth2" clId="{94F170DD-8542-47A7-905C-5CC9F103855A}" dt="2026-07-08T22:05:19.882" v="92"/>
+            <ac:spMkLst>
+              <pc:docMk/>
+              <pc:sldMasterMk cId="1580284056" sldId="2147483648"/>
+              <pc:sldLayoutMk cId="2491723160" sldId="2147483653"/>
+              <ac:spMk id="6" creationId="{360D8408-F737-CBD7-1FB3-6FF452DE74F9}"/>
+            </ac:spMkLst>
+          </pc:spChg>
+        </pc:sldLayoutChg>
+        <pc:sldLayoutChg chg="modSp">
+          <pc:chgData name="Zachary Randell" userId="4632875424_tp_dropbox_plus" providerId="OAuth2" clId="{94F170DD-8542-47A7-905C-5CC9F103855A}" dt="2026-07-08T22:05:19.882" v="92"/>
+          <pc:sldLayoutMkLst>
+            <pc:docMk/>
+            <pc:sldMasterMk cId="1580284056" sldId="2147483648"/>
+            <pc:sldLayoutMk cId="3680763432" sldId="2147483656"/>
+          </pc:sldLayoutMkLst>
+          <pc:spChg chg="mod">
+            <ac:chgData name="Zachary Randell" userId="4632875424_tp_dropbox_plus" providerId="OAuth2" clId="{94F170DD-8542-47A7-905C-5CC9F103855A}" dt="2026-07-08T22:05:19.882" v="92"/>
+            <ac:spMkLst>
+              <pc:docMk/>
+              <pc:sldMasterMk cId="1580284056" sldId="2147483648"/>
+              <pc:sldLayoutMk cId="3680763432" sldId="2147483656"/>
+              <ac:spMk id="2" creationId="{86BF5BF1-7636-9724-F699-A23E1CE4406A}"/>
+            </ac:spMkLst>
+          </pc:spChg>
+          <pc:spChg chg="mod">
+            <ac:chgData name="Zachary Randell" userId="4632875424_tp_dropbox_plus" providerId="OAuth2" clId="{94F170DD-8542-47A7-905C-5CC9F103855A}" dt="2026-07-08T22:05:19.882" v="92"/>
+            <ac:spMkLst>
+              <pc:docMk/>
+              <pc:sldMasterMk cId="1580284056" sldId="2147483648"/>
+              <pc:sldLayoutMk cId="3680763432" sldId="2147483656"/>
+              <ac:spMk id="3" creationId="{A17D4C17-B416-055E-3618-436A8E1A1BB3}"/>
+            </ac:spMkLst>
+          </pc:spChg>
+          <pc:spChg chg="mod">
+            <ac:chgData name="Zachary Randell" userId="4632875424_tp_dropbox_plus" providerId="OAuth2" clId="{94F170DD-8542-47A7-905C-5CC9F103855A}" dt="2026-07-08T22:05:19.882" v="92"/>
+            <ac:spMkLst>
+              <pc:docMk/>
+              <pc:sldMasterMk cId="1580284056" sldId="2147483648"/>
+              <pc:sldLayoutMk cId="3680763432" sldId="2147483656"/>
+              <ac:spMk id="4" creationId="{6C22AD26-6138-F98C-781C-5D51BFD6D29E}"/>
+            </ac:spMkLst>
+          </pc:spChg>
+        </pc:sldLayoutChg>
+        <pc:sldLayoutChg chg="modSp">
+          <pc:chgData name="Zachary Randell" userId="4632875424_tp_dropbox_plus" providerId="OAuth2" clId="{94F170DD-8542-47A7-905C-5CC9F103855A}" dt="2026-07-08T22:05:19.882" v="92"/>
+          <pc:sldLayoutMkLst>
+            <pc:docMk/>
+            <pc:sldMasterMk cId="1580284056" sldId="2147483648"/>
+            <pc:sldLayoutMk cId="165316123" sldId="2147483657"/>
+          </pc:sldLayoutMkLst>
+          <pc:spChg chg="mod">
+            <ac:chgData name="Zachary Randell" userId="4632875424_tp_dropbox_plus" providerId="OAuth2" clId="{94F170DD-8542-47A7-905C-5CC9F103855A}" dt="2026-07-08T22:05:19.882" v="92"/>
+            <ac:spMkLst>
+              <pc:docMk/>
+              <pc:sldMasterMk cId="1580284056" sldId="2147483648"/>
+              <pc:sldLayoutMk cId="165316123" sldId="2147483657"/>
+              <ac:spMk id="2" creationId="{46971730-AC49-ED7A-D5C5-FE61C9965616}"/>
+            </ac:spMkLst>
+          </pc:spChg>
+          <pc:spChg chg="mod">
+            <ac:chgData name="Zachary Randell" userId="4632875424_tp_dropbox_plus" providerId="OAuth2" clId="{94F170DD-8542-47A7-905C-5CC9F103855A}" dt="2026-07-08T22:05:19.882" v="92"/>
+            <ac:spMkLst>
+              <pc:docMk/>
+              <pc:sldMasterMk cId="1580284056" sldId="2147483648"/>
+              <pc:sldLayoutMk cId="165316123" sldId="2147483657"/>
+              <ac:spMk id="3" creationId="{F8D57CDA-41F5-B48A-06D1-43B6B47F0B44}"/>
+            </ac:spMkLst>
+          </pc:spChg>
+          <pc:spChg chg="mod">
+            <ac:chgData name="Zachary Randell" userId="4632875424_tp_dropbox_plus" providerId="OAuth2" clId="{94F170DD-8542-47A7-905C-5CC9F103855A}" dt="2026-07-08T22:05:19.882" v="92"/>
+            <ac:spMkLst>
+              <pc:docMk/>
+              <pc:sldMasterMk cId="1580284056" sldId="2147483648"/>
+              <pc:sldLayoutMk cId="165316123" sldId="2147483657"/>
+              <ac:spMk id="4" creationId="{9ABD4881-9B79-BE8D-57A8-9011F6D32EE8}"/>
+            </ac:spMkLst>
+          </pc:spChg>
+        </pc:sldLayoutChg>
+        <pc:sldLayoutChg chg="modSp">
+          <pc:chgData name="Zachary Randell" userId="4632875424_tp_dropbox_plus" providerId="OAuth2" clId="{94F170DD-8542-47A7-905C-5CC9F103855A}" dt="2026-07-08T22:05:19.882" v="92"/>
+          <pc:sldLayoutMkLst>
+            <pc:docMk/>
+            <pc:sldMasterMk cId="1580284056" sldId="2147483648"/>
+            <pc:sldLayoutMk cId="657761579" sldId="2147483659"/>
+          </pc:sldLayoutMkLst>
+          <pc:spChg chg="mod">
+            <ac:chgData name="Zachary Randell" userId="4632875424_tp_dropbox_plus" providerId="OAuth2" clId="{94F170DD-8542-47A7-905C-5CC9F103855A}" dt="2026-07-08T22:05:19.882" v="92"/>
+            <ac:spMkLst>
+              <pc:docMk/>
+              <pc:sldMasterMk cId="1580284056" sldId="2147483648"/>
+              <pc:sldLayoutMk cId="657761579" sldId="2147483659"/>
+              <ac:spMk id="2" creationId="{0158DAD5-A320-6D6A-3210-9358C9D55FE0}"/>
+            </ac:spMkLst>
+          </pc:spChg>
+          <pc:spChg chg="mod">
+            <ac:chgData name="Zachary Randell" userId="4632875424_tp_dropbox_plus" providerId="OAuth2" clId="{94F170DD-8542-47A7-905C-5CC9F103855A}" dt="2026-07-08T22:05:19.882" v="92"/>
+            <ac:spMkLst>
+              <pc:docMk/>
+              <pc:sldMasterMk cId="1580284056" sldId="2147483648"/>
+              <pc:sldLayoutMk cId="657761579" sldId="2147483659"/>
+              <ac:spMk id="3" creationId="{6B493F8D-DDBF-A3A2-9195-39841FC03450}"/>
+            </ac:spMkLst>
+          </pc:spChg>
+        </pc:sldLayoutChg>
+      </pc:sldMasterChg>
+      <pc:sldMasterChg chg="modSp modSldLayout">
+        <pc:chgData name="Zachary Randell" userId="4632875424_tp_dropbox_plus" providerId="OAuth2" clId="{94F170DD-8542-47A7-905C-5CC9F103855A}" dt="2026-07-08T22:05:19.604" v="91"/>
+        <pc:sldMasterMkLst>
+          <pc:docMk/>
+          <pc:sldMasterMk cId="736395924" sldId="2147483660"/>
+        </pc:sldMasterMkLst>
+        <pc:spChg chg="mod">
+          <ac:chgData name="Zachary Randell" userId="4632875424_tp_dropbox_plus" providerId="OAuth2" clId="{94F170DD-8542-47A7-905C-5CC9F103855A}" dt="2026-07-08T22:05:19.604" v="91"/>
+          <ac:spMkLst>
+            <pc:docMk/>
+            <pc:sldMasterMk cId="736395924" sldId="2147483660"/>
+            <ac:spMk id="2" creationId="{00000000-0000-0000-0000-000000000000}"/>
+          </ac:spMkLst>
+        </pc:spChg>
+        <pc:spChg chg="mod">
+          <ac:chgData name="Zachary Randell" userId="4632875424_tp_dropbox_plus" providerId="OAuth2" clId="{94F170DD-8542-47A7-905C-5CC9F103855A}" dt="2026-07-08T22:05:19.604" v="91"/>
+          <ac:spMkLst>
+            <pc:docMk/>
+            <pc:sldMasterMk cId="736395924" sldId="2147483660"/>
+            <ac:spMk id="3" creationId="{00000000-0000-0000-0000-000000000000}"/>
+          </ac:spMkLst>
+        </pc:spChg>
+        <pc:spChg chg="mod">
+          <ac:chgData name="Zachary Randell" userId="4632875424_tp_dropbox_plus" providerId="OAuth2" clId="{94F170DD-8542-47A7-905C-5CC9F103855A}" dt="2026-07-08T22:05:19.604" v="91"/>
+          <ac:spMkLst>
+            <pc:docMk/>
+            <pc:sldMasterMk cId="736395924" sldId="2147483660"/>
+            <ac:spMk id="4" creationId="{00000000-0000-0000-0000-000000000000}"/>
+          </ac:spMkLst>
+        </pc:spChg>
+        <pc:spChg chg="mod">
+          <ac:chgData name="Zachary Randell" userId="4632875424_tp_dropbox_plus" providerId="OAuth2" clId="{94F170DD-8542-47A7-905C-5CC9F103855A}" dt="2026-07-08T22:05:19.604" v="91"/>
+          <ac:spMkLst>
+            <pc:docMk/>
+            <pc:sldMasterMk cId="736395924" sldId="2147483660"/>
+            <ac:spMk id="5" creationId="{00000000-0000-0000-0000-000000000000}"/>
+          </ac:spMkLst>
+        </pc:spChg>
+        <pc:spChg chg="mod">
+          <ac:chgData name="Zachary Randell" userId="4632875424_tp_dropbox_plus" providerId="OAuth2" clId="{94F170DD-8542-47A7-905C-5CC9F103855A}" dt="2026-07-08T22:05:19.604" v="91"/>
+          <ac:spMkLst>
+            <pc:docMk/>
+            <pc:sldMasterMk cId="736395924" sldId="2147483660"/>
+            <ac:spMk id="6" creationId="{00000000-0000-0000-0000-000000000000}"/>
+          </ac:spMkLst>
+        </pc:spChg>
+        <pc:sldLayoutChg chg="modSp">
+          <pc:chgData name="Zachary Randell" userId="4632875424_tp_dropbox_plus" providerId="OAuth2" clId="{94F170DD-8542-47A7-905C-5CC9F103855A}" dt="2026-07-08T22:05:19.604" v="91"/>
+          <pc:sldLayoutMkLst>
+            <pc:docMk/>
+            <pc:sldMasterMk cId="736395924" sldId="2147483660"/>
+            <pc:sldLayoutMk cId="679561916" sldId="2147483661"/>
+          </pc:sldLayoutMkLst>
+          <pc:spChg chg="mod">
+            <ac:chgData name="Zachary Randell" userId="4632875424_tp_dropbox_plus" providerId="OAuth2" clId="{94F170DD-8542-47A7-905C-5CC9F103855A}" dt="2026-07-08T22:05:19.604" v="91"/>
+            <ac:spMkLst>
+              <pc:docMk/>
+              <pc:sldMasterMk cId="736395924" sldId="2147483660"/>
+              <pc:sldLayoutMk cId="679561916" sldId="2147483661"/>
+              <ac:spMk id="2" creationId="{00000000-0000-0000-0000-000000000000}"/>
+            </ac:spMkLst>
+          </pc:spChg>
+          <pc:spChg chg="mod">
+            <ac:chgData name="Zachary Randell" userId="4632875424_tp_dropbox_plus" providerId="OAuth2" clId="{94F170DD-8542-47A7-905C-5CC9F103855A}" dt="2026-07-08T22:05:19.604" v="91"/>
+            <ac:spMkLst>
+              <pc:docMk/>
+              <pc:sldMasterMk cId="736395924" sldId="2147483660"/>
+              <pc:sldLayoutMk cId="679561916" sldId="2147483661"/>
+              <ac:spMk id="3" creationId="{00000000-0000-0000-0000-000000000000}"/>
+            </ac:spMkLst>
+          </pc:spChg>
+        </pc:sldLayoutChg>
+        <pc:sldLayoutChg chg="modSp">
+          <pc:chgData name="Zachary Randell" userId="4632875424_tp_dropbox_plus" providerId="OAuth2" clId="{94F170DD-8542-47A7-905C-5CC9F103855A}" dt="2026-07-08T22:05:19.604" v="91"/>
+          <pc:sldLayoutMkLst>
+            <pc:docMk/>
+            <pc:sldMasterMk cId="736395924" sldId="2147483660"/>
+            <pc:sldLayoutMk cId="4096108822" sldId="2147483663"/>
+          </pc:sldLayoutMkLst>
+          <pc:spChg chg="mod">
+            <ac:chgData name="Zachary Randell" userId="4632875424_tp_dropbox_plus" providerId="OAuth2" clId="{94F170DD-8542-47A7-905C-5CC9F103855A}" dt="2026-07-08T22:05:19.604" v="91"/>
+            <ac:spMkLst>
+              <pc:docMk/>
+              <pc:sldMasterMk cId="736395924" sldId="2147483660"/>
+              <pc:sldLayoutMk cId="4096108822" sldId="2147483663"/>
+              <ac:spMk id="2" creationId="{00000000-0000-0000-0000-000000000000}"/>
+            </ac:spMkLst>
+          </pc:spChg>
+          <pc:spChg chg="mod">
+            <ac:chgData name="Zachary Randell" userId="4632875424_tp_dropbox_plus" providerId="OAuth2" clId="{94F170DD-8542-47A7-905C-5CC9F103855A}" dt="2026-07-08T22:05:19.604" v="91"/>
+            <ac:spMkLst>
+              <pc:docMk/>
+              <pc:sldMasterMk cId="736395924" sldId="2147483660"/>
+              <pc:sldLayoutMk cId="4096108822" sldId="2147483663"/>
+              <ac:spMk id="3" creationId="{00000000-0000-0000-0000-000000000000}"/>
+            </ac:spMkLst>
+          </pc:spChg>
+        </pc:sldLayoutChg>
+        <pc:sldLayoutChg chg="modSp">
+          <pc:chgData name="Zachary Randell" userId="4632875424_tp_dropbox_plus" providerId="OAuth2" clId="{94F170DD-8542-47A7-905C-5CC9F103855A}" dt="2026-07-08T22:05:19.604" v="91"/>
+          <pc:sldLayoutMkLst>
+            <pc:docMk/>
+            <pc:sldMasterMk cId="736395924" sldId="2147483660"/>
+            <pc:sldLayoutMk cId="1330301549" sldId="2147483664"/>
+          </pc:sldLayoutMkLst>
+          <pc:spChg chg="mod">
+            <ac:chgData name="Zachary Randell" userId="4632875424_tp_dropbox_plus" providerId="OAuth2" clId="{94F170DD-8542-47A7-905C-5CC9F103855A}" dt="2026-07-08T22:05:19.604" v="91"/>
+            <ac:spMkLst>
+              <pc:docMk/>
+              <pc:sldMasterMk cId="736395924" sldId="2147483660"/>
+              <pc:sldLayoutMk cId="1330301549" sldId="2147483664"/>
+              <ac:spMk id="3" creationId="{00000000-0000-0000-0000-000000000000}"/>
+            </ac:spMkLst>
+          </pc:spChg>
+          <pc:spChg chg="mod">
+            <ac:chgData name="Zachary Randell" userId="4632875424_tp_dropbox_plus" providerId="OAuth2" clId="{94F170DD-8542-47A7-905C-5CC9F103855A}" dt="2026-07-08T22:05:19.604" v="91"/>
+            <ac:spMkLst>
+              <pc:docMk/>
+              <pc:sldMasterMk cId="736395924" sldId="2147483660"/>
+              <pc:sldLayoutMk cId="1330301549" sldId="2147483664"/>
+              <ac:spMk id="4" creationId="{00000000-0000-0000-0000-000000000000}"/>
+            </ac:spMkLst>
+          </pc:spChg>
+        </pc:sldLayoutChg>
+        <pc:sldLayoutChg chg="modSp">
+          <pc:chgData name="Zachary Randell" userId="4632875424_tp_dropbox_plus" providerId="OAuth2" clId="{94F170DD-8542-47A7-905C-5CC9F103855A}" dt="2026-07-08T22:05:19.604" v="91"/>
+          <pc:sldLayoutMkLst>
+            <pc:docMk/>
+            <pc:sldMasterMk cId="736395924" sldId="2147483660"/>
+            <pc:sldLayoutMk cId="2958838779" sldId="2147483665"/>
+          </pc:sldLayoutMkLst>
+          <pc:spChg chg="mod">
+            <ac:chgData name="Zachary Randell" userId="4632875424_tp_dropbox_plus" providerId="OAuth2" clId="{94F170DD-8542-47A7-905C-5CC9F103855A}" dt="2026-07-08T22:05:19.604" v="91"/>
+            <ac:spMkLst>
+              <pc:docMk/>
+              <pc:sldMasterMk cId="736395924" sldId="2147483660"/>
+              <pc:sldLayoutMk cId="2958838779" sldId="2147483665"/>
+              <ac:spMk id="2" creationId="{00000000-0000-0000-0000-000000000000}"/>
+            </ac:spMkLst>
+          </pc:spChg>
+          <pc:spChg chg="mod">
+            <ac:chgData name="Zachary Randell" userId="4632875424_tp_dropbox_plus" providerId="OAuth2" clId="{94F170DD-8542-47A7-905C-5CC9F103855A}" dt="2026-07-08T22:05:19.604" v="91"/>
+            <ac:spMkLst>
+              <pc:docMk/>
+              <pc:sldMasterMk cId="736395924" sldId="2147483660"/>
+              <pc:sldLayoutMk cId="2958838779" sldId="2147483665"/>
+              <ac:spMk id="3" creationId="{00000000-0000-0000-0000-000000000000}"/>
+            </ac:spMkLst>
+          </pc:spChg>
+          <pc:spChg chg="mod">
+            <ac:chgData name="Zachary Randell" userId="4632875424_tp_dropbox_plus" providerId="OAuth2" clId="{94F170DD-8542-47A7-905C-5CC9F103855A}" dt="2026-07-08T22:05:19.604" v="91"/>
+            <ac:spMkLst>
+              <pc:docMk/>
+              <pc:sldMasterMk cId="736395924" sldId="2147483660"/>
+              <pc:sldLayoutMk cId="2958838779" sldId="2147483665"/>
+              <ac:spMk id="4" creationId="{00000000-0000-0000-0000-000000000000}"/>
+            </ac:spMkLst>
+          </pc:spChg>
+          <pc:spChg chg="mod">
+            <ac:chgData name="Zachary Randell" userId="4632875424_tp_dropbox_plus" providerId="OAuth2" clId="{94F170DD-8542-47A7-905C-5CC9F103855A}" dt="2026-07-08T22:05:19.604" v="91"/>
+            <ac:spMkLst>
+              <pc:docMk/>
+              <pc:sldMasterMk cId="736395924" sldId="2147483660"/>
+              <pc:sldLayoutMk cId="2958838779" sldId="2147483665"/>
+              <ac:spMk id="5" creationId="{00000000-0000-0000-0000-000000000000}"/>
+            </ac:spMkLst>
+          </pc:spChg>
+          <pc:spChg chg="mod">
+            <ac:chgData name="Zachary Randell" userId="4632875424_tp_dropbox_plus" providerId="OAuth2" clId="{94F170DD-8542-47A7-905C-5CC9F103855A}" dt="2026-07-08T22:05:19.604" v="91"/>
+            <ac:spMkLst>
+              <pc:docMk/>
+              <pc:sldMasterMk cId="736395924" sldId="2147483660"/>
+              <pc:sldLayoutMk cId="2958838779" sldId="2147483665"/>
+              <ac:spMk id="6" creationId="{00000000-0000-0000-0000-000000000000}"/>
+            </ac:spMkLst>
+          </pc:spChg>
+        </pc:sldLayoutChg>
+        <pc:sldLayoutChg chg="modSp">
+          <pc:chgData name="Zachary Randell" userId="4632875424_tp_dropbox_plus" providerId="OAuth2" clId="{94F170DD-8542-47A7-905C-5CC9F103855A}" dt="2026-07-08T22:05:19.604" v="91"/>
+          <pc:sldLayoutMkLst>
+            <pc:docMk/>
+            <pc:sldMasterMk cId="736395924" sldId="2147483660"/>
+            <pc:sldLayoutMk cId="1425740529" sldId="2147483668"/>
+          </pc:sldLayoutMkLst>
+          <pc:spChg chg="mod">
+            <ac:chgData name="Zachary Randell" userId="4632875424_tp_dropbox_plus" providerId="OAuth2" clId="{94F170DD-8542-47A7-905C-5CC9F103855A}" dt="2026-07-08T22:05:19.604" v="91"/>
+            <ac:spMkLst>
+              <pc:docMk/>
+              <pc:sldMasterMk cId="736395924" sldId="2147483660"/>
+              <pc:sldLayoutMk cId="1425740529" sldId="2147483668"/>
+              <ac:spMk id="2" creationId="{00000000-0000-0000-0000-000000000000}"/>
+            </ac:spMkLst>
+          </pc:spChg>
+          <pc:spChg chg="mod">
+            <ac:chgData name="Zachary Randell" userId="4632875424_tp_dropbox_plus" providerId="OAuth2" clId="{94F170DD-8542-47A7-905C-5CC9F103855A}" dt="2026-07-08T22:05:19.604" v="91"/>
+            <ac:spMkLst>
+              <pc:docMk/>
+              <pc:sldMasterMk cId="736395924" sldId="2147483660"/>
+              <pc:sldLayoutMk cId="1425740529" sldId="2147483668"/>
+              <ac:spMk id="3" creationId="{00000000-0000-0000-0000-000000000000}"/>
+            </ac:spMkLst>
+          </pc:spChg>
+          <pc:spChg chg="mod">
+            <ac:chgData name="Zachary Randell" userId="4632875424_tp_dropbox_plus" providerId="OAuth2" clId="{94F170DD-8542-47A7-905C-5CC9F103855A}" dt="2026-07-08T22:05:19.604" v="91"/>
+            <ac:spMkLst>
+              <pc:docMk/>
+              <pc:sldMasterMk cId="736395924" sldId="2147483660"/>
+              <pc:sldLayoutMk cId="1425740529" sldId="2147483668"/>
+              <ac:spMk id="4" creationId="{00000000-0000-0000-0000-000000000000}"/>
+            </ac:spMkLst>
+          </pc:spChg>
+        </pc:sldLayoutChg>
+        <pc:sldLayoutChg chg="modSp">
+          <pc:chgData name="Zachary Randell" userId="4632875424_tp_dropbox_plus" providerId="OAuth2" clId="{94F170DD-8542-47A7-905C-5CC9F103855A}" dt="2026-07-08T22:05:19.604" v="91"/>
+          <pc:sldLayoutMkLst>
+            <pc:docMk/>
+            <pc:sldMasterMk cId="736395924" sldId="2147483660"/>
+            <pc:sldLayoutMk cId="1335625484" sldId="2147483669"/>
+          </pc:sldLayoutMkLst>
+          <pc:spChg chg="mod">
+            <ac:chgData name="Zachary Randell" userId="4632875424_tp_dropbox_plus" providerId="OAuth2" clId="{94F170DD-8542-47A7-905C-5CC9F103855A}" dt="2026-07-08T22:05:19.604" v="91"/>
+            <ac:spMkLst>
+              <pc:docMk/>
+              <pc:sldMasterMk cId="736395924" sldId="2147483660"/>
+              <pc:sldLayoutMk cId="1335625484" sldId="2147483669"/>
+              <ac:spMk id="2" creationId="{00000000-0000-0000-0000-000000000000}"/>
+            </ac:spMkLst>
+          </pc:spChg>
+          <pc:spChg chg="mod">
+            <ac:chgData name="Zachary Randell" userId="4632875424_tp_dropbox_plus" providerId="OAuth2" clId="{94F170DD-8542-47A7-905C-5CC9F103855A}" dt="2026-07-08T22:05:19.604" v="91"/>
+            <ac:spMkLst>
+              <pc:docMk/>
+              <pc:sldMasterMk cId="736395924" sldId="2147483660"/>
+              <pc:sldLayoutMk cId="1335625484" sldId="2147483669"/>
+              <ac:spMk id="3" creationId="{00000000-0000-0000-0000-000000000000}"/>
+            </ac:spMkLst>
+          </pc:spChg>
+          <pc:spChg chg="mod">
+            <ac:chgData name="Zachary Randell" userId="4632875424_tp_dropbox_plus" providerId="OAuth2" clId="{94F170DD-8542-47A7-905C-5CC9F103855A}" dt="2026-07-08T22:05:19.604" v="91"/>
+            <ac:spMkLst>
+              <pc:docMk/>
+              <pc:sldMasterMk cId="736395924" sldId="2147483660"/>
+              <pc:sldLayoutMk cId="1335625484" sldId="2147483669"/>
+              <ac:spMk id="4" creationId="{00000000-0000-0000-0000-000000000000}"/>
+            </ac:spMkLst>
+          </pc:spChg>
+        </pc:sldLayoutChg>
+        <pc:sldLayoutChg chg="modSp">
+          <pc:chgData name="Zachary Randell" userId="4632875424_tp_dropbox_plus" providerId="OAuth2" clId="{94F170DD-8542-47A7-905C-5CC9F103855A}" dt="2026-07-08T22:05:19.604" v="91"/>
+          <pc:sldLayoutMkLst>
+            <pc:docMk/>
+            <pc:sldMasterMk cId="736395924" sldId="2147483660"/>
+            <pc:sldLayoutMk cId="1161196129" sldId="2147483671"/>
+          </pc:sldLayoutMkLst>
+          <pc:spChg chg="mod">
+            <ac:chgData name="Zachary Randell" userId="4632875424_tp_dropbox_plus" providerId="OAuth2" clId="{94F170DD-8542-47A7-905C-5CC9F103855A}" dt="2026-07-08T22:05:19.604" v="91"/>
+            <ac:spMkLst>
+              <pc:docMk/>
+              <pc:sldMasterMk cId="736395924" sldId="2147483660"/>
+              <pc:sldLayoutMk cId="1161196129" sldId="2147483671"/>
+              <ac:spMk id="2" creationId="{00000000-0000-0000-0000-000000000000}"/>
+            </ac:spMkLst>
+          </pc:spChg>
+          <pc:spChg chg="mod">
+            <ac:chgData name="Zachary Randell" userId="4632875424_tp_dropbox_plus" providerId="OAuth2" clId="{94F170DD-8542-47A7-905C-5CC9F103855A}" dt="2026-07-08T22:05:19.604" v="91"/>
+            <ac:spMkLst>
+              <pc:docMk/>
+              <pc:sldMasterMk cId="736395924" sldId="2147483660"/>
+              <pc:sldLayoutMk cId="1161196129" sldId="2147483671"/>
+              <ac:spMk id="3" creationId="{00000000-0000-0000-0000-000000000000}"/>
+            </ac:spMkLst>
+          </pc:spChg>
+        </pc:sldLayoutChg>
+      </pc:sldMasterChg>
+      <pc:sldMasterChg chg="modSp modSldLayout">
+        <pc:chgData name="Zachary Randell" userId="4632875424_tp_dropbox_plus" providerId="OAuth2" clId="{94F170DD-8542-47A7-905C-5CC9F103855A}" dt="2026-07-08T22:05:19.313" v="90"/>
+        <pc:sldMasterMkLst>
+          <pc:docMk/>
+          <pc:sldMasterMk cId="1786950583" sldId="2147483672"/>
+        </pc:sldMasterMkLst>
+        <pc:spChg chg="mod">
+          <ac:chgData name="Zachary Randell" userId="4632875424_tp_dropbox_plus" providerId="OAuth2" clId="{94F170DD-8542-47A7-905C-5CC9F103855A}" dt="2026-07-08T22:05:19.313" v="90"/>
+          <ac:spMkLst>
+            <pc:docMk/>
+            <pc:sldMasterMk cId="1786950583" sldId="2147483672"/>
+            <ac:spMk id="2" creationId="{00000000-0000-0000-0000-000000000000}"/>
+          </ac:spMkLst>
+        </pc:spChg>
+        <pc:spChg chg="mod">
+          <ac:chgData name="Zachary Randell" userId="4632875424_tp_dropbox_plus" providerId="OAuth2" clId="{94F170DD-8542-47A7-905C-5CC9F103855A}" dt="2026-07-08T22:05:19.313" v="90"/>
+          <ac:spMkLst>
+            <pc:docMk/>
+            <pc:sldMasterMk cId="1786950583" sldId="2147483672"/>
+            <ac:spMk id="3" creationId="{00000000-0000-0000-0000-000000000000}"/>
+          </ac:spMkLst>
+        </pc:spChg>
+        <pc:spChg chg="mod">
+          <ac:chgData name="Zachary Randell" userId="4632875424_tp_dropbox_plus" providerId="OAuth2" clId="{94F170DD-8542-47A7-905C-5CC9F103855A}" dt="2026-07-08T22:05:19.313" v="90"/>
+          <ac:spMkLst>
+            <pc:docMk/>
+            <pc:sldMasterMk cId="1786950583" sldId="2147483672"/>
+            <ac:spMk id="4" creationId="{00000000-0000-0000-0000-000000000000}"/>
+          </ac:spMkLst>
+        </pc:spChg>
+        <pc:spChg chg="mod">
+          <ac:chgData name="Zachary Randell" userId="4632875424_tp_dropbox_plus" providerId="OAuth2" clId="{94F170DD-8542-47A7-905C-5CC9F103855A}" dt="2026-07-08T22:05:19.313" v="90"/>
+          <ac:spMkLst>
+            <pc:docMk/>
+            <pc:sldMasterMk cId="1786950583" sldId="2147483672"/>
+            <ac:spMk id="5" creationId="{00000000-0000-0000-0000-000000000000}"/>
+          </ac:spMkLst>
+        </pc:spChg>
+        <pc:spChg chg="mod">
+          <ac:chgData name="Zachary Randell" userId="4632875424_tp_dropbox_plus" providerId="OAuth2" clId="{94F170DD-8542-47A7-905C-5CC9F103855A}" dt="2026-07-08T22:05:19.313" v="90"/>
+          <ac:spMkLst>
+            <pc:docMk/>
+            <pc:sldMasterMk cId="1786950583" sldId="2147483672"/>
+            <ac:spMk id="6" creationId="{00000000-0000-0000-0000-000000000000}"/>
+          </ac:spMkLst>
+        </pc:spChg>
+        <pc:sldLayoutChg chg="modSp">
+          <pc:chgData name="Zachary Randell" userId="4632875424_tp_dropbox_plus" providerId="OAuth2" clId="{94F170DD-8542-47A7-905C-5CC9F103855A}" dt="2026-07-08T22:05:19.313" v="90"/>
+          <pc:sldLayoutMkLst>
+            <pc:docMk/>
+            <pc:sldMasterMk cId="1786950583" sldId="2147483672"/>
+            <pc:sldLayoutMk cId="1455868999" sldId="2147483673"/>
+          </pc:sldLayoutMkLst>
+          <pc:spChg chg="mod">
+            <ac:chgData name="Zachary Randell" userId="4632875424_tp_dropbox_plus" providerId="OAuth2" clId="{94F170DD-8542-47A7-905C-5CC9F103855A}" dt="2026-07-08T22:05:19.313" v="90"/>
+            <ac:spMkLst>
+              <pc:docMk/>
+              <pc:sldMasterMk cId="1786950583" sldId="2147483672"/>
+              <pc:sldLayoutMk cId="1455868999" sldId="2147483673"/>
+              <ac:spMk id="2" creationId="{00000000-0000-0000-0000-000000000000}"/>
+            </ac:spMkLst>
+          </pc:spChg>
+          <pc:spChg chg="mod">
+            <ac:chgData name="Zachary Randell" userId="4632875424_tp_dropbox_plus" providerId="OAuth2" clId="{94F170DD-8542-47A7-905C-5CC9F103855A}" dt="2026-07-08T22:05:19.313" v="90"/>
+            <ac:spMkLst>
+              <pc:docMk/>
+              <pc:sldMasterMk cId="1786950583" sldId="2147483672"/>
+              <pc:sldLayoutMk cId="1455868999" sldId="2147483673"/>
+              <ac:spMk id="3" creationId="{00000000-0000-0000-0000-000000000000}"/>
+            </ac:spMkLst>
+          </pc:spChg>
+        </pc:sldLayoutChg>
+        <pc:sldLayoutChg chg="modSp">
+          <pc:chgData name="Zachary Randell" userId="4632875424_tp_dropbox_plus" providerId="OAuth2" clId="{94F170DD-8542-47A7-905C-5CC9F103855A}" dt="2026-07-08T22:05:19.313" v="90"/>
+          <pc:sldLayoutMkLst>
+            <pc:docMk/>
+            <pc:sldMasterMk cId="1786950583" sldId="2147483672"/>
+            <pc:sldLayoutMk cId="3044052445" sldId="2147483675"/>
+          </pc:sldLayoutMkLst>
+          <pc:spChg chg="mod">
+            <ac:chgData name="Zachary Randell" userId="4632875424_tp_dropbox_plus" providerId="OAuth2" clId="{94F170DD-8542-47A7-905C-5CC9F103855A}" dt="2026-07-08T22:05:19.313" v="90"/>
+            <ac:spMkLst>
+              <pc:docMk/>
+              <pc:sldMasterMk cId="1786950583" sldId="2147483672"/>
+              <pc:sldLayoutMk cId="3044052445" sldId="2147483675"/>
+              <ac:spMk id="2" creationId="{00000000-0000-0000-0000-000000000000}"/>
+            </ac:spMkLst>
+          </pc:spChg>
+          <pc:spChg chg="mod">
+            <ac:chgData name="Zachary Randell" userId="4632875424_tp_dropbox_plus" providerId="OAuth2" clId="{94F170DD-8542-47A7-905C-5CC9F103855A}" dt="2026-07-08T22:05:19.313" v="90"/>
+            <ac:spMkLst>
+              <pc:docMk/>
+              <pc:sldMasterMk cId="1786950583" sldId="2147483672"/>
+              <pc:sldLayoutMk cId="3044052445" sldId="2147483675"/>
+              <ac:spMk id="3" creationId="{00000000-0000-0000-0000-000000000000}"/>
+            </ac:spMkLst>
+          </pc:spChg>
+        </pc:sldLayoutChg>
+        <pc:sldLayoutChg chg="modSp">
+          <pc:chgData name="Zachary Randell" userId="4632875424_tp_dropbox_plus" providerId="OAuth2" clId="{94F170DD-8542-47A7-905C-5CC9F103855A}" dt="2026-07-08T22:05:19.313" v="90"/>
+          <pc:sldLayoutMkLst>
+            <pc:docMk/>
+            <pc:sldMasterMk cId="1786950583" sldId="2147483672"/>
+            <pc:sldLayoutMk cId="3167539355" sldId="2147483676"/>
+          </pc:sldLayoutMkLst>
+          <pc:spChg chg="mod">
+            <ac:chgData name="Zachary Randell" userId="4632875424_tp_dropbox_plus" providerId="OAuth2" clId="{94F170DD-8542-47A7-905C-5CC9F103855A}" dt="2026-07-08T22:05:19.313" v="90"/>
+            <ac:spMkLst>
+              <pc:docMk/>
+              <pc:sldMasterMk cId="1786950583" sldId="2147483672"/>
+              <pc:sldLayoutMk cId="3167539355" sldId="2147483676"/>
+              <ac:spMk id="3" creationId="{00000000-0000-0000-0000-000000000000}"/>
+            </ac:spMkLst>
+          </pc:spChg>
+          <pc:spChg chg="mod">
+            <ac:chgData name="Zachary Randell" userId="4632875424_tp_dropbox_plus" providerId="OAuth2" clId="{94F170DD-8542-47A7-905C-5CC9F103855A}" dt="2026-07-08T22:05:19.313" v="90"/>
+            <ac:spMkLst>
+              <pc:docMk/>
+              <pc:sldMasterMk cId="1786950583" sldId="2147483672"/>
+              <pc:sldLayoutMk cId="3167539355" sldId="2147483676"/>
+              <ac:spMk id="4" creationId="{00000000-0000-0000-0000-000000000000}"/>
+            </ac:spMkLst>
+          </pc:spChg>
+        </pc:sldLayoutChg>
+        <pc:sldLayoutChg chg="modSp">
+          <pc:chgData name="Zachary Randell" userId="4632875424_tp_dropbox_plus" providerId="OAuth2" clId="{94F170DD-8542-47A7-905C-5CC9F103855A}" dt="2026-07-08T22:05:19.313" v="90"/>
+          <pc:sldLayoutMkLst>
+            <pc:docMk/>
+            <pc:sldMasterMk cId="1786950583" sldId="2147483672"/>
+            <pc:sldLayoutMk cId="2913347946" sldId="2147483677"/>
+          </pc:sldLayoutMkLst>
+          <pc:spChg chg="mod">
+            <ac:chgData name="Zachary Randell" userId="4632875424_tp_dropbox_plus" providerId="OAuth2" clId="{94F170DD-8542-47A7-905C-5CC9F103855A}" dt="2026-07-08T22:05:19.313" v="90"/>
+            <ac:spMkLst>
+              <pc:docMk/>
+              <pc:sldMasterMk cId="1786950583" sldId="2147483672"/>
+              <pc:sldLayoutMk cId="2913347946" sldId="2147483677"/>
+              <ac:spMk id="2" creationId="{00000000-0000-0000-0000-000000000000}"/>
+            </ac:spMkLst>
+          </pc:spChg>
+          <pc:spChg chg="mod">
+            <ac:chgData name="Zachary Randell" userId="4632875424_tp_dropbox_plus" providerId="OAuth2" clId="{94F170DD-8542-47A7-905C-5CC9F103855A}" dt="2026-07-08T22:05:19.313" v="90"/>
+            <ac:spMkLst>
+              <pc:docMk/>
+              <pc:sldMasterMk cId="1786950583" sldId="2147483672"/>
+              <pc:sldLayoutMk cId="2913347946" sldId="2147483677"/>
+              <ac:spMk id="3" creationId="{00000000-0000-0000-0000-000000000000}"/>
+            </ac:spMkLst>
+          </pc:spChg>
+          <pc:spChg chg="mod">
+            <ac:chgData name="Zachary Randell" userId="4632875424_tp_dropbox_plus" providerId="OAuth2" clId="{94F170DD-8542-47A7-905C-5CC9F103855A}" dt="2026-07-08T22:05:19.313" v="90"/>
+            <ac:spMkLst>
+              <pc:docMk/>
+              <pc:sldMasterMk cId="1786950583" sldId="2147483672"/>
+              <pc:sldLayoutMk cId="2913347946" sldId="2147483677"/>
+              <ac:spMk id="4" creationId="{00000000-0000-0000-0000-000000000000}"/>
+            </ac:spMkLst>
+          </pc:spChg>
+          <pc:spChg chg="mod">
+            <ac:chgData name="Zachary Randell" userId="4632875424_tp_dropbox_plus" providerId="OAuth2" clId="{94F170DD-8542-47A7-905C-5CC9F103855A}" dt="2026-07-08T22:05:19.313" v="90"/>
+            <ac:spMkLst>
+              <pc:docMk/>
+              <pc:sldMasterMk cId="1786950583" sldId="2147483672"/>
+              <pc:sldLayoutMk cId="2913347946" sldId="2147483677"/>
+              <ac:spMk id="5" creationId="{00000000-0000-0000-0000-000000000000}"/>
+            </ac:spMkLst>
+          </pc:spChg>
+          <pc:spChg chg="mod">
+            <ac:chgData name="Zachary Randell" userId="4632875424_tp_dropbox_plus" providerId="OAuth2" clId="{94F170DD-8542-47A7-905C-5CC9F103855A}" dt="2026-07-08T22:05:19.313" v="90"/>
+            <ac:spMkLst>
+              <pc:docMk/>
+              <pc:sldMasterMk cId="1786950583" sldId="2147483672"/>
+              <pc:sldLayoutMk cId="2913347946" sldId="2147483677"/>
+              <ac:spMk id="6" creationId="{00000000-0000-0000-0000-000000000000}"/>
+            </ac:spMkLst>
+          </pc:spChg>
+        </pc:sldLayoutChg>
+        <pc:sldLayoutChg chg="modSp">
+          <pc:chgData name="Zachary Randell" userId="4632875424_tp_dropbox_plus" providerId="OAuth2" clId="{94F170DD-8542-47A7-905C-5CC9F103855A}" dt="2026-07-08T22:05:19.313" v="90"/>
+          <pc:sldLayoutMkLst>
+            <pc:docMk/>
+            <pc:sldMasterMk cId="1786950583" sldId="2147483672"/>
+            <pc:sldLayoutMk cId="1516895722" sldId="2147483680"/>
+          </pc:sldLayoutMkLst>
+          <pc:spChg chg="mod">
+            <ac:chgData name="Zachary Randell" userId="4632875424_tp_dropbox_plus" providerId="OAuth2" clId="{94F170DD-8542-47A7-905C-5CC9F103855A}" dt="2026-07-08T22:05:19.313" v="90"/>
+            <ac:spMkLst>
+              <pc:docMk/>
+              <pc:sldMasterMk cId="1786950583" sldId="2147483672"/>
+              <pc:sldLayoutMk cId="1516895722" sldId="2147483680"/>
+              <ac:spMk id="2" creationId="{00000000-0000-0000-0000-000000000000}"/>
+            </ac:spMkLst>
+          </pc:spChg>
+          <pc:spChg chg="mod">
+            <ac:chgData name="Zachary Randell" userId="4632875424_tp_dropbox_plus" providerId="OAuth2" clId="{94F170DD-8542-47A7-905C-5CC9F103855A}" dt="2026-07-08T22:05:19.313" v="90"/>
+            <ac:spMkLst>
+              <pc:docMk/>
+              <pc:sldMasterMk cId="1786950583" sldId="2147483672"/>
+              <pc:sldLayoutMk cId="1516895722" sldId="2147483680"/>
+              <ac:spMk id="3" creationId="{00000000-0000-0000-0000-000000000000}"/>
+            </ac:spMkLst>
+          </pc:spChg>
+          <pc:spChg chg="mod">
+            <ac:chgData name="Zachary Randell" userId="4632875424_tp_dropbox_plus" providerId="OAuth2" clId="{94F170DD-8542-47A7-905C-5CC9F103855A}" dt="2026-07-08T22:05:19.313" v="90"/>
+            <ac:spMkLst>
+              <pc:docMk/>
+              <pc:sldMasterMk cId="1786950583" sldId="2147483672"/>
+              <pc:sldLayoutMk cId="1516895722" sldId="2147483680"/>
+              <ac:spMk id="4" creationId="{00000000-0000-0000-0000-000000000000}"/>
+            </ac:spMkLst>
+          </pc:spChg>
+        </pc:sldLayoutChg>
+        <pc:sldLayoutChg chg="modSp">
+          <pc:chgData name="Zachary Randell" userId="4632875424_tp_dropbox_plus" providerId="OAuth2" clId="{94F170DD-8542-47A7-905C-5CC9F103855A}" dt="2026-07-08T22:05:19.313" v="90"/>
+          <pc:sldLayoutMkLst>
+            <pc:docMk/>
+            <pc:sldMasterMk cId="1786950583" sldId="2147483672"/>
+            <pc:sldLayoutMk cId="4018023599" sldId="2147483681"/>
+          </pc:sldLayoutMkLst>
+          <pc:spChg chg="mod">
+            <ac:chgData name="Zachary Randell" userId="4632875424_tp_dropbox_plus" providerId="OAuth2" clId="{94F170DD-8542-47A7-905C-5CC9F103855A}" dt="2026-07-08T22:05:19.313" v="90"/>
+            <ac:spMkLst>
+              <pc:docMk/>
+              <pc:sldMasterMk cId="1786950583" sldId="2147483672"/>
+              <pc:sldLayoutMk cId="4018023599" sldId="2147483681"/>
+              <ac:spMk id="2" creationId="{00000000-0000-0000-0000-000000000000}"/>
+            </ac:spMkLst>
+          </pc:spChg>
+          <pc:spChg chg="mod">
+            <ac:chgData name="Zachary Randell" userId="4632875424_tp_dropbox_plus" providerId="OAuth2" clId="{94F170DD-8542-47A7-905C-5CC9F103855A}" dt="2026-07-08T22:05:19.313" v="90"/>
+            <ac:spMkLst>
+              <pc:docMk/>
+              <pc:sldMasterMk cId="1786950583" sldId="2147483672"/>
+              <pc:sldLayoutMk cId="4018023599" sldId="2147483681"/>
+              <ac:spMk id="3" creationId="{00000000-0000-0000-0000-000000000000}"/>
+            </ac:spMkLst>
+          </pc:spChg>
+          <pc:spChg chg="mod">
+            <ac:chgData name="Zachary Randell" userId="4632875424_tp_dropbox_plus" providerId="OAuth2" clId="{94F170DD-8542-47A7-905C-5CC9F103855A}" dt="2026-07-08T22:05:19.313" v="90"/>
+            <ac:spMkLst>
+              <pc:docMk/>
+              <pc:sldMasterMk cId="1786950583" sldId="2147483672"/>
+              <pc:sldLayoutMk cId="4018023599" sldId="2147483681"/>
+              <ac:spMk id="4" creationId="{00000000-0000-0000-0000-000000000000}"/>
+            </ac:spMkLst>
+          </pc:spChg>
+        </pc:sldLayoutChg>
+        <pc:sldLayoutChg chg="modSp">
+          <pc:chgData name="Zachary Randell" userId="4632875424_tp_dropbox_plus" providerId="OAuth2" clId="{94F170DD-8542-47A7-905C-5CC9F103855A}" dt="2026-07-08T22:05:19.313" v="90"/>
+          <pc:sldLayoutMkLst>
+            <pc:docMk/>
+            <pc:sldMasterMk cId="1786950583" sldId="2147483672"/>
+            <pc:sldLayoutMk cId="4147938972" sldId="2147483683"/>
+          </pc:sldLayoutMkLst>
+          <pc:spChg chg="mod">
+            <ac:chgData name="Zachary Randell" userId="4632875424_tp_dropbox_plus" providerId="OAuth2" clId="{94F170DD-8542-47A7-905C-5CC9F103855A}" dt="2026-07-08T22:05:19.313" v="90"/>
+            <ac:spMkLst>
+              <pc:docMk/>
+              <pc:sldMasterMk cId="1786950583" sldId="2147483672"/>
+              <pc:sldLayoutMk cId="4147938972" sldId="2147483683"/>
+              <ac:spMk id="2" creationId="{00000000-0000-0000-0000-000000000000}"/>
+            </ac:spMkLst>
+          </pc:spChg>
+          <pc:spChg chg="mod">
+            <ac:chgData name="Zachary Randell" userId="4632875424_tp_dropbox_plus" providerId="OAuth2" clId="{94F170DD-8542-47A7-905C-5CC9F103855A}" dt="2026-07-08T22:05:19.313" v="90"/>
+            <ac:spMkLst>
+              <pc:docMk/>
+              <pc:sldMasterMk cId="1786950583" sldId="2147483672"/>
+              <pc:sldLayoutMk cId="4147938972" sldId="2147483683"/>
+              <ac:spMk id="3" creationId="{00000000-0000-0000-0000-000000000000}"/>
+            </ac:spMkLst>
+          </pc:spChg>
+        </pc:sldLayoutChg>
+      </pc:sldMasterChg>
+      <pc:sldMasterChg chg="modSp modSldLayout">
+        <pc:chgData name="Zachary Randell" userId="4632875424_tp_dropbox_plus" providerId="OAuth2" clId="{94F170DD-8542-47A7-905C-5CC9F103855A}" dt="2026-07-08T22:05:18.894" v="89"/>
+        <pc:sldMasterMkLst>
+          <pc:docMk/>
+          <pc:sldMasterMk cId="738123879" sldId="2147483684"/>
+        </pc:sldMasterMkLst>
+        <pc:spChg chg="mod">
+          <ac:chgData name="Zachary Randell" userId="4632875424_tp_dropbox_plus" providerId="OAuth2" clId="{94F170DD-8542-47A7-905C-5CC9F103855A}" dt="2026-07-08T22:05:18.894" v="89"/>
+          <ac:spMkLst>
+            <pc:docMk/>
+            <pc:sldMasterMk cId="738123879" sldId="2147483684"/>
+            <ac:spMk id="2" creationId="{00000000-0000-0000-0000-000000000000}"/>
+          </ac:spMkLst>
+        </pc:spChg>
+        <pc:spChg chg="mod">
+          <ac:chgData name="Zachary Randell" userId="4632875424_tp_dropbox_plus" providerId="OAuth2" clId="{94F170DD-8542-47A7-905C-5CC9F103855A}" dt="2026-07-08T22:05:18.894" v="89"/>
+          <ac:spMkLst>
+            <pc:docMk/>
+            <pc:sldMasterMk cId="738123879" sldId="2147483684"/>
+            <ac:spMk id="3" creationId="{00000000-0000-0000-0000-000000000000}"/>
+          </ac:spMkLst>
+        </pc:spChg>
+        <pc:spChg chg="mod">
+          <ac:chgData name="Zachary Randell" userId="4632875424_tp_dropbox_plus" providerId="OAuth2" clId="{94F170DD-8542-47A7-905C-5CC9F103855A}" dt="2026-07-08T22:05:18.894" v="89"/>
+          <ac:spMkLst>
+            <pc:docMk/>
+            <pc:sldMasterMk cId="738123879" sldId="2147483684"/>
+            <ac:spMk id="4" creationId="{00000000-0000-0000-0000-000000000000}"/>
+          </ac:spMkLst>
+        </pc:spChg>
+        <pc:spChg chg="mod">
+          <ac:chgData name="Zachary Randell" userId="4632875424_tp_dropbox_plus" providerId="OAuth2" clId="{94F170DD-8542-47A7-905C-5CC9F103855A}" dt="2026-07-08T22:05:18.894" v="89"/>
+          <ac:spMkLst>
+            <pc:docMk/>
+            <pc:sldMasterMk cId="738123879" sldId="2147483684"/>
+            <ac:spMk id="5" creationId="{00000000-0000-0000-0000-000000000000}"/>
+          </ac:spMkLst>
+        </pc:spChg>
+        <pc:spChg chg="mod">
+          <ac:chgData name="Zachary Randell" userId="4632875424_tp_dropbox_plus" providerId="OAuth2" clId="{94F170DD-8542-47A7-905C-5CC9F103855A}" dt="2026-07-08T22:05:18.894" v="89"/>
+          <ac:spMkLst>
+            <pc:docMk/>
+            <pc:sldMasterMk cId="738123879" sldId="2147483684"/>
+            <ac:spMk id="6" creationId="{00000000-0000-0000-0000-000000000000}"/>
+          </ac:spMkLst>
+        </pc:spChg>
+        <pc:sldLayoutChg chg="modSp">
+          <pc:chgData name="Zachary Randell" userId="4632875424_tp_dropbox_plus" providerId="OAuth2" clId="{94F170DD-8542-47A7-905C-5CC9F103855A}" dt="2026-07-08T22:05:18.894" v="89"/>
+          <pc:sldLayoutMkLst>
+            <pc:docMk/>
+            <pc:sldMasterMk cId="738123879" sldId="2147483684"/>
+            <pc:sldLayoutMk cId="2306474054" sldId="2147483685"/>
+          </pc:sldLayoutMkLst>
+          <pc:spChg chg="mod">
+            <ac:chgData name="Zachary Randell" userId="4632875424_tp_dropbox_plus" providerId="OAuth2" clId="{94F170DD-8542-47A7-905C-5CC9F103855A}" dt="2026-07-08T22:05:18.894" v="89"/>
+            <ac:spMkLst>
+              <pc:docMk/>
+              <pc:sldMasterMk cId="738123879" sldId="2147483684"/>
+              <pc:sldLayoutMk cId="2306474054" sldId="2147483685"/>
+              <ac:spMk id="2" creationId="{00000000-0000-0000-0000-000000000000}"/>
+            </ac:spMkLst>
+          </pc:spChg>
+          <pc:spChg chg="mod">
+            <ac:chgData name="Zachary Randell" userId="4632875424_tp_dropbox_plus" providerId="OAuth2" clId="{94F170DD-8542-47A7-905C-5CC9F103855A}" dt="2026-07-08T22:05:18.894" v="89"/>
+            <ac:spMkLst>
+              <pc:docMk/>
+              <pc:sldMasterMk cId="738123879" sldId="2147483684"/>
+              <pc:sldLayoutMk cId="2306474054" sldId="2147483685"/>
+              <ac:spMk id="3" creationId="{00000000-0000-0000-0000-000000000000}"/>
+            </ac:spMkLst>
+          </pc:spChg>
+        </pc:sldLayoutChg>
+        <pc:sldLayoutChg chg="modSp">
+          <pc:chgData name="Zachary Randell" userId="4632875424_tp_dropbox_plus" providerId="OAuth2" clId="{94F170DD-8542-47A7-905C-5CC9F103855A}" dt="2026-07-08T22:05:18.894" v="89"/>
+          <pc:sldLayoutMkLst>
+            <pc:docMk/>
+            <pc:sldMasterMk cId="738123879" sldId="2147483684"/>
+            <pc:sldLayoutMk cId="3584659966" sldId="2147483687"/>
+          </pc:sldLayoutMkLst>
+          <pc:spChg chg="mod">
+            <ac:chgData name="Zachary Randell" userId="4632875424_tp_dropbox_plus" providerId="OAuth2" clId="{94F170DD-8542-47A7-905C-5CC9F103855A}" dt="2026-07-08T22:05:18.894" v="89"/>
+            <ac:spMkLst>
+              <pc:docMk/>
+              <pc:sldMasterMk cId="738123879" sldId="2147483684"/>
+              <pc:sldLayoutMk cId="3584659966" sldId="2147483687"/>
+              <ac:spMk id="2" creationId="{00000000-0000-0000-0000-000000000000}"/>
+            </ac:spMkLst>
+          </pc:spChg>
+          <pc:spChg chg="mod">
+            <ac:chgData name="Zachary Randell" userId="4632875424_tp_dropbox_plus" providerId="OAuth2" clId="{94F170DD-8542-47A7-905C-5CC9F103855A}" dt="2026-07-08T22:05:18.894" v="89"/>
+            <ac:spMkLst>
+              <pc:docMk/>
+              <pc:sldMasterMk cId="738123879" sldId="2147483684"/>
+              <pc:sldLayoutMk cId="3584659966" sldId="2147483687"/>
+              <ac:spMk id="3" creationId="{00000000-0000-0000-0000-000000000000}"/>
+            </ac:spMkLst>
+          </pc:spChg>
+        </pc:sldLayoutChg>
+        <pc:sldLayoutChg chg="modSp">
+          <pc:chgData name="Zachary Randell" userId="4632875424_tp_dropbox_plus" providerId="OAuth2" clId="{94F170DD-8542-47A7-905C-5CC9F103855A}" dt="2026-07-08T22:05:18.894" v="89"/>
+          <pc:sldLayoutMkLst>
+            <pc:docMk/>
+            <pc:sldMasterMk cId="738123879" sldId="2147483684"/>
+            <pc:sldLayoutMk cId="1127362917" sldId="2147483688"/>
+          </pc:sldLayoutMkLst>
+          <pc:spChg chg="mod">
+            <ac:chgData name="Zachary Randell" userId="4632875424_tp_dropbox_plus" providerId="OAuth2" clId="{94F170DD-8542-47A7-905C-5CC9F103855A}" dt="2026-07-08T22:05:18.894" v="89"/>
+            <ac:spMkLst>
+              <pc:docMk/>
+              <pc:sldMasterMk cId="738123879" sldId="2147483684"/>
+              <pc:sldLayoutMk cId="1127362917" sldId="2147483688"/>
+              <ac:spMk id="3" creationId="{00000000-0000-0000-0000-000000000000}"/>
+            </ac:spMkLst>
+          </pc:spChg>
+          <pc:spChg chg="mod">
+            <ac:chgData name="Zachary Randell" userId="4632875424_tp_dropbox_plus" providerId="OAuth2" clId="{94F170DD-8542-47A7-905C-5CC9F103855A}" dt="2026-07-08T22:05:18.894" v="89"/>
+            <ac:spMkLst>
+              <pc:docMk/>
+              <pc:sldMasterMk cId="738123879" sldId="2147483684"/>
+              <pc:sldLayoutMk cId="1127362917" sldId="2147483688"/>
+              <ac:spMk id="4" creationId="{00000000-0000-0000-0000-000000000000}"/>
+            </ac:spMkLst>
+          </pc:spChg>
+        </pc:sldLayoutChg>
+        <pc:sldLayoutChg chg="modSp">
+          <pc:chgData name="Zachary Randell" userId="4632875424_tp_dropbox_plus" providerId="OAuth2" clId="{94F170DD-8542-47A7-905C-5CC9F103855A}" dt="2026-07-08T22:05:18.894" v="89"/>
+          <pc:sldLayoutMkLst>
+            <pc:docMk/>
+            <pc:sldMasterMk cId="738123879" sldId="2147483684"/>
+            <pc:sldLayoutMk cId="1462585153" sldId="2147483689"/>
+          </pc:sldLayoutMkLst>
+          <pc:spChg chg="mod">
+            <ac:chgData name="Zachary Randell" userId="4632875424_tp_dropbox_plus" providerId="OAuth2" clId="{94F170DD-8542-47A7-905C-5CC9F103855A}" dt="2026-07-08T22:05:18.894" v="89"/>
+            <ac:spMkLst>
+              <pc:docMk/>
+              <pc:sldMasterMk cId="738123879" sldId="2147483684"/>
+              <pc:sldLayoutMk cId="1462585153" sldId="2147483689"/>
+              <ac:spMk id="2" creationId="{00000000-0000-0000-0000-000000000000}"/>
+            </ac:spMkLst>
+          </pc:spChg>
+          <pc:spChg chg="mod">
+            <ac:chgData name="Zachary Randell" userId="4632875424_tp_dropbox_plus" providerId="OAuth2" clId="{94F170DD-8542-47A7-905C-5CC9F103855A}" dt="2026-07-08T22:05:18.894" v="89"/>
+            <ac:spMkLst>
+              <pc:docMk/>
+              <pc:sldMasterMk cId="738123879" sldId="2147483684"/>
+              <pc:sldLayoutMk cId="1462585153" sldId="2147483689"/>
+              <ac:spMk id="3" creationId="{00000000-0000-0000-0000-000000000000}"/>
+            </ac:spMkLst>
+          </pc:spChg>
+          <pc:spChg chg="mod">
+            <ac:chgData name="Zachary Randell" userId="4632875424_tp_dropbox_plus" providerId="OAuth2" clId="{94F170DD-8542-47A7-905C-5CC9F103855A}" dt="2026-07-08T22:05:18.894" v="89"/>
+            <ac:spMkLst>
+              <pc:docMk/>
+              <pc:sldMasterMk cId="738123879" sldId="2147483684"/>
+              <pc:sldLayoutMk cId="1462585153" sldId="2147483689"/>
+              <ac:spMk id="4" creationId="{00000000-0000-0000-0000-000000000000}"/>
+            </ac:spMkLst>
+          </pc:spChg>
+          <pc:spChg chg="mod">
+            <ac:chgData name="Zachary Randell" userId="4632875424_tp_dropbox_plus" providerId="OAuth2" clId="{94F170DD-8542-47A7-905C-5CC9F103855A}" dt="2026-07-08T22:05:18.894" v="89"/>
+            <ac:spMkLst>
+              <pc:docMk/>
+              <pc:sldMasterMk cId="738123879" sldId="2147483684"/>
+              <pc:sldLayoutMk cId="1462585153" sldId="2147483689"/>
+              <ac:spMk id="5" creationId="{00000000-0000-0000-0000-000000000000}"/>
+            </ac:spMkLst>
+          </pc:spChg>
+          <pc:spChg chg="mod">
+            <ac:chgData name="Zachary Randell" userId="4632875424_tp_dropbox_plus" providerId="OAuth2" clId="{94F170DD-8542-47A7-905C-5CC9F103855A}" dt="2026-07-08T22:05:18.894" v="89"/>
+            <ac:spMkLst>
+              <pc:docMk/>
+              <pc:sldMasterMk cId="738123879" sldId="2147483684"/>
+              <pc:sldLayoutMk cId="1462585153" sldId="2147483689"/>
+              <ac:spMk id="6" creationId="{00000000-0000-0000-0000-000000000000}"/>
+            </ac:spMkLst>
+          </pc:spChg>
+        </pc:sldLayoutChg>
+        <pc:sldLayoutChg chg="modSp">
+          <pc:chgData name="Zachary Randell" userId="4632875424_tp_dropbox_plus" providerId="OAuth2" clId="{94F170DD-8542-47A7-905C-5CC9F103855A}" dt="2026-07-08T22:05:18.894" v="89"/>
+          <pc:sldLayoutMkLst>
+            <pc:docMk/>
+            <pc:sldMasterMk cId="738123879" sldId="2147483684"/>
+            <pc:sldLayoutMk cId="2167456739" sldId="2147483692"/>
+          </pc:sldLayoutMkLst>
+          <pc:spChg chg="mod">
+            <ac:chgData name="Zachary Randell" userId="4632875424_tp_dropbox_plus" providerId="OAuth2" clId="{94F170DD-8542-47A7-905C-5CC9F103855A}" dt="2026-07-08T22:05:18.894" v="89"/>
+            <ac:spMkLst>
+              <pc:docMk/>
+              <pc:sldMasterMk cId="738123879" sldId="2147483684"/>
+              <pc:sldLayoutMk cId="2167456739" sldId="2147483692"/>
+              <ac:spMk id="2" creationId="{00000000-0000-0000-0000-000000000000}"/>
+            </ac:spMkLst>
+          </pc:spChg>
+          <pc:spChg chg="mod">
+            <ac:chgData name="Zachary Randell" userId="4632875424_tp_dropbox_plus" providerId="OAuth2" clId="{94F170DD-8542-47A7-905C-5CC9F103855A}" dt="2026-07-08T22:05:18.894" v="89"/>
+            <ac:spMkLst>
+              <pc:docMk/>
+              <pc:sldMasterMk cId="738123879" sldId="2147483684"/>
+              <pc:sldLayoutMk cId="2167456739" sldId="2147483692"/>
+              <ac:spMk id="3" creationId="{00000000-0000-0000-0000-000000000000}"/>
+            </ac:spMkLst>
+          </pc:spChg>
+          <pc:spChg chg="mod">
+            <ac:chgData name="Zachary Randell" userId="4632875424_tp_dropbox_plus" providerId="OAuth2" clId="{94F170DD-8542-47A7-905C-5CC9F103855A}" dt="2026-07-08T22:05:18.894" v="89"/>
+            <ac:spMkLst>
+              <pc:docMk/>
+              <pc:sldMasterMk cId="738123879" sldId="2147483684"/>
+              <pc:sldLayoutMk cId="2167456739" sldId="2147483692"/>
+              <ac:spMk id="4" creationId="{00000000-0000-0000-0000-000000000000}"/>
+            </ac:spMkLst>
+          </pc:spChg>
+        </pc:sldLayoutChg>
+        <pc:sldLayoutChg chg="modSp">
+          <pc:chgData name="Zachary Randell" userId="4632875424_tp_dropbox_plus" providerId="OAuth2" clId="{94F170DD-8542-47A7-905C-5CC9F103855A}" dt="2026-07-08T22:05:18.894" v="89"/>
+          <pc:sldLayoutMkLst>
+            <pc:docMk/>
+            <pc:sldMasterMk cId="738123879" sldId="2147483684"/>
+            <pc:sldLayoutMk cId="2856723686" sldId="2147483693"/>
+          </pc:sldLayoutMkLst>
+          <pc:spChg chg="mod">
+            <ac:chgData name="Zachary Randell" userId="4632875424_tp_dropbox_plus" providerId="OAuth2" clId="{94F170DD-8542-47A7-905C-5CC9F103855A}" dt="2026-07-08T22:05:18.894" v="89"/>
+            <ac:spMkLst>
+              <pc:docMk/>
+              <pc:sldMasterMk cId="738123879" sldId="2147483684"/>
+              <pc:sldLayoutMk cId="2856723686" sldId="2147483693"/>
+              <ac:spMk id="2" creationId="{00000000-0000-0000-0000-000000000000}"/>
+            </ac:spMkLst>
+          </pc:spChg>
+          <pc:spChg chg="mod">
+            <ac:chgData name="Zachary Randell" userId="4632875424_tp_dropbox_plus" providerId="OAuth2" clId="{94F170DD-8542-47A7-905C-5CC9F103855A}" dt="2026-07-08T22:05:18.894" v="89"/>
+            <ac:spMkLst>
+              <pc:docMk/>
+              <pc:sldMasterMk cId="738123879" sldId="2147483684"/>
+              <pc:sldLayoutMk cId="2856723686" sldId="2147483693"/>
+              <ac:spMk id="3" creationId="{00000000-0000-0000-0000-000000000000}"/>
+            </ac:spMkLst>
+          </pc:spChg>
+          <pc:spChg chg="mod">
+            <ac:chgData name="Zachary Randell" userId="4632875424_tp_dropbox_plus" providerId="OAuth2" clId="{94F170DD-8542-47A7-905C-5CC9F103855A}" dt="2026-07-08T22:05:18.894" v="89"/>
+            <ac:spMkLst>
+              <pc:docMk/>
+              <pc:sldMasterMk cId="738123879" sldId="2147483684"/>
+              <pc:sldLayoutMk cId="2856723686" sldId="2147483693"/>
+              <ac:spMk id="4" creationId="{00000000-0000-0000-0000-000000000000}"/>
+            </ac:spMkLst>
+          </pc:spChg>
+        </pc:sldLayoutChg>
+        <pc:sldLayoutChg chg="modSp">
+          <pc:chgData name="Zachary Randell" userId="4632875424_tp_dropbox_plus" providerId="OAuth2" clId="{94F170DD-8542-47A7-905C-5CC9F103855A}" dt="2026-07-08T22:05:18.894" v="89"/>
+          <pc:sldLayoutMkLst>
+            <pc:docMk/>
+            <pc:sldMasterMk cId="738123879" sldId="2147483684"/>
+            <pc:sldLayoutMk cId="3302967944" sldId="2147483695"/>
+          </pc:sldLayoutMkLst>
+          <pc:spChg chg="mod">
+            <ac:chgData name="Zachary Randell" userId="4632875424_tp_dropbox_plus" providerId="OAuth2" clId="{94F170DD-8542-47A7-905C-5CC9F103855A}" dt="2026-07-08T22:05:18.894" v="89"/>
+            <ac:spMkLst>
+              <pc:docMk/>
+              <pc:sldMasterMk cId="738123879" sldId="2147483684"/>
+              <pc:sldLayoutMk cId="3302967944" sldId="2147483695"/>
+              <ac:spMk id="2" creationId="{00000000-0000-0000-0000-000000000000}"/>
+            </ac:spMkLst>
+          </pc:spChg>
+          <pc:spChg chg="mod">
+            <ac:chgData name="Zachary Randell" userId="4632875424_tp_dropbox_plus" providerId="OAuth2" clId="{94F170DD-8542-47A7-905C-5CC9F103855A}" dt="2026-07-08T22:05:18.894" v="89"/>
+            <ac:spMkLst>
+              <pc:docMk/>
+              <pc:sldMasterMk cId="738123879" sldId="2147483684"/>
+              <pc:sldLayoutMk cId="3302967944" sldId="2147483695"/>
+              <ac:spMk id="3" creationId="{00000000-0000-0000-0000-000000000000}"/>
+            </ac:spMkLst>
+          </pc:spChg>
+        </pc:sldLayoutChg>
+      </pc:sldMasterChg>
     </pc:docChg>
   </pc:docChgLst>
 </pc:chgInfo>
@@ -241,7 +2009,7 @@
           <a:p>
             <a:fld id="{D8F5B7E5-F99F-471B-B3DE-57965D1045F7}" type="datetimeFigureOut">
               <a:rPr lang="en-US" smtClean="0"/>
-              <a:t>6/5/2026</a:t>
+              <a:t>7/8/2026</a:t>
             </a:fld>
             <a:endParaRPr lang="en-US"/>
           </a:p>
@@ -259,8 +2027,8 @@
         </p:nvSpPr>
         <p:spPr>
           <a:xfrm>
-            <a:off x="685800" y="1143000"/>
-            <a:ext cx="5486400" cy="3086100"/>
+            <a:off x="850900" y="1143000"/>
+            <a:ext cx="5156200" cy="3086100"/>
           </a:xfrm>
           <a:prstGeom prst="rect">
             <a:avLst/>
@@ -414,8 +2182,8 @@
   </p:cSld>
   <p:clrMap bg1="lt1" tx1="dk1" bg2="lt2" tx2="dk2" accent1="accent1" accent2="accent2" accent3="accent3" accent4="accent4" accent5="accent5" accent6="accent6" hlink="hlink" folHlink="folHlink"/>
   <p:notesStyle>
-    <a:lvl1pPr marL="0" algn="l" defTabSz="914400" rtl="0" eaLnBrk="1" latinLnBrk="0" hangingPunct="1">
-      <a:defRPr sz="1200" kern="1200">
+    <a:lvl1pPr marL="0" algn="l" defTabSz="914165" rtl="0" eaLnBrk="1" latinLnBrk="0" hangingPunct="1">
+      <a:defRPr sz="1199" kern="1200">
         <a:solidFill>
           <a:schemeClr val="tx1"/>
         </a:solidFill>
@@ -424,8 +2192,8 @@
         <a:cs typeface="+mn-cs"/>
       </a:defRPr>
     </a:lvl1pPr>
-    <a:lvl2pPr marL="457200" algn="l" defTabSz="914400" rtl="0" eaLnBrk="1" latinLnBrk="0" hangingPunct="1">
-      <a:defRPr sz="1200" kern="1200">
+    <a:lvl2pPr marL="457083" algn="l" defTabSz="914165" rtl="0" eaLnBrk="1" latinLnBrk="0" hangingPunct="1">
+      <a:defRPr sz="1199" kern="1200">
         <a:solidFill>
           <a:schemeClr val="tx1"/>
         </a:solidFill>
@@ -434,8 +2202,8 @@
         <a:cs typeface="+mn-cs"/>
       </a:defRPr>
     </a:lvl2pPr>
-    <a:lvl3pPr marL="914400" algn="l" defTabSz="914400" rtl="0" eaLnBrk="1" latinLnBrk="0" hangingPunct="1">
-      <a:defRPr sz="1200" kern="1200">
+    <a:lvl3pPr marL="914165" algn="l" defTabSz="914165" rtl="0" eaLnBrk="1" latinLnBrk="0" hangingPunct="1">
+      <a:defRPr sz="1199" kern="1200">
         <a:solidFill>
           <a:schemeClr val="tx1"/>
         </a:solidFill>
@@ -444,8 +2212,8 @@
         <a:cs typeface="+mn-cs"/>
       </a:defRPr>
     </a:lvl3pPr>
-    <a:lvl4pPr marL="1371600" algn="l" defTabSz="914400" rtl="0" eaLnBrk="1" latinLnBrk="0" hangingPunct="1">
-      <a:defRPr sz="1200" kern="1200">
+    <a:lvl4pPr marL="1371248" algn="l" defTabSz="914165" rtl="0" eaLnBrk="1" latinLnBrk="0" hangingPunct="1">
+      <a:defRPr sz="1199" kern="1200">
         <a:solidFill>
           <a:schemeClr val="tx1"/>
         </a:solidFill>
@@ -454,8 +2222,8 @@
         <a:cs typeface="+mn-cs"/>
       </a:defRPr>
     </a:lvl4pPr>
-    <a:lvl5pPr marL="1828800" algn="l" defTabSz="914400" rtl="0" eaLnBrk="1" latinLnBrk="0" hangingPunct="1">
-      <a:defRPr sz="1200" kern="1200">
+    <a:lvl5pPr marL="1828330" algn="l" defTabSz="914165" rtl="0" eaLnBrk="1" latinLnBrk="0" hangingPunct="1">
+      <a:defRPr sz="1199" kern="1200">
         <a:solidFill>
           <a:schemeClr val="tx1"/>
         </a:solidFill>
@@ -464,8 +2232,8 @@
         <a:cs typeface="+mn-cs"/>
       </a:defRPr>
     </a:lvl5pPr>
-    <a:lvl6pPr marL="2286000" algn="l" defTabSz="914400" rtl="0" eaLnBrk="1" latinLnBrk="0" hangingPunct="1">
-      <a:defRPr sz="1200" kern="1200">
+    <a:lvl6pPr marL="2285413" algn="l" defTabSz="914165" rtl="0" eaLnBrk="1" latinLnBrk="0" hangingPunct="1">
+      <a:defRPr sz="1199" kern="1200">
         <a:solidFill>
           <a:schemeClr val="tx1"/>
         </a:solidFill>
@@ -474,8 +2242,8 @@
         <a:cs typeface="+mn-cs"/>
       </a:defRPr>
     </a:lvl6pPr>
-    <a:lvl7pPr marL="2743200" algn="l" defTabSz="914400" rtl="0" eaLnBrk="1" latinLnBrk="0" hangingPunct="1">
-      <a:defRPr sz="1200" kern="1200">
+    <a:lvl7pPr marL="2742494" algn="l" defTabSz="914165" rtl="0" eaLnBrk="1" latinLnBrk="0" hangingPunct="1">
+      <a:defRPr sz="1199" kern="1200">
         <a:solidFill>
           <a:schemeClr val="tx1"/>
         </a:solidFill>
@@ -484,8 +2252,8 @@
         <a:cs typeface="+mn-cs"/>
       </a:defRPr>
     </a:lvl7pPr>
-    <a:lvl8pPr marL="3200400" algn="l" defTabSz="914400" rtl="0" eaLnBrk="1" latinLnBrk="0" hangingPunct="1">
-      <a:defRPr sz="1200" kern="1200">
+    <a:lvl8pPr marL="3199578" algn="l" defTabSz="914165" rtl="0" eaLnBrk="1" latinLnBrk="0" hangingPunct="1">
+      <a:defRPr sz="1199" kern="1200">
         <a:solidFill>
           <a:schemeClr val="tx1"/>
         </a:solidFill>
@@ -494,8 +2262,8 @@
         <a:cs typeface="+mn-cs"/>
       </a:defRPr>
     </a:lvl8pPr>
-    <a:lvl9pPr marL="3657600" algn="l" defTabSz="914400" rtl="0" eaLnBrk="1" latinLnBrk="0" hangingPunct="1">
-      <a:defRPr sz="1200" kern="1200">
+    <a:lvl9pPr marL="3656658" algn="l" defTabSz="914165" rtl="0" eaLnBrk="1" latinLnBrk="0" hangingPunct="1">
+      <a:defRPr sz="1199" kern="1200">
         <a:solidFill>
           <a:schemeClr val="tx1"/>
         </a:solidFill>
@@ -535,7 +2303,12 @@
             <p:ph type="sldImg"/>
           </p:nvPr>
         </p:nvSpPr>
-        <p:spPr/>
+        <p:spPr>
+          <a:xfrm>
+            <a:off x="850900" y="1143000"/>
+            <a:ext cx="5156200" cy="3086100"/>
+          </a:xfrm>
+        </p:spPr>
       </p:sp>
       <p:sp>
         <p:nvSpPr>
@@ -611,13 +2384,7 @@
       </p:grpSpPr>
       <p:sp>
         <p:nvSpPr>
-          <p:cNvPr id="2" name="Title 1">
-            <a:extLst>
-              <a:ext uri="{FF2B5EF4-FFF2-40B4-BE49-F238E27FC236}">
-                <a16:creationId xmlns:a16="http://schemas.microsoft.com/office/drawing/2014/main" id="{A2A7A047-71D4-CF28-2BF4-2B508E57D1C3}"/>
-              </a:ext>
-            </a:extLst>
-          </p:cNvPr>
+          <p:cNvPr id="2" name="Title 1"/>
           <p:cNvSpPr>
             <a:spLocks noGrp="1"/>
           </p:cNvSpPr>
@@ -627,15 +2394,15 @@
         </p:nvSpPr>
         <p:spPr>
           <a:xfrm>
-            <a:off x="1524000" y="1122363"/>
-            <a:ext cx="9144000" cy="2387600"/>
+            <a:off x="1394421" y="1092486"/>
+            <a:ext cx="8366522" cy="2324041"/>
           </a:xfrm>
         </p:spPr>
         <p:txBody>
           <a:bodyPr anchor="b"/>
           <a:lstStyle>
             <a:lvl1pPr algn="ctr">
-              <a:defRPr sz="6000"/>
+              <a:defRPr sz="5490"/>
             </a:lvl1pPr>
           </a:lstStyle>
           <a:p>
@@ -643,18 +2410,13 @@
               <a:rPr lang="en-US"/>
               <a:t>Click to edit Master title style</a:t>
             </a:r>
+            <a:endParaRPr lang="en-US" dirty="0"/>
           </a:p>
         </p:txBody>
       </p:sp>
       <p:sp>
         <p:nvSpPr>
-          <p:cNvPr id="3" name="Subtitle 2">
-            <a:extLst>
-              <a:ext uri="{FF2B5EF4-FFF2-40B4-BE49-F238E27FC236}">
-                <a16:creationId xmlns:a16="http://schemas.microsoft.com/office/drawing/2014/main" id="{E75D9E69-8B4A-8ACD-A6ED-91FD6C01DAAC}"/>
-              </a:ext>
-            </a:extLst>
-          </p:cNvPr>
+          <p:cNvPr id="3" name="Subtitle 2"/>
           <p:cNvSpPr>
             <a:spLocks noGrp="1"/>
           </p:cNvSpPr>
@@ -664,8 +2426,8 @@
         </p:nvSpPr>
         <p:spPr>
           <a:xfrm>
-            <a:off x="1524000" y="3602038"/>
-            <a:ext cx="9144000" cy="1655762"/>
+            <a:off x="1394421" y="3506151"/>
+            <a:ext cx="8366522" cy="1611685"/>
           </a:xfrm>
         </p:spPr>
         <p:txBody>
@@ -673,39 +2435,39 @@
           <a:lstStyle>
             <a:lvl1pPr marL="0" indent="0" algn="ctr">
               <a:buNone/>
-              <a:defRPr sz="2400"/>
+              <a:defRPr sz="2196"/>
             </a:lvl1pPr>
-            <a:lvl2pPr marL="457200" indent="0" algn="ctr">
+            <a:lvl2pPr marL="418338" indent="0" algn="ctr">
               <a:buNone/>
-              <a:defRPr sz="2000"/>
+              <a:defRPr sz="1830"/>
             </a:lvl2pPr>
-            <a:lvl3pPr marL="914400" indent="0" algn="ctr">
+            <a:lvl3pPr marL="836676" indent="0" algn="ctr">
               <a:buNone/>
-              <a:defRPr sz="1800"/>
+              <a:defRPr sz="1647"/>
             </a:lvl3pPr>
-            <a:lvl4pPr marL="1371600" indent="0" algn="ctr">
+            <a:lvl4pPr marL="1255014" indent="0" algn="ctr">
               <a:buNone/>
-              <a:defRPr sz="1600"/>
+              <a:defRPr sz="1464"/>
             </a:lvl4pPr>
-            <a:lvl5pPr marL="1828800" indent="0" algn="ctr">
+            <a:lvl5pPr marL="1673352" indent="0" algn="ctr">
               <a:buNone/>
-              <a:defRPr sz="1600"/>
+              <a:defRPr sz="1464"/>
             </a:lvl5pPr>
-            <a:lvl6pPr marL="2286000" indent="0" algn="ctr">
+            <a:lvl6pPr marL="2091690" indent="0" algn="ctr">
               <a:buNone/>
-              <a:defRPr sz="1600"/>
+              <a:defRPr sz="1464"/>
             </a:lvl6pPr>
-            <a:lvl7pPr marL="2743200" indent="0" algn="ctr">
+            <a:lvl7pPr marL="2510028" indent="0" algn="ctr">
               <a:buNone/>
-              <a:defRPr sz="1600"/>
+              <a:defRPr sz="1464"/>
             </a:lvl7pPr>
-            <a:lvl8pPr marL="3200400" indent="0" algn="ctr">
+            <a:lvl8pPr marL="2928366" indent="0" algn="ctr">
               <a:buNone/>
-              <a:defRPr sz="1600"/>
+              <a:defRPr sz="1464"/>
             </a:lvl8pPr>
-            <a:lvl9pPr marL="3657600" indent="0" algn="ctr">
+            <a:lvl9pPr marL="3346704" indent="0" algn="ctr">
               <a:buNone/>
-              <a:defRPr sz="1600"/>
+              <a:defRPr sz="1464"/>
             </a:lvl9pPr>
           </a:lstStyle>
           <a:p>
@@ -713,18 +2475,13 @@
               <a:rPr lang="en-US"/>
               <a:t>Click to edit Master subtitle style</a:t>
             </a:r>
+            <a:endParaRPr lang="en-US" dirty="0"/>
           </a:p>
         </p:txBody>
       </p:sp>
       <p:sp>
         <p:nvSpPr>
-          <p:cNvPr id="4" name="Date Placeholder 3">
-            <a:extLst>
-              <a:ext uri="{FF2B5EF4-FFF2-40B4-BE49-F238E27FC236}">
-                <a16:creationId xmlns:a16="http://schemas.microsoft.com/office/drawing/2014/main" id="{9F40B8ED-EB30-0F50-9DEB-82F2F14C76D7}"/>
-              </a:ext>
-            </a:extLst>
-          </p:cNvPr>
+          <p:cNvPr id="4" name="Date Placeholder 3"/>
           <p:cNvSpPr>
             <a:spLocks noGrp="1"/>
           </p:cNvSpPr>
@@ -739,7 +2496,7 @@
           <a:p>
             <a:fld id="{69B944B8-7A9A-4030-BC91-8FDE173981C2}" type="datetimeFigureOut">
               <a:rPr lang="en-US" smtClean="0"/>
-              <a:t>6/5/2026</a:t>
+              <a:t>7/8/2026</a:t>
             </a:fld>
             <a:endParaRPr lang="en-US"/>
           </a:p>
@@ -747,13 +2504,7 @@
       </p:sp>
       <p:sp>
         <p:nvSpPr>
-          <p:cNvPr id="5" name="Footer Placeholder 4">
-            <a:extLst>
-              <a:ext uri="{FF2B5EF4-FFF2-40B4-BE49-F238E27FC236}">
-                <a16:creationId xmlns:a16="http://schemas.microsoft.com/office/drawing/2014/main" id="{8AE5C88D-A9DA-0A8E-A1C3-38EFE107C0C0}"/>
-              </a:ext>
-            </a:extLst>
-          </p:cNvPr>
+          <p:cNvPr id="5" name="Footer Placeholder 4"/>
           <p:cNvSpPr>
             <a:spLocks noGrp="1"/>
           </p:cNvSpPr>
@@ -772,13 +2523,7 @@
       </p:sp>
       <p:sp>
         <p:nvSpPr>
-          <p:cNvPr id="6" name="Slide Number Placeholder 5">
-            <a:extLst>
-              <a:ext uri="{FF2B5EF4-FFF2-40B4-BE49-F238E27FC236}">
-                <a16:creationId xmlns:a16="http://schemas.microsoft.com/office/drawing/2014/main" id="{92AC637B-C6FC-BAC2-E34B-51D422BF7D95}"/>
-              </a:ext>
-            </a:extLst>
-          </p:cNvPr>
+          <p:cNvPr id="6" name="Slide Number Placeholder 5"/>
           <p:cNvSpPr>
             <a:spLocks noGrp="1"/>
           </p:cNvSpPr>
@@ -802,7 +2547,7 @@
     </p:spTree>
     <p:extLst>
       <p:ext uri="{BB962C8B-B14F-4D97-AF65-F5344CB8AC3E}">
-        <p14:creationId xmlns:p14="http://schemas.microsoft.com/office/powerpoint/2010/main" val="383430719"/>
+        <p14:creationId xmlns:p14="http://schemas.microsoft.com/office/powerpoint/2010/main" val="868819739"/>
       </p:ext>
     </p:extLst>
   </p:cSld>
@@ -831,13 +2576,7 @@
       </p:grpSpPr>
       <p:sp>
         <p:nvSpPr>
-          <p:cNvPr id="2" name="Title 1">
-            <a:extLst>
-              <a:ext uri="{FF2B5EF4-FFF2-40B4-BE49-F238E27FC236}">
-                <a16:creationId xmlns:a16="http://schemas.microsoft.com/office/drawing/2014/main" id="{A2786C7A-3D67-7132-DFFC-7DBD6C8D2507}"/>
-              </a:ext>
-            </a:extLst>
-          </p:cNvPr>
+          <p:cNvPr id="2" name="Title 1"/>
           <p:cNvSpPr>
             <a:spLocks noGrp="1"/>
           </p:cNvSpPr>
@@ -854,18 +2593,13 @@
               <a:rPr lang="en-US"/>
               <a:t>Click to edit Master title style</a:t>
             </a:r>
+            <a:endParaRPr lang="en-US" dirty="0"/>
           </a:p>
         </p:txBody>
       </p:sp>
       <p:sp>
         <p:nvSpPr>
-          <p:cNvPr id="3" name="Vertical Text Placeholder 2">
-            <a:extLst>
-              <a:ext uri="{FF2B5EF4-FFF2-40B4-BE49-F238E27FC236}">
-                <a16:creationId xmlns:a16="http://schemas.microsoft.com/office/drawing/2014/main" id="{66248149-D5F9-C74E-7F5E-F9FD551BE94F}"/>
-              </a:ext>
-            </a:extLst>
-          </p:cNvPr>
+          <p:cNvPr id="3" name="Vertical Text Placeholder 2"/>
           <p:cNvSpPr>
             <a:spLocks noGrp="1"/>
           </p:cNvSpPr>
@@ -911,18 +2645,13 @@
               <a:rPr lang="en-US"/>
               <a:t>Fifth level</a:t>
             </a:r>
+            <a:endParaRPr lang="en-US" dirty="0"/>
           </a:p>
         </p:txBody>
       </p:sp>
       <p:sp>
         <p:nvSpPr>
-          <p:cNvPr id="4" name="Date Placeholder 3">
-            <a:extLst>
-              <a:ext uri="{FF2B5EF4-FFF2-40B4-BE49-F238E27FC236}">
-                <a16:creationId xmlns:a16="http://schemas.microsoft.com/office/drawing/2014/main" id="{44F84D81-AB26-511B-151D-C37DC310B597}"/>
-              </a:ext>
-            </a:extLst>
-          </p:cNvPr>
+          <p:cNvPr id="4" name="Date Placeholder 3"/>
           <p:cNvSpPr>
             <a:spLocks noGrp="1"/>
           </p:cNvSpPr>
@@ -937,7 +2666,7 @@
           <a:p>
             <a:fld id="{69B944B8-7A9A-4030-BC91-8FDE173981C2}" type="datetimeFigureOut">
               <a:rPr lang="en-US" smtClean="0"/>
-              <a:t>6/5/2026</a:t>
+              <a:t>7/8/2026</a:t>
             </a:fld>
             <a:endParaRPr lang="en-US"/>
           </a:p>
@@ -945,13 +2674,7 @@
       </p:sp>
       <p:sp>
         <p:nvSpPr>
-          <p:cNvPr id="5" name="Footer Placeholder 4">
-            <a:extLst>
-              <a:ext uri="{FF2B5EF4-FFF2-40B4-BE49-F238E27FC236}">
-                <a16:creationId xmlns:a16="http://schemas.microsoft.com/office/drawing/2014/main" id="{4E699E7B-BDF6-DA67-73A2-1C63BCDC1361}"/>
-              </a:ext>
-            </a:extLst>
-          </p:cNvPr>
+          <p:cNvPr id="5" name="Footer Placeholder 4"/>
           <p:cNvSpPr>
             <a:spLocks noGrp="1"/>
           </p:cNvSpPr>
@@ -970,13 +2693,7 @@
       </p:sp>
       <p:sp>
         <p:nvSpPr>
-          <p:cNvPr id="6" name="Slide Number Placeholder 5">
-            <a:extLst>
-              <a:ext uri="{FF2B5EF4-FFF2-40B4-BE49-F238E27FC236}">
-                <a16:creationId xmlns:a16="http://schemas.microsoft.com/office/drawing/2014/main" id="{9B0ECABD-CBD4-394E-F011-C75B45B719E6}"/>
-              </a:ext>
-            </a:extLst>
-          </p:cNvPr>
+          <p:cNvPr id="6" name="Slide Number Placeholder 5"/>
           <p:cNvSpPr>
             <a:spLocks noGrp="1"/>
           </p:cNvSpPr>
@@ -1000,7 +2717,7 @@
     </p:spTree>
     <p:extLst>
       <p:ext uri="{BB962C8B-B14F-4D97-AF65-F5344CB8AC3E}">
-        <p14:creationId xmlns:p14="http://schemas.microsoft.com/office/powerpoint/2010/main" val="2611289414"/>
+        <p14:creationId xmlns:p14="http://schemas.microsoft.com/office/powerpoint/2010/main" val="1626532236"/>
       </p:ext>
     </p:extLst>
   </p:cSld>
@@ -1029,13 +2746,7 @@
       </p:grpSpPr>
       <p:sp>
         <p:nvSpPr>
-          <p:cNvPr id="2" name="Vertical Title 1">
-            <a:extLst>
-              <a:ext uri="{FF2B5EF4-FFF2-40B4-BE49-F238E27FC236}">
-                <a16:creationId xmlns:a16="http://schemas.microsoft.com/office/drawing/2014/main" id="{0158DAD5-A320-6D6A-3210-9358C9D55FE0}"/>
-              </a:ext>
-            </a:extLst>
-          </p:cNvPr>
+          <p:cNvPr id="2" name="Vertical Title 1"/>
           <p:cNvSpPr>
             <a:spLocks noGrp="1"/>
           </p:cNvSpPr>
@@ -1045,8 +2756,8 @@
         </p:nvSpPr>
         <p:spPr>
           <a:xfrm>
-            <a:off x="8724900" y="365125"/>
-            <a:ext cx="2628900" cy="5811838"/>
+            <a:off x="7983057" y="355405"/>
+            <a:ext cx="2405375" cy="5657125"/>
           </a:xfrm>
         </p:spPr>
         <p:txBody>
@@ -1057,18 +2768,13 @@
               <a:rPr lang="en-US"/>
               <a:t>Click to edit Master title style</a:t>
             </a:r>
+            <a:endParaRPr lang="en-US" dirty="0"/>
           </a:p>
         </p:txBody>
       </p:sp>
       <p:sp>
         <p:nvSpPr>
-          <p:cNvPr id="3" name="Vertical Text Placeholder 2">
-            <a:extLst>
-              <a:ext uri="{FF2B5EF4-FFF2-40B4-BE49-F238E27FC236}">
-                <a16:creationId xmlns:a16="http://schemas.microsoft.com/office/drawing/2014/main" id="{6B493F8D-DDBF-A3A2-9195-39841FC03450}"/>
-              </a:ext>
-            </a:extLst>
-          </p:cNvPr>
+          <p:cNvPr id="3" name="Vertical Text Placeholder 2"/>
           <p:cNvSpPr>
             <a:spLocks noGrp="1"/>
           </p:cNvSpPr>
@@ -1078,8 +2784,8 @@
         </p:nvSpPr>
         <p:spPr>
           <a:xfrm>
-            <a:off x="838200" y="365125"/>
-            <a:ext cx="7734300" cy="5811838"/>
+            <a:off x="766931" y="355405"/>
+            <a:ext cx="7076683" cy="5657125"/>
           </a:xfrm>
         </p:spPr>
         <p:txBody>
@@ -1119,18 +2825,13 @@
               <a:rPr lang="en-US"/>
               <a:t>Fifth level</a:t>
             </a:r>
+            <a:endParaRPr lang="en-US" dirty="0"/>
           </a:p>
         </p:txBody>
       </p:sp>
       <p:sp>
         <p:nvSpPr>
-          <p:cNvPr id="4" name="Date Placeholder 3">
-            <a:extLst>
-              <a:ext uri="{FF2B5EF4-FFF2-40B4-BE49-F238E27FC236}">
-                <a16:creationId xmlns:a16="http://schemas.microsoft.com/office/drawing/2014/main" id="{0CE6EA53-6931-0E6C-5424-4E44A31CD32C}"/>
-              </a:ext>
-            </a:extLst>
-          </p:cNvPr>
+          <p:cNvPr id="4" name="Date Placeholder 3"/>
           <p:cNvSpPr>
             <a:spLocks noGrp="1"/>
           </p:cNvSpPr>
@@ -1145,7 +2846,7 @@
           <a:p>
             <a:fld id="{69B944B8-7A9A-4030-BC91-8FDE173981C2}" type="datetimeFigureOut">
               <a:rPr lang="en-US" smtClean="0"/>
-              <a:t>6/5/2026</a:t>
+              <a:t>7/8/2026</a:t>
             </a:fld>
             <a:endParaRPr lang="en-US"/>
           </a:p>
@@ -1153,13 +2854,7 @@
       </p:sp>
       <p:sp>
         <p:nvSpPr>
-          <p:cNvPr id="5" name="Footer Placeholder 4">
-            <a:extLst>
-              <a:ext uri="{FF2B5EF4-FFF2-40B4-BE49-F238E27FC236}">
-                <a16:creationId xmlns:a16="http://schemas.microsoft.com/office/drawing/2014/main" id="{D36AB108-18E1-04E5-3E42-FE8B3BAD20A0}"/>
-              </a:ext>
-            </a:extLst>
-          </p:cNvPr>
+          <p:cNvPr id="5" name="Footer Placeholder 4"/>
           <p:cNvSpPr>
             <a:spLocks noGrp="1"/>
           </p:cNvSpPr>
@@ -1178,13 +2873,7 @@
       </p:sp>
       <p:sp>
         <p:nvSpPr>
-          <p:cNvPr id="6" name="Slide Number Placeholder 5">
-            <a:extLst>
-              <a:ext uri="{FF2B5EF4-FFF2-40B4-BE49-F238E27FC236}">
-                <a16:creationId xmlns:a16="http://schemas.microsoft.com/office/drawing/2014/main" id="{7D7764B6-B88A-0DE0-60E7-0F7BE1FED0E9}"/>
-              </a:ext>
-            </a:extLst>
-          </p:cNvPr>
+          <p:cNvPr id="6" name="Slide Number Placeholder 5"/>
           <p:cNvSpPr>
             <a:spLocks noGrp="1"/>
           </p:cNvSpPr>
@@ -1208,7 +2897,7 @@
     </p:spTree>
     <p:extLst>
       <p:ext uri="{BB962C8B-B14F-4D97-AF65-F5344CB8AC3E}">
-        <p14:creationId xmlns:p14="http://schemas.microsoft.com/office/powerpoint/2010/main" val="657761579"/>
+        <p14:creationId xmlns:p14="http://schemas.microsoft.com/office/powerpoint/2010/main" val="2643042345"/>
       </p:ext>
     </p:extLst>
   </p:cSld>
@@ -1237,13 +2926,7 @@
       </p:grpSpPr>
       <p:sp>
         <p:nvSpPr>
-          <p:cNvPr id="2" name="Title 1">
-            <a:extLst>
-              <a:ext uri="{FF2B5EF4-FFF2-40B4-BE49-F238E27FC236}">
-                <a16:creationId xmlns:a16="http://schemas.microsoft.com/office/drawing/2014/main" id="{BD5A5329-E8C4-BF5F-FEC6-1D2239AED7E4}"/>
-              </a:ext>
-            </a:extLst>
-          </p:cNvPr>
+          <p:cNvPr id="2" name="Title 1"/>
           <p:cNvSpPr>
             <a:spLocks noGrp="1"/>
           </p:cNvSpPr>
@@ -1260,18 +2943,13 @@
               <a:rPr lang="en-US"/>
               <a:t>Click to edit Master title style</a:t>
             </a:r>
+            <a:endParaRPr lang="en-US" dirty="0"/>
           </a:p>
         </p:txBody>
       </p:sp>
       <p:sp>
         <p:nvSpPr>
-          <p:cNvPr id="3" name="Content Placeholder 2">
-            <a:extLst>
-              <a:ext uri="{FF2B5EF4-FFF2-40B4-BE49-F238E27FC236}">
-                <a16:creationId xmlns:a16="http://schemas.microsoft.com/office/drawing/2014/main" id="{CE4AFE93-69E7-46DE-81D2-74A0ABB5511E}"/>
-              </a:ext>
-            </a:extLst>
-          </p:cNvPr>
+          <p:cNvPr id="3" name="Content Placeholder 2"/>
           <p:cNvSpPr>
             <a:spLocks noGrp="1"/>
           </p:cNvSpPr>
@@ -1317,18 +2995,13 @@
               <a:rPr lang="en-US"/>
               <a:t>Fifth level</a:t>
             </a:r>
+            <a:endParaRPr lang="en-US" dirty="0"/>
           </a:p>
         </p:txBody>
       </p:sp>
       <p:sp>
         <p:nvSpPr>
-          <p:cNvPr id="4" name="Date Placeholder 3">
-            <a:extLst>
-              <a:ext uri="{FF2B5EF4-FFF2-40B4-BE49-F238E27FC236}">
-                <a16:creationId xmlns:a16="http://schemas.microsoft.com/office/drawing/2014/main" id="{7FB68233-0D3E-0C02-FCBE-2EF963D54324}"/>
-              </a:ext>
-            </a:extLst>
-          </p:cNvPr>
+          <p:cNvPr id="4" name="Date Placeholder 3"/>
           <p:cNvSpPr>
             <a:spLocks noGrp="1"/>
           </p:cNvSpPr>
@@ -1343,7 +3016,7 @@
           <a:p>
             <a:fld id="{69B944B8-7A9A-4030-BC91-8FDE173981C2}" type="datetimeFigureOut">
               <a:rPr lang="en-US" smtClean="0"/>
-              <a:t>6/5/2026</a:t>
+              <a:t>7/8/2026</a:t>
             </a:fld>
             <a:endParaRPr lang="en-US"/>
           </a:p>
@@ -1351,13 +3024,7 @@
       </p:sp>
       <p:sp>
         <p:nvSpPr>
-          <p:cNvPr id="5" name="Footer Placeholder 4">
-            <a:extLst>
-              <a:ext uri="{FF2B5EF4-FFF2-40B4-BE49-F238E27FC236}">
-                <a16:creationId xmlns:a16="http://schemas.microsoft.com/office/drawing/2014/main" id="{0264EB4E-010A-FC0E-E9E4-A8EB66D696FE}"/>
-              </a:ext>
-            </a:extLst>
-          </p:cNvPr>
+          <p:cNvPr id="5" name="Footer Placeholder 4"/>
           <p:cNvSpPr>
             <a:spLocks noGrp="1"/>
           </p:cNvSpPr>
@@ -1376,13 +3043,7 @@
       </p:sp>
       <p:sp>
         <p:nvSpPr>
-          <p:cNvPr id="6" name="Slide Number Placeholder 5">
-            <a:extLst>
-              <a:ext uri="{FF2B5EF4-FFF2-40B4-BE49-F238E27FC236}">
-                <a16:creationId xmlns:a16="http://schemas.microsoft.com/office/drawing/2014/main" id="{B63E1A6A-3EE6-A2ED-721A-2384B09767BC}"/>
-              </a:ext>
-            </a:extLst>
-          </p:cNvPr>
+          <p:cNvPr id="6" name="Slide Number Placeholder 5"/>
           <p:cNvSpPr>
             <a:spLocks noGrp="1"/>
           </p:cNvSpPr>
@@ -1406,7 +3067,7 @@
     </p:spTree>
     <p:extLst>
       <p:ext uri="{BB962C8B-B14F-4D97-AF65-F5344CB8AC3E}">
-        <p14:creationId xmlns:p14="http://schemas.microsoft.com/office/powerpoint/2010/main" val="1760742569"/>
+        <p14:creationId xmlns:p14="http://schemas.microsoft.com/office/powerpoint/2010/main" val="3358112118"/>
       </p:ext>
     </p:extLst>
   </p:cSld>
@@ -1435,13 +3096,7 @@
       </p:grpSpPr>
       <p:sp>
         <p:nvSpPr>
-          <p:cNvPr id="2" name="Title 1">
-            <a:extLst>
-              <a:ext uri="{FF2B5EF4-FFF2-40B4-BE49-F238E27FC236}">
-                <a16:creationId xmlns:a16="http://schemas.microsoft.com/office/drawing/2014/main" id="{C734BE9E-6DDC-91F5-E15E-CF82C0100BD2}"/>
-              </a:ext>
-            </a:extLst>
-          </p:cNvPr>
+          <p:cNvPr id="2" name="Title 1"/>
           <p:cNvSpPr>
             <a:spLocks noGrp="1"/>
           </p:cNvSpPr>
@@ -1451,15 +3106,15 @@
         </p:nvSpPr>
         <p:spPr>
           <a:xfrm>
-            <a:off x="831850" y="1709738"/>
-            <a:ext cx="10515600" cy="2852737"/>
+            <a:off x="761121" y="1664225"/>
+            <a:ext cx="9621501" cy="2776796"/>
           </a:xfrm>
         </p:spPr>
         <p:txBody>
           <a:bodyPr anchor="b"/>
           <a:lstStyle>
             <a:lvl1pPr>
-              <a:defRPr sz="6000"/>
+              <a:defRPr sz="5490"/>
             </a:lvl1pPr>
           </a:lstStyle>
           <a:p>
@@ -1467,18 +3122,13 @@
               <a:rPr lang="en-US"/>
               <a:t>Click to edit Master title style</a:t>
             </a:r>
+            <a:endParaRPr lang="en-US" dirty="0"/>
           </a:p>
         </p:txBody>
       </p:sp>
       <p:sp>
         <p:nvSpPr>
-          <p:cNvPr id="3" name="Text Placeholder 2">
-            <a:extLst>
-              <a:ext uri="{FF2B5EF4-FFF2-40B4-BE49-F238E27FC236}">
-                <a16:creationId xmlns:a16="http://schemas.microsoft.com/office/drawing/2014/main" id="{05135131-4F76-6D11-CCA3-CBF991CEDC57}"/>
-              </a:ext>
-            </a:extLst>
-          </p:cNvPr>
+          <p:cNvPr id="3" name="Text Placeholder 2"/>
           <p:cNvSpPr>
             <a:spLocks noGrp="1"/>
           </p:cNvSpPr>
@@ -1488,8 +3138,8 @@
         </p:nvSpPr>
         <p:spPr>
           <a:xfrm>
-            <a:off x="831850" y="4589463"/>
-            <a:ext cx="10515600" cy="1500187"/>
+            <a:off x="761121" y="4467290"/>
+            <a:ext cx="9621501" cy="1460252"/>
           </a:xfrm>
         </p:spPr>
         <p:txBody>
@@ -1497,7 +3147,7 @@
           <a:lstStyle>
             <a:lvl1pPr marL="0" indent="0">
               <a:buNone/>
-              <a:defRPr sz="2400">
+              <a:defRPr sz="2196">
                 <a:solidFill>
                   <a:schemeClr val="tx1">
                     <a:tint val="82000"/>
@@ -1505,9 +3155,9 @@
                 </a:solidFill>
               </a:defRPr>
             </a:lvl1pPr>
-            <a:lvl2pPr marL="457200" indent="0">
+            <a:lvl2pPr marL="418338" indent="0">
               <a:buNone/>
-              <a:defRPr sz="2000">
+              <a:defRPr sz="1830">
                 <a:solidFill>
                   <a:schemeClr val="tx1">
                     <a:tint val="82000"/>
@@ -1515,9 +3165,9 @@
                 </a:solidFill>
               </a:defRPr>
             </a:lvl2pPr>
-            <a:lvl3pPr marL="914400" indent="0">
+            <a:lvl3pPr marL="836676" indent="0">
               <a:buNone/>
-              <a:defRPr sz="1800">
+              <a:defRPr sz="1647">
                 <a:solidFill>
                   <a:schemeClr val="tx1">
                     <a:tint val="82000"/>
@@ -1525,9 +3175,9 @@
                 </a:solidFill>
               </a:defRPr>
             </a:lvl3pPr>
-            <a:lvl4pPr marL="1371600" indent="0">
+            <a:lvl4pPr marL="1255014" indent="0">
               <a:buNone/>
-              <a:defRPr sz="1600">
+              <a:defRPr sz="1464">
                 <a:solidFill>
                   <a:schemeClr val="tx1">
                     <a:tint val="82000"/>
@@ -1535,9 +3185,9 @@
                 </a:solidFill>
               </a:defRPr>
             </a:lvl4pPr>
-            <a:lvl5pPr marL="1828800" indent="0">
+            <a:lvl5pPr marL="1673352" indent="0">
               <a:buNone/>
-              <a:defRPr sz="1600">
+              <a:defRPr sz="1464">
                 <a:solidFill>
                   <a:schemeClr val="tx1">
                     <a:tint val="82000"/>
@@ -1545,9 +3195,9 @@
                 </a:solidFill>
               </a:defRPr>
             </a:lvl5pPr>
-            <a:lvl6pPr marL="2286000" indent="0">
+            <a:lvl6pPr marL="2091690" indent="0">
               <a:buNone/>
-              <a:defRPr sz="1600">
+              <a:defRPr sz="1464">
                 <a:solidFill>
                   <a:schemeClr val="tx1">
                     <a:tint val="82000"/>
@@ -1555,9 +3205,9 @@
                 </a:solidFill>
               </a:defRPr>
             </a:lvl6pPr>
-            <a:lvl7pPr marL="2743200" indent="0">
+            <a:lvl7pPr marL="2510028" indent="0">
               <a:buNone/>
-              <a:defRPr sz="1600">
+              <a:defRPr sz="1464">
                 <a:solidFill>
                   <a:schemeClr val="tx1">
                     <a:tint val="82000"/>
@@ -1565,9 +3215,9 @@
                 </a:solidFill>
               </a:defRPr>
             </a:lvl7pPr>
-            <a:lvl8pPr marL="3200400" indent="0">
+            <a:lvl8pPr marL="2928366" indent="0">
               <a:buNone/>
-              <a:defRPr sz="1600">
+              <a:defRPr sz="1464">
                 <a:solidFill>
                   <a:schemeClr val="tx1">
                     <a:tint val="82000"/>
@@ -1575,9 +3225,9 @@
                 </a:solidFill>
               </a:defRPr>
             </a:lvl8pPr>
-            <a:lvl9pPr marL="3657600" indent="0">
+            <a:lvl9pPr marL="3346704" indent="0">
               <a:buNone/>
-              <a:defRPr sz="1600">
+              <a:defRPr sz="1464">
                 <a:solidFill>
                   <a:schemeClr val="tx1">
                     <a:tint val="82000"/>
@@ -1597,13 +3247,7 @@
       </p:sp>
       <p:sp>
         <p:nvSpPr>
-          <p:cNvPr id="4" name="Date Placeholder 3">
-            <a:extLst>
-              <a:ext uri="{FF2B5EF4-FFF2-40B4-BE49-F238E27FC236}">
-                <a16:creationId xmlns:a16="http://schemas.microsoft.com/office/drawing/2014/main" id="{3DB7130A-0106-266D-D59E-CF76BF730606}"/>
-              </a:ext>
-            </a:extLst>
-          </p:cNvPr>
+          <p:cNvPr id="4" name="Date Placeholder 3"/>
           <p:cNvSpPr>
             <a:spLocks noGrp="1"/>
           </p:cNvSpPr>
@@ -1618,7 +3262,7 @@
           <a:p>
             <a:fld id="{69B944B8-7A9A-4030-BC91-8FDE173981C2}" type="datetimeFigureOut">
               <a:rPr lang="en-US" smtClean="0"/>
-              <a:t>6/5/2026</a:t>
+              <a:t>7/8/2026</a:t>
             </a:fld>
             <a:endParaRPr lang="en-US"/>
           </a:p>
@@ -1626,13 +3270,7 @@
       </p:sp>
       <p:sp>
         <p:nvSpPr>
-          <p:cNvPr id="5" name="Footer Placeholder 4">
-            <a:extLst>
-              <a:ext uri="{FF2B5EF4-FFF2-40B4-BE49-F238E27FC236}">
-                <a16:creationId xmlns:a16="http://schemas.microsoft.com/office/drawing/2014/main" id="{1659F7F3-C99F-7A8A-FB05-48927CD348FB}"/>
-              </a:ext>
-            </a:extLst>
-          </p:cNvPr>
+          <p:cNvPr id="5" name="Footer Placeholder 4"/>
           <p:cNvSpPr>
             <a:spLocks noGrp="1"/>
           </p:cNvSpPr>
@@ -1651,13 +3289,7 @@
       </p:sp>
       <p:sp>
         <p:nvSpPr>
-          <p:cNvPr id="6" name="Slide Number Placeholder 5">
-            <a:extLst>
-              <a:ext uri="{FF2B5EF4-FFF2-40B4-BE49-F238E27FC236}">
-                <a16:creationId xmlns:a16="http://schemas.microsoft.com/office/drawing/2014/main" id="{E4A83546-5693-1C66-F349-229B61979D46}"/>
-              </a:ext>
-            </a:extLst>
-          </p:cNvPr>
+          <p:cNvPr id="6" name="Slide Number Placeholder 5"/>
           <p:cNvSpPr>
             <a:spLocks noGrp="1"/>
           </p:cNvSpPr>
@@ -1681,7 +3313,7 @@
     </p:spTree>
     <p:extLst>
       <p:ext uri="{BB962C8B-B14F-4D97-AF65-F5344CB8AC3E}">
-        <p14:creationId xmlns:p14="http://schemas.microsoft.com/office/powerpoint/2010/main" val="4180776640"/>
+        <p14:creationId xmlns:p14="http://schemas.microsoft.com/office/powerpoint/2010/main" val="3019593152"/>
       </p:ext>
     </p:extLst>
   </p:cSld>
@@ -1710,13 +3342,7 @@
       </p:grpSpPr>
       <p:sp>
         <p:nvSpPr>
-          <p:cNvPr id="2" name="Title 1">
-            <a:extLst>
-              <a:ext uri="{FF2B5EF4-FFF2-40B4-BE49-F238E27FC236}">
-                <a16:creationId xmlns:a16="http://schemas.microsoft.com/office/drawing/2014/main" id="{70C0BB15-BB56-AC97-8C0D-697B07A1CB8B}"/>
-              </a:ext>
-            </a:extLst>
-          </p:cNvPr>
+          <p:cNvPr id="2" name="Title 1"/>
           <p:cNvSpPr>
             <a:spLocks noGrp="1"/>
           </p:cNvSpPr>
@@ -1733,18 +3359,13 @@
               <a:rPr lang="en-US"/>
               <a:t>Click to edit Master title style</a:t>
             </a:r>
+            <a:endParaRPr lang="en-US" dirty="0"/>
           </a:p>
         </p:txBody>
       </p:sp>
       <p:sp>
         <p:nvSpPr>
-          <p:cNvPr id="3" name="Content Placeholder 2">
-            <a:extLst>
-              <a:ext uri="{FF2B5EF4-FFF2-40B4-BE49-F238E27FC236}">
-                <a16:creationId xmlns:a16="http://schemas.microsoft.com/office/drawing/2014/main" id="{20EDA6FE-1E0A-38DC-4EAD-96A264AF28BD}"/>
-              </a:ext>
-            </a:extLst>
-          </p:cNvPr>
+          <p:cNvPr id="3" name="Content Placeholder 2"/>
           <p:cNvSpPr>
             <a:spLocks noGrp="1"/>
           </p:cNvSpPr>
@@ -1754,8 +3375,8 @@
         </p:nvSpPr>
         <p:spPr>
           <a:xfrm>
-            <a:off x="838200" y="1825625"/>
-            <a:ext cx="5181600" cy="4351338"/>
+            <a:off x="766931" y="1777026"/>
+            <a:ext cx="4741029" cy="4235504"/>
           </a:xfrm>
         </p:spPr>
         <p:txBody>
@@ -1795,18 +3416,13 @@
               <a:rPr lang="en-US"/>
               <a:t>Fifth level</a:t>
             </a:r>
+            <a:endParaRPr lang="en-US" dirty="0"/>
           </a:p>
         </p:txBody>
       </p:sp>
       <p:sp>
         <p:nvSpPr>
-          <p:cNvPr id="4" name="Content Placeholder 3">
-            <a:extLst>
-              <a:ext uri="{FF2B5EF4-FFF2-40B4-BE49-F238E27FC236}">
-                <a16:creationId xmlns:a16="http://schemas.microsoft.com/office/drawing/2014/main" id="{01A19CAE-0FE8-6F29-7DE5-26D3CDE7689B}"/>
-              </a:ext>
-            </a:extLst>
-          </p:cNvPr>
+          <p:cNvPr id="4" name="Content Placeholder 3"/>
           <p:cNvSpPr>
             <a:spLocks noGrp="1"/>
           </p:cNvSpPr>
@@ -1816,8 +3432,8 @@
         </p:nvSpPr>
         <p:spPr>
           <a:xfrm>
-            <a:off x="6172200" y="1825625"/>
-            <a:ext cx="5181600" cy="4351338"/>
+            <a:off x="5647403" y="1777026"/>
+            <a:ext cx="4741029" cy="4235504"/>
           </a:xfrm>
         </p:spPr>
         <p:txBody>
@@ -1857,18 +3473,13 @@
               <a:rPr lang="en-US"/>
               <a:t>Fifth level</a:t>
             </a:r>
+            <a:endParaRPr lang="en-US" dirty="0"/>
           </a:p>
         </p:txBody>
       </p:sp>
       <p:sp>
         <p:nvSpPr>
-          <p:cNvPr id="5" name="Date Placeholder 4">
-            <a:extLst>
-              <a:ext uri="{FF2B5EF4-FFF2-40B4-BE49-F238E27FC236}">
-                <a16:creationId xmlns:a16="http://schemas.microsoft.com/office/drawing/2014/main" id="{C164816A-6687-FF7F-0BF2-53DB6CD49F51}"/>
-              </a:ext>
-            </a:extLst>
-          </p:cNvPr>
+          <p:cNvPr id="5" name="Date Placeholder 4"/>
           <p:cNvSpPr>
             <a:spLocks noGrp="1"/>
           </p:cNvSpPr>
@@ -1883,7 +3494,7 @@
           <a:p>
             <a:fld id="{69B944B8-7A9A-4030-BC91-8FDE173981C2}" type="datetimeFigureOut">
               <a:rPr lang="en-US" smtClean="0"/>
-              <a:t>6/5/2026</a:t>
+              <a:t>7/8/2026</a:t>
             </a:fld>
             <a:endParaRPr lang="en-US"/>
           </a:p>
@@ -1891,13 +3502,7 @@
       </p:sp>
       <p:sp>
         <p:nvSpPr>
-          <p:cNvPr id="6" name="Footer Placeholder 5">
-            <a:extLst>
-              <a:ext uri="{FF2B5EF4-FFF2-40B4-BE49-F238E27FC236}">
-                <a16:creationId xmlns:a16="http://schemas.microsoft.com/office/drawing/2014/main" id="{C6B2FE9B-263D-04FD-6247-24A032BBF3DA}"/>
-              </a:ext>
-            </a:extLst>
-          </p:cNvPr>
+          <p:cNvPr id="6" name="Footer Placeholder 5"/>
           <p:cNvSpPr>
             <a:spLocks noGrp="1"/>
           </p:cNvSpPr>
@@ -1916,13 +3521,7 @@
       </p:sp>
       <p:sp>
         <p:nvSpPr>
-          <p:cNvPr id="7" name="Slide Number Placeholder 6">
-            <a:extLst>
-              <a:ext uri="{FF2B5EF4-FFF2-40B4-BE49-F238E27FC236}">
-                <a16:creationId xmlns:a16="http://schemas.microsoft.com/office/drawing/2014/main" id="{999B029A-3C4B-4CE8-1222-7BAE915D7549}"/>
-              </a:ext>
-            </a:extLst>
-          </p:cNvPr>
+          <p:cNvPr id="7" name="Slide Number Placeholder 6"/>
           <p:cNvSpPr>
             <a:spLocks noGrp="1"/>
           </p:cNvSpPr>
@@ -1946,7 +3545,7 @@
     </p:spTree>
     <p:extLst>
       <p:ext uri="{BB962C8B-B14F-4D97-AF65-F5344CB8AC3E}">
-        <p14:creationId xmlns:p14="http://schemas.microsoft.com/office/powerpoint/2010/main" val="1670312656"/>
+        <p14:creationId xmlns:p14="http://schemas.microsoft.com/office/powerpoint/2010/main" val="2563133257"/>
       </p:ext>
     </p:extLst>
   </p:cSld>
@@ -1975,13 +3574,7 @@
       </p:grpSpPr>
       <p:sp>
         <p:nvSpPr>
-          <p:cNvPr id="2" name="Title 1">
-            <a:extLst>
-              <a:ext uri="{FF2B5EF4-FFF2-40B4-BE49-F238E27FC236}">
-                <a16:creationId xmlns:a16="http://schemas.microsoft.com/office/drawing/2014/main" id="{63AB965B-663F-E2DC-C7C4-9DA2B81B53EB}"/>
-              </a:ext>
-            </a:extLst>
-          </p:cNvPr>
+          <p:cNvPr id="2" name="Title 1"/>
           <p:cNvSpPr>
             <a:spLocks noGrp="1"/>
           </p:cNvSpPr>
@@ -1991,8 +3584,8 @@
         </p:nvSpPr>
         <p:spPr>
           <a:xfrm>
-            <a:off x="839788" y="365125"/>
-            <a:ext cx="10515600" cy="1325563"/>
+            <a:off x="768384" y="355406"/>
+            <a:ext cx="9621501" cy="1290276"/>
           </a:xfrm>
         </p:spPr>
         <p:txBody>
@@ -2003,18 +3596,13 @@
               <a:rPr lang="en-US"/>
               <a:t>Click to edit Master title style</a:t>
             </a:r>
+            <a:endParaRPr lang="en-US" dirty="0"/>
           </a:p>
         </p:txBody>
       </p:sp>
       <p:sp>
         <p:nvSpPr>
-          <p:cNvPr id="3" name="Text Placeholder 2">
-            <a:extLst>
-              <a:ext uri="{FF2B5EF4-FFF2-40B4-BE49-F238E27FC236}">
-                <a16:creationId xmlns:a16="http://schemas.microsoft.com/office/drawing/2014/main" id="{A7662A1E-ADEC-09BC-B2A2-FB48CF64E902}"/>
-              </a:ext>
-            </a:extLst>
-          </p:cNvPr>
+          <p:cNvPr id="3" name="Text Placeholder 2"/>
           <p:cNvSpPr>
             <a:spLocks noGrp="1"/>
           </p:cNvSpPr>
@@ -2024,8 +3612,8 @@
         </p:nvSpPr>
         <p:spPr>
           <a:xfrm>
-            <a:off x="839788" y="1681163"/>
-            <a:ext cx="5157787" cy="823912"/>
+            <a:off x="768385" y="1636410"/>
+            <a:ext cx="4719241" cy="801979"/>
           </a:xfrm>
         </p:spPr>
         <p:txBody>
@@ -2033,39 +3621,39 @@
           <a:lstStyle>
             <a:lvl1pPr marL="0" indent="0">
               <a:buNone/>
-              <a:defRPr sz="2400" b="1"/>
+              <a:defRPr sz="2196" b="1"/>
             </a:lvl1pPr>
-            <a:lvl2pPr marL="457200" indent="0">
+            <a:lvl2pPr marL="418338" indent="0">
               <a:buNone/>
-              <a:defRPr sz="2000" b="1"/>
+              <a:defRPr sz="1830" b="1"/>
             </a:lvl2pPr>
-            <a:lvl3pPr marL="914400" indent="0">
+            <a:lvl3pPr marL="836676" indent="0">
               <a:buNone/>
-              <a:defRPr sz="1800" b="1"/>
+              <a:defRPr sz="1647" b="1"/>
             </a:lvl3pPr>
-            <a:lvl4pPr marL="1371600" indent="0">
+            <a:lvl4pPr marL="1255014" indent="0">
               <a:buNone/>
-              <a:defRPr sz="1600" b="1"/>
+              <a:defRPr sz="1464" b="1"/>
             </a:lvl4pPr>
-            <a:lvl5pPr marL="1828800" indent="0">
+            <a:lvl5pPr marL="1673352" indent="0">
               <a:buNone/>
-              <a:defRPr sz="1600" b="1"/>
+              <a:defRPr sz="1464" b="1"/>
             </a:lvl5pPr>
-            <a:lvl6pPr marL="2286000" indent="0">
+            <a:lvl6pPr marL="2091690" indent="0">
               <a:buNone/>
-              <a:defRPr sz="1600" b="1"/>
+              <a:defRPr sz="1464" b="1"/>
             </a:lvl6pPr>
-            <a:lvl7pPr marL="2743200" indent="0">
+            <a:lvl7pPr marL="2510028" indent="0">
               <a:buNone/>
-              <a:defRPr sz="1600" b="1"/>
+              <a:defRPr sz="1464" b="1"/>
             </a:lvl7pPr>
-            <a:lvl8pPr marL="3200400" indent="0">
+            <a:lvl8pPr marL="2928366" indent="0">
               <a:buNone/>
-              <a:defRPr sz="1600" b="1"/>
+              <a:defRPr sz="1464" b="1"/>
             </a:lvl8pPr>
-            <a:lvl9pPr marL="3657600" indent="0">
+            <a:lvl9pPr marL="3346704" indent="0">
               <a:buNone/>
-              <a:defRPr sz="1600" b="1"/>
+              <a:defRPr sz="1464" b="1"/>
             </a:lvl9pPr>
           </a:lstStyle>
           <a:p>
@@ -2079,13 +3667,7 @@
       </p:sp>
       <p:sp>
         <p:nvSpPr>
-          <p:cNvPr id="4" name="Content Placeholder 3">
-            <a:extLst>
-              <a:ext uri="{FF2B5EF4-FFF2-40B4-BE49-F238E27FC236}">
-                <a16:creationId xmlns:a16="http://schemas.microsoft.com/office/drawing/2014/main" id="{491C07BB-0C61-6A52-EFCE-C45301D3EC95}"/>
-              </a:ext>
-            </a:extLst>
-          </p:cNvPr>
+          <p:cNvPr id="4" name="Content Placeholder 3"/>
           <p:cNvSpPr>
             <a:spLocks noGrp="1"/>
           </p:cNvSpPr>
@@ -2095,8 +3677,8 @@
         </p:nvSpPr>
         <p:spPr>
           <a:xfrm>
-            <a:off x="839788" y="2505075"/>
-            <a:ext cx="5157787" cy="3684588"/>
+            <a:off x="768385" y="2438389"/>
+            <a:ext cx="4719241" cy="3586503"/>
           </a:xfrm>
         </p:spPr>
         <p:txBody>
@@ -2136,18 +3718,13 @@
               <a:rPr lang="en-US"/>
               <a:t>Fifth level</a:t>
             </a:r>
+            <a:endParaRPr lang="en-US" dirty="0"/>
           </a:p>
         </p:txBody>
       </p:sp>
       <p:sp>
         <p:nvSpPr>
-          <p:cNvPr id="5" name="Text Placeholder 4">
-            <a:extLst>
-              <a:ext uri="{FF2B5EF4-FFF2-40B4-BE49-F238E27FC236}">
-                <a16:creationId xmlns:a16="http://schemas.microsoft.com/office/drawing/2014/main" id="{C6416D0D-C6D5-A2F4-5A37-9EFA2DA1DEDC}"/>
-              </a:ext>
-            </a:extLst>
-          </p:cNvPr>
+          <p:cNvPr id="5" name="Text Placeholder 4"/>
           <p:cNvSpPr>
             <a:spLocks noGrp="1"/>
           </p:cNvSpPr>
@@ -2157,8 +3734,8 @@
         </p:nvSpPr>
         <p:spPr>
           <a:xfrm>
-            <a:off x="6172200" y="1681163"/>
-            <a:ext cx="5183188" cy="823912"/>
+            <a:off x="5647403" y="1636410"/>
+            <a:ext cx="4742482" cy="801979"/>
           </a:xfrm>
         </p:spPr>
         <p:txBody>
@@ -2166,39 +3743,39 @@
           <a:lstStyle>
             <a:lvl1pPr marL="0" indent="0">
               <a:buNone/>
-              <a:defRPr sz="2400" b="1"/>
+              <a:defRPr sz="2196" b="1"/>
             </a:lvl1pPr>
-            <a:lvl2pPr marL="457200" indent="0">
+            <a:lvl2pPr marL="418338" indent="0">
               <a:buNone/>
-              <a:defRPr sz="2000" b="1"/>
+              <a:defRPr sz="1830" b="1"/>
             </a:lvl2pPr>
-            <a:lvl3pPr marL="914400" indent="0">
+            <a:lvl3pPr marL="836676" indent="0">
               <a:buNone/>
-              <a:defRPr sz="1800" b="1"/>
+              <a:defRPr sz="1647" b="1"/>
             </a:lvl3pPr>
-            <a:lvl4pPr marL="1371600" indent="0">
+            <a:lvl4pPr marL="1255014" indent="0">
               <a:buNone/>
-              <a:defRPr sz="1600" b="1"/>
+              <a:defRPr sz="1464" b="1"/>
             </a:lvl4pPr>
-            <a:lvl5pPr marL="1828800" indent="0">
+            <a:lvl5pPr marL="1673352" indent="0">
               <a:buNone/>
-              <a:defRPr sz="1600" b="1"/>
+              <a:defRPr sz="1464" b="1"/>
             </a:lvl5pPr>
-            <a:lvl6pPr marL="2286000" indent="0">
+            <a:lvl6pPr marL="2091690" indent="0">
               <a:buNone/>
-              <a:defRPr sz="1600" b="1"/>
+              <a:defRPr sz="1464" b="1"/>
             </a:lvl6pPr>
-            <a:lvl7pPr marL="2743200" indent="0">
+            <a:lvl7pPr marL="2510028" indent="0">
               <a:buNone/>
-              <a:defRPr sz="1600" b="1"/>
+              <a:defRPr sz="1464" b="1"/>
             </a:lvl7pPr>
-            <a:lvl8pPr marL="3200400" indent="0">
+            <a:lvl8pPr marL="2928366" indent="0">
               <a:buNone/>
-              <a:defRPr sz="1600" b="1"/>
+              <a:defRPr sz="1464" b="1"/>
             </a:lvl8pPr>
-            <a:lvl9pPr marL="3657600" indent="0">
+            <a:lvl9pPr marL="3346704" indent="0">
               <a:buNone/>
-              <a:defRPr sz="1600" b="1"/>
+              <a:defRPr sz="1464" b="1"/>
             </a:lvl9pPr>
           </a:lstStyle>
           <a:p>
@@ -2212,13 +3789,7 @@
       </p:sp>
       <p:sp>
         <p:nvSpPr>
-          <p:cNvPr id="6" name="Content Placeholder 5">
-            <a:extLst>
-              <a:ext uri="{FF2B5EF4-FFF2-40B4-BE49-F238E27FC236}">
-                <a16:creationId xmlns:a16="http://schemas.microsoft.com/office/drawing/2014/main" id="{360D8408-F737-CBD7-1FB3-6FF452DE74F9}"/>
-              </a:ext>
-            </a:extLst>
-          </p:cNvPr>
+          <p:cNvPr id="6" name="Content Placeholder 5"/>
           <p:cNvSpPr>
             <a:spLocks noGrp="1"/>
           </p:cNvSpPr>
@@ -2228,8 +3799,8 @@
         </p:nvSpPr>
         <p:spPr>
           <a:xfrm>
-            <a:off x="6172200" y="2505075"/>
-            <a:ext cx="5183188" cy="3684588"/>
+            <a:off x="5647403" y="2438389"/>
+            <a:ext cx="4742482" cy="3586503"/>
           </a:xfrm>
         </p:spPr>
         <p:txBody>
@@ -2269,18 +3840,13 @@
               <a:rPr lang="en-US"/>
               <a:t>Fifth level</a:t>
             </a:r>
+            <a:endParaRPr lang="en-US" dirty="0"/>
           </a:p>
         </p:txBody>
       </p:sp>
       <p:sp>
         <p:nvSpPr>
-          <p:cNvPr id="7" name="Date Placeholder 6">
-            <a:extLst>
-              <a:ext uri="{FF2B5EF4-FFF2-40B4-BE49-F238E27FC236}">
-                <a16:creationId xmlns:a16="http://schemas.microsoft.com/office/drawing/2014/main" id="{738696C5-2F89-69F2-91A5-8DB1FF69033D}"/>
-              </a:ext>
-            </a:extLst>
-          </p:cNvPr>
+          <p:cNvPr id="7" name="Date Placeholder 6"/>
           <p:cNvSpPr>
             <a:spLocks noGrp="1"/>
           </p:cNvSpPr>
@@ -2295,7 +3861,7 @@
           <a:p>
             <a:fld id="{69B944B8-7A9A-4030-BC91-8FDE173981C2}" type="datetimeFigureOut">
               <a:rPr lang="en-US" smtClean="0"/>
-              <a:t>6/5/2026</a:t>
+              <a:t>7/8/2026</a:t>
             </a:fld>
             <a:endParaRPr lang="en-US"/>
           </a:p>
@@ -2303,13 +3869,7 @@
       </p:sp>
       <p:sp>
         <p:nvSpPr>
-          <p:cNvPr id="8" name="Footer Placeholder 7">
-            <a:extLst>
-              <a:ext uri="{FF2B5EF4-FFF2-40B4-BE49-F238E27FC236}">
-                <a16:creationId xmlns:a16="http://schemas.microsoft.com/office/drawing/2014/main" id="{1F8D586D-42A2-3433-76D3-23FCA2DF7E5F}"/>
-              </a:ext>
-            </a:extLst>
-          </p:cNvPr>
+          <p:cNvPr id="8" name="Footer Placeholder 7"/>
           <p:cNvSpPr>
             <a:spLocks noGrp="1"/>
           </p:cNvSpPr>
@@ -2328,13 +3888,7 @@
       </p:sp>
       <p:sp>
         <p:nvSpPr>
-          <p:cNvPr id="9" name="Slide Number Placeholder 8">
-            <a:extLst>
-              <a:ext uri="{FF2B5EF4-FFF2-40B4-BE49-F238E27FC236}">
-                <a16:creationId xmlns:a16="http://schemas.microsoft.com/office/drawing/2014/main" id="{4C9C1011-920B-8C71-7444-071D0B933A8B}"/>
-              </a:ext>
-            </a:extLst>
-          </p:cNvPr>
+          <p:cNvPr id="9" name="Slide Number Placeholder 8"/>
           <p:cNvSpPr>
             <a:spLocks noGrp="1"/>
           </p:cNvSpPr>
@@ -2358,7 +3912,7 @@
     </p:spTree>
     <p:extLst>
       <p:ext uri="{BB962C8B-B14F-4D97-AF65-F5344CB8AC3E}">
-        <p14:creationId xmlns:p14="http://schemas.microsoft.com/office/powerpoint/2010/main" val="2491723160"/>
+        <p14:creationId xmlns:p14="http://schemas.microsoft.com/office/powerpoint/2010/main" val="1687517441"/>
       </p:ext>
     </p:extLst>
   </p:cSld>
@@ -2387,13 +3941,7 @@
       </p:grpSpPr>
       <p:sp>
         <p:nvSpPr>
-          <p:cNvPr id="2" name="Title 1">
-            <a:extLst>
-              <a:ext uri="{FF2B5EF4-FFF2-40B4-BE49-F238E27FC236}">
-                <a16:creationId xmlns:a16="http://schemas.microsoft.com/office/drawing/2014/main" id="{5F1F2139-7806-7700-1375-9229A35407D9}"/>
-              </a:ext>
-            </a:extLst>
-          </p:cNvPr>
+          <p:cNvPr id="2" name="Title 1"/>
           <p:cNvSpPr>
             <a:spLocks noGrp="1"/>
           </p:cNvSpPr>
@@ -2410,18 +3958,13 @@
               <a:rPr lang="en-US"/>
               <a:t>Click to edit Master title style</a:t>
             </a:r>
+            <a:endParaRPr lang="en-US" dirty="0"/>
           </a:p>
         </p:txBody>
       </p:sp>
       <p:sp>
         <p:nvSpPr>
-          <p:cNvPr id="3" name="Date Placeholder 2">
-            <a:extLst>
-              <a:ext uri="{FF2B5EF4-FFF2-40B4-BE49-F238E27FC236}">
-                <a16:creationId xmlns:a16="http://schemas.microsoft.com/office/drawing/2014/main" id="{04AAC294-3430-80EE-E2D8-AA793C68AC09}"/>
-              </a:ext>
-            </a:extLst>
-          </p:cNvPr>
+          <p:cNvPr id="3" name="Date Placeholder 2"/>
           <p:cNvSpPr>
             <a:spLocks noGrp="1"/>
           </p:cNvSpPr>
@@ -2436,7 +3979,7 @@
           <a:p>
             <a:fld id="{69B944B8-7A9A-4030-BC91-8FDE173981C2}" type="datetimeFigureOut">
               <a:rPr lang="en-US" smtClean="0"/>
-              <a:t>6/5/2026</a:t>
+              <a:t>7/8/2026</a:t>
             </a:fld>
             <a:endParaRPr lang="en-US"/>
           </a:p>
@@ -2444,13 +3987,7 @@
       </p:sp>
       <p:sp>
         <p:nvSpPr>
-          <p:cNvPr id="4" name="Footer Placeholder 3">
-            <a:extLst>
-              <a:ext uri="{FF2B5EF4-FFF2-40B4-BE49-F238E27FC236}">
-                <a16:creationId xmlns:a16="http://schemas.microsoft.com/office/drawing/2014/main" id="{16EC1F83-0F6D-BEAA-6D9F-837E14F4CFB3}"/>
-              </a:ext>
-            </a:extLst>
-          </p:cNvPr>
+          <p:cNvPr id="4" name="Footer Placeholder 3"/>
           <p:cNvSpPr>
             <a:spLocks noGrp="1"/>
           </p:cNvSpPr>
@@ -2469,13 +4006,7 @@
       </p:sp>
       <p:sp>
         <p:nvSpPr>
-          <p:cNvPr id="5" name="Slide Number Placeholder 4">
-            <a:extLst>
-              <a:ext uri="{FF2B5EF4-FFF2-40B4-BE49-F238E27FC236}">
-                <a16:creationId xmlns:a16="http://schemas.microsoft.com/office/drawing/2014/main" id="{BF09809A-48FA-1A70-84BD-5791130469D9}"/>
-              </a:ext>
-            </a:extLst>
-          </p:cNvPr>
+          <p:cNvPr id="5" name="Slide Number Placeholder 4"/>
           <p:cNvSpPr>
             <a:spLocks noGrp="1"/>
           </p:cNvSpPr>
@@ -2499,7 +4030,7 @@
     </p:spTree>
     <p:extLst>
       <p:ext uri="{BB962C8B-B14F-4D97-AF65-F5344CB8AC3E}">
-        <p14:creationId xmlns:p14="http://schemas.microsoft.com/office/powerpoint/2010/main" val="1754611048"/>
+        <p14:creationId xmlns:p14="http://schemas.microsoft.com/office/powerpoint/2010/main" val="2834951111"/>
       </p:ext>
     </p:extLst>
   </p:cSld>
@@ -2528,13 +4059,7 @@
       </p:grpSpPr>
       <p:sp>
         <p:nvSpPr>
-          <p:cNvPr id="2" name="Date Placeholder 1">
-            <a:extLst>
-              <a:ext uri="{FF2B5EF4-FFF2-40B4-BE49-F238E27FC236}">
-                <a16:creationId xmlns:a16="http://schemas.microsoft.com/office/drawing/2014/main" id="{DC2C398B-7C09-12C7-6B1F-AA6FA0316FED}"/>
-              </a:ext>
-            </a:extLst>
-          </p:cNvPr>
+          <p:cNvPr id="2" name="Date Placeholder 1"/>
           <p:cNvSpPr>
             <a:spLocks noGrp="1"/>
           </p:cNvSpPr>
@@ -2549,7 +4074,7 @@
           <a:p>
             <a:fld id="{69B944B8-7A9A-4030-BC91-8FDE173981C2}" type="datetimeFigureOut">
               <a:rPr lang="en-US" smtClean="0"/>
-              <a:t>6/5/2026</a:t>
+              <a:t>7/8/2026</a:t>
             </a:fld>
             <a:endParaRPr lang="en-US"/>
           </a:p>
@@ -2557,13 +4082,7 @@
       </p:sp>
       <p:sp>
         <p:nvSpPr>
-          <p:cNvPr id="3" name="Footer Placeholder 2">
-            <a:extLst>
-              <a:ext uri="{FF2B5EF4-FFF2-40B4-BE49-F238E27FC236}">
-                <a16:creationId xmlns:a16="http://schemas.microsoft.com/office/drawing/2014/main" id="{572EAAAF-8340-2ABB-F953-68AB662D7FDE}"/>
-              </a:ext>
-            </a:extLst>
-          </p:cNvPr>
+          <p:cNvPr id="3" name="Footer Placeholder 2"/>
           <p:cNvSpPr>
             <a:spLocks noGrp="1"/>
           </p:cNvSpPr>
@@ -2582,13 +4101,7 @@
       </p:sp>
       <p:sp>
         <p:nvSpPr>
-          <p:cNvPr id="4" name="Slide Number Placeholder 3">
-            <a:extLst>
-              <a:ext uri="{FF2B5EF4-FFF2-40B4-BE49-F238E27FC236}">
-                <a16:creationId xmlns:a16="http://schemas.microsoft.com/office/drawing/2014/main" id="{0BCF75EC-3AD7-5EB0-9CD3-382A4998B5C1}"/>
-              </a:ext>
-            </a:extLst>
-          </p:cNvPr>
+          <p:cNvPr id="4" name="Slide Number Placeholder 3"/>
           <p:cNvSpPr>
             <a:spLocks noGrp="1"/>
           </p:cNvSpPr>
@@ -2612,7 +4125,7 @@
     </p:spTree>
     <p:extLst>
       <p:ext uri="{BB962C8B-B14F-4D97-AF65-F5344CB8AC3E}">
-        <p14:creationId xmlns:p14="http://schemas.microsoft.com/office/powerpoint/2010/main" val="551888231"/>
+        <p14:creationId xmlns:p14="http://schemas.microsoft.com/office/powerpoint/2010/main" val="1228984771"/>
       </p:ext>
     </p:extLst>
   </p:cSld>
@@ -2641,13 +4154,7 @@
       </p:grpSpPr>
       <p:sp>
         <p:nvSpPr>
-          <p:cNvPr id="2" name="Title 1">
-            <a:extLst>
-              <a:ext uri="{FF2B5EF4-FFF2-40B4-BE49-F238E27FC236}">
-                <a16:creationId xmlns:a16="http://schemas.microsoft.com/office/drawing/2014/main" id="{86BF5BF1-7636-9724-F699-A23E1CE4406A}"/>
-              </a:ext>
-            </a:extLst>
-          </p:cNvPr>
+          <p:cNvPr id="2" name="Title 1"/>
           <p:cNvSpPr>
             <a:spLocks noGrp="1"/>
           </p:cNvSpPr>
@@ -2657,15 +4164,15 @@
         </p:nvSpPr>
         <p:spPr>
           <a:xfrm>
-            <a:off x="839788" y="457200"/>
-            <a:ext cx="3932237" cy="1600200"/>
+            <a:off x="768384" y="445029"/>
+            <a:ext cx="3597895" cy="1557602"/>
           </a:xfrm>
         </p:spPr>
         <p:txBody>
           <a:bodyPr anchor="b"/>
           <a:lstStyle>
             <a:lvl1pPr>
-              <a:defRPr sz="3200"/>
+              <a:defRPr sz="2928"/>
             </a:lvl1pPr>
           </a:lstStyle>
           <a:p>
@@ -2673,18 +4180,13 @@
               <a:rPr lang="en-US"/>
               <a:t>Click to edit Master title style</a:t>
             </a:r>
+            <a:endParaRPr lang="en-US" dirty="0"/>
           </a:p>
         </p:txBody>
       </p:sp>
       <p:sp>
         <p:nvSpPr>
-          <p:cNvPr id="3" name="Content Placeholder 2">
-            <a:extLst>
-              <a:ext uri="{FF2B5EF4-FFF2-40B4-BE49-F238E27FC236}">
-                <a16:creationId xmlns:a16="http://schemas.microsoft.com/office/drawing/2014/main" id="{A17D4C17-B416-055E-3618-436A8E1A1BB3}"/>
-              </a:ext>
-            </a:extLst>
-          </p:cNvPr>
+          <p:cNvPr id="3" name="Content Placeholder 2"/>
           <p:cNvSpPr>
             <a:spLocks noGrp="1"/>
           </p:cNvSpPr>
@@ -2694,39 +4196,39 @@
         </p:nvSpPr>
         <p:spPr>
           <a:xfrm>
-            <a:off x="5183188" y="987425"/>
-            <a:ext cx="6172200" cy="4873625"/>
+            <a:off x="4742482" y="961140"/>
+            <a:ext cx="5647403" cy="4743888"/>
           </a:xfrm>
         </p:spPr>
         <p:txBody>
           <a:bodyPr/>
           <a:lstStyle>
             <a:lvl1pPr>
-              <a:defRPr sz="3200"/>
+              <a:defRPr sz="2928"/>
             </a:lvl1pPr>
             <a:lvl2pPr>
-              <a:defRPr sz="2800"/>
+              <a:defRPr sz="2562"/>
             </a:lvl2pPr>
             <a:lvl3pPr>
-              <a:defRPr sz="2400"/>
+              <a:defRPr sz="2196"/>
             </a:lvl3pPr>
             <a:lvl4pPr>
-              <a:defRPr sz="2000"/>
+              <a:defRPr sz="1830"/>
             </a:lvl4pPr>
             <a:lvl5pPr>
-              <a:defRPr sz="2000"/>
+              <a:defRPr sz="1830"/>
             </a:lvl5pPr>
             <a:lvl6pPr>
-              <a:defRPr sz="2000"/>
+              <a:defRPr sz="1830"/>
             </a:lvl6pPr>
             <a:lvl7pPr>
-              <a:defRPr sz="2000"/>
+              <a:defRPr sz="1830"/>
             </a:lvl7pPr>
             <a:lvl8pPr>
-              <a:defRPr sz="2000"/>
+              <a:defRPr sz="1830"/>
             </a:lvl8pPr>
             <a:lvl9pPr>
-              <a:defRPr sz="2000"/>
+              <a:defRPr sz="1830"/>
             </a:lvl9pPr>
           </a:lstStyle>
           <a:p>
@@ -2763,18 +4265,13 @@
               <a:rPr lang="en-US"/>
               <a:t>Fifth level</a:t>
             </a:r>
+            <a:endParaRPr lang="en-US" dirty="0"/>
           </a:p>
         </p:txBody>
       </p:sp>
       <p:sp>
         <p:nvSpPr>
-          <p:cNvPr id="4" name="Text Placeholder 3">
-            <a:extLst>
-              <a:ext uri="{FF2B5EF4-FFF2-40B4-BE49-F238E27FC236}">
-                <a16:creationId xmlns:a16="http://schemas.microsoft.com/office/drawing/2014/main" id="{6C22AD26-6138-F98C-781C-5D51BFD6D29E}"/>
-              </a:ext>
-            </a:extLst>
-          </p:cNvPr>
+          <p:cNvPr id="4" name="Text Placeholder 3"/>
           <p:cNvSpPr>
             <a:spLocks noGrp="1"/>
           </p:cNvSpPr>
@@ -2784,8 +4281,8 @@
         </p:nvSpPr>
         <p:spPr>
           <a:xfrm>
-            <a:off x="839788" y="2057400"/>
-            <a:ext cx="3932237" cy="3811588"/>
+            <a:off x="768384" y="2002632"/>
+            <a:ext cx="3597895" cy="3710122"/>
           </a:xfrm>
         </p:spPr>
         <p:txBody>
@@ -2793,39 +4290,39 @@
           <a:lstStyle>
             <a:lvl1pPr marL="0" indent="0">
               <a:buNone/>
-              <a:defRPr sz="1600"/>
+              <a:defRPr sz="1464"/>
             </a:lvl1pPr>
-            <a:lvl2pPr marL="457200" indent="0">
+            <a:lvl2pPr marL="418338" indent="0">
               <a:buNone/>
-              <a:defRPr sz="1400"/>
+              <a:defRPr sz="1281"/>
             </a:lvl2pPr>
-            <a:lvl3pPr marL="914400" indent="0">
+            <a:lvl3pPr marL="836676" indent="0">
               <a:buNone/>
-              <a:defRPr sz="1200"/>
+              <a:defRPr sz="1098"/>
             </a:lvl3pPr>
-            <a:lvl4pPr marL="1371600" indent="0">
+            <a:lvl4pPr marL="1255014" indent="0">
               <a:buNone/>
-              <a:defRPr sz="1000"/>
+              <a:defRPr sz="915"/>
             </a:lvl4pPr>
-            <a:lvl5pPr marL="1828800" indent="0">
+            <a:lvl5pPr marL="1673352" indent="0">
               <a:buNone/>
-              <a:defRPr sz="1000"/>
+              <a:defRPr sz="915"/>
             </a:lvl5pPr>
-            <a:lvl6pPr marL="2286000" indent="0">
+            <a:lvl6pPr marL="2091690" indent="0">
               <a:buNone/>
-              <a:defRPr sz="1000"/>
+              <a:defRPr sz="915"/>
             </a:lvl6pPr>
-            <a:lvl7pPr marL="2743200" indent="0">
+            <a:lvl7pPr marL="2510028" indent="0">
               <a:buNone/>
-              <a:defRPr sz="1000"/>
+              <a:defRPr sz="915"/>
             </a:lvl7pPr>
-            <a:lvl8pPr marL="3200400" indent="0">
+            <a:lvl8pPr marL="2928366" indent="0">
               <a:buNone/>
-              <a:defRPr sz="1000"/>
+              <a:defRPr sz="915"/>
             </a:lvl8pPr>
-            <a:lvl9pPr marL="3657600" indent="0">
+            <a:lvl9pPr marL="3346704" indent="0">
               <a:buNone/>
-              <a:defRPr sz="1000"/>
+              <a:defRPr sz="915"/>
             </a:lvl9pPr>
           </a:lstStyle>
           <a:p>
@@ -2839,13 +4336,7 @@
       </p:sp>
       <p:sp>
         <p:nvSpPr>
-          <p:cNvPr id="5" name="Date Placeholder 4">
-            <a:extLst>
-              <a:ext uri="{FF2B5EF4-FFF2-40B4-BE49-F238E27FC236}">
-                <a16:creationId xmlns:a16="http://schemas.microsoft.com/office/drawing/2014/main" id="{58B7B90E-852C-74CE-BE16-46914A38ECA6}"/>
-              </a:ext>
-            </a:extLst>
-          </p:cNvPr>
+          <p:cNvPr id="5" name="Date Placeholder 4"/>
           <p:cNvSpPr>
             <a:spLocks noGrp="1"/>
           </p:cNvSpPr>
@@ -2860,7 +4351,7 @@
           <a:p>
             <a:fld id="{69B944B8-7A9A-4030-BC91-8FDE173981C2}" type="datetimeFigureOut">
               <a:rPr lang="en-US" smtClean="0"/>
-              <a:t>6/5/2026</a:t>
+              <a:t>7/8/2026</a:t>
             </a:fld>
             <a:endParaRPr lang="en-US"/>
           </a:p>
@@ -2868,13 +4359,7 @@
       </p:sp>
       <p:sp>
         <p:nvSpPr>
-          <p:cNvPr id="6" name="Footer Placeholder 5">
-            <a:extLst>
-              <a:ext uri="{FF2B5EF4-FFF2-40B4-BE49-F238E27FC236}">
-                <a16:creationId xmlns:a16="http://schemas.microsoft.com/office/drawing/2014/main" id="{E79E7BDE-C941-0DDE-E25B-B7EFBBCB05EB}"/>
-              </a:ext>
-            </a:extLst>
-          </p:cNvPr>
+          <p:cNvPr id="6" name="Footer Placeholder 5"/>
           <p:cNvSpPr>
             <a:spLocks noGrp="1"/>
           </p:cNvSpPr>
@@ -2893,13 +4378,7 @@
       </p:sp>
       <p:sp>
         <p:nvSpPr>
-          <p:cNvPr id="7" name="Slide Number Placeholder 6">
-            <a:extLst>
-              <a:ext uri="{FF2B5EF4-FFF2-40B4-BE49-F238E27FC236}">
-                <a16:creationId xmlns:a16="http://schemas.microsoft.com/office/drawing/2014/main" id="{B2FB22A6-D237-D3C5-5D45-B488E4A0F44D}"/>
-              </a:ext>
-            </a:extLst>
-          </p:cNvPr>
+          <p:cNvPr id="7" name="Slide Number Placeholder 6"/>
           <p:cNvSpPr>
             <a:spLocks noGrp="1"/>
           </p:cNvSpPr>
@@ -2923,7 +4402,7 @@
     </p:spTree>
     <p:extLst>
       <p:ext uri="{BB962C8B-B14F-4D97-AF65-F5344CB8AC3E}">
-        <p14:creationId xmlns:p14="http://schemas.microsoft.com/office/powerpoint/2010/main" val="3680763432"/>
+        <p14:creationId xmlns:p14="http://schemas.microsoft.com/office/powerpoint/2010/main" val="471803106"/>
       </p:ext>
     </p:extLst>
   </p:cSld>
@@ -2952,13 +4431,7 @@
       </p:grpSpPr>
       <p:sp>
         <p:nvSpPr>
-          <p:cNvPr id="2" name="Title 1">
-            <a:extLst>
-              <a:ext uri="{FF2B5EF4-FFF2-40B4-BE49-F238E27FC236}">
-                <a16:creationId xmlns:a16="http://schemas.microsoft.com/office/drawing/2014/main" id="{46971730-AC49-ED7A-D5C5-FE61C9965616}"/>
-              </a:ext>
-            </a:extLst>
-          </p:cNvPr>
+          <p:cNvPr id="2" name="Title 1"/>
           <p:cNvSpPr>
             <a:spLocks noGrp="1"/>
           </p:cNvSpPr>
@@ -2968,15 +4441,15 @@
         </p:nvSpPr>
         <p:spPr>
           <a:xfrm>
-            <a:off x="839788" y="457200"/>
-            <a:ext cx="3932237" cy="1600200"/>
+            <a:off x="768384" y="445029"/>
+            <a:ext cx="3597895" cy="1557602"/>
           </a:xfrm>
         </p:spPr>
         <p:txBody>
           <a:bodyPr anchor="b"/>
           <a:lstStyle>
             <a:lvl1pPr>
-              <a:defRPr sz="3200"/>
+              <a:defRPr sz="2928"/>
             </a:lvl1pPr>
           </a:lstStyle>
           <a:p>
@@ -2984,20 +4457,15 @@
               <a:rPr lang="en-US"/>
               <a:t>Click to edit Master title style</a:t>
             </a:r>
+            <a:endParaRPr lang="en-US" dirty="0"/>
           </a:p>
         </p:txBody>
       </p:sp>
       <p:sp>
         <p:nvSpPr>
-          <p:cNvPr id="3" name="Picture Placeholder 2">
-            <a:extLst>
-              <a:ext uri="{FF2B5EF4-FFF2-40B4-BE49-F238E27FC236}">
-                <a16:creationId xmlns:a16="http://schemas.microsoft.com/office/drawing/2014/main" id="{F8D57CDA-41F5-B48A-06D1-43B6B47F0B44}"/>
-              </a:ext>
-            </a:extLst>
-          </p:cNvPr>
+          <p:cNvPr id="3" name="Picture Placeholder 2"/>
           <p:cNvSpPr>
-            <a:spLocks noGrp="1"/>
+            <a:spLocks noGrp="1" noChangeAspect="1"/>
           </p:cNvSpPr>
           <p:nvPr>
             <p:ph type="pic" idx="1"/>
@@ -3005,64 +4473,62 @@
         </p:nvSpPr>
         <p:spPr>
           <a:xfrm>
-            <a:off x="5183188" y="987425"/>
-            <a:ext cx="6172200" cy="4873625"/>
+            <a:off x="4742482" y="961140"/>
+            <a:ext cx="5647403" cy="4743888"/>
           </a:xfrm>
         </p:spPr>
         <p:txBody>
-          <a:bodyPr/>
+          <a:bodyPr anchor="t"/>
           <a:lstStyle>
             <a:lvl1pPr marL="0" indent="0">
               <a:buNone/>
-              <a:defRPr sz="3200"/>
+              <a:defRPr sz="2928"/>
             </a:lvl1pPr>
-            <a:lvl2pPr marL="457200" indent="0">
+            <a:lvl2pPr marL="418338" indent="0">
               <a:buNone/>
-              <a:defRPr sz="2800"/>
+              <a:defRPr sz="2562"/>
             </a:lvl2pPr>
-            <a:lvl3pPr marL="914400" indent="0">
+            <a:lvl3pPr marL="836676" indent="0">
               <a:buNone/>
-              <a:defRPr sz="2400"/>
+              <a:defRPr sz="2196"/>
             </a:lvl3pPr>
-            <a:lvl4pPr marL="1371600" indent="0">
+            <a:lvl4pPr marL="1255014" indent="0">
               <a:buNone/>
-              <a:defRPr sz="2000"/>
+              <a:defRPr sz="1830"/>
             </a:lvl4pPr>
-            <a:lvl5pPr marL="1828800" indent="0">
+            <a:lvl5pPr marL="1673352" indent="0">
               <a:buNone/>
-              <a:defRPr sz="2000"/>
+              <a:defRPr sz="1830"/>
             </a:lvl5pPr>
-            <a:lvl6pPr marL="2286000" indent="0">
+            <a:lvl6pPr marL="2091690" indent="0">
               <a:buNone/>
-              <a:defRPr sz="2000"/>
+              <a:defRPr sz="1830"/>
             </a:lvl6pPr>
-            <a:lvl7pPr marL="2743200" indent="0">
+            <a:lvl7pPr marL="2510028" indent="0">
               <a:buNone/>
-              <a:defRPr sz="2000"/>
+              <a:defRPr sz="1830"/>
             </a:lvl7pPr>
-            <a:lvl8pPr marL="3200400" indent="0">
+            <a:lvl8pPr marL="2928366" indent="0">
               <a:buNone/>
-              <a:defRPr sz="2000"/>
+              <a:defRPr sz="1830"/>
             </a:lvl8pPr>
-            <a:lvl9pPr marL="3657600" indent="0">
+            <a:lvl9pPr marL="3346704" indent="0">
               <a:buNone/>
-              <a:defRPr sz="2000"/>
+              <a:defRPr sz="1830"/>
             </a:lvl9pPr>
           </a:lstStyle>
           <a:p>
-            <a:endParaRPr lang="en-US"/>
+            <a:r>
+              <a:rPr lang="en-US"/>
+              <a:t>Click icon to add picture</a:t>
+            </a:r>
+            <a:endParaRPr lang="en-US" dirty="0"/>
           </a:p>
         </p:txBody>
       </p:sp>
       <p:sp>
         <p:nvSpPr>
-          <p:cNvPr id="4" name="Text Placeholder 3">
-            <a:extLst>
-              <a:ext uri="{FF2B5EF4-FFF2-40B4-BE49-F238E27FC236}">
-                <a16:creationId xmlns:a16="http://schemas.microsoft.com/office/drawing/2014/main" id="{9ABD4881-9B79-BE8D-57A8-9011F6D32EE8}"/>
-              </a:ext>
-            </a:extLst>
-          </p:cNvPr>
+          <p:cNvPr id="4" name="Text Placeholder 3"/>
           <p:cNvSpPr>
             <a:spLocks noGrp="1"/>
           </p:cNvSpPr>
@@ -3072,8 +4538,8 @@
         </p:nvSpPr>
         <p:spPr>
           <a:xfrm>
-            <a:off x="839788" y="2057400"/>
-            <a:ext cx="3932237" cy="3811588"/>
+            <a:off x="768384" y="2002632"/>
+            <a:ext cx="3597895" cy="3710122"/>
           </a:xfrm>
         </p:spPr>
         <p:txBody>
@@ -3081,39 +4547,39 @@
           <a:lstStyle>
             <a:lvl1pPr marL="0" indent="0">
               <a:buNone/>
-              <a:defRPr sz="1600"/>
+              <a:defRPr sz="1464"/>
             </a:lvl1pPr>
-            <a:lvl2pPr marL="457200" indent="0">
+            <a:lvl2pPr marL="418338" indent="0">
               <a:buNone/>
-              <a:defRPr sz="1400"/>
+              <a:defRPr sz="1281"/>
             </a:lvl2pPr>
-            <a:lvl3pPr marL="914400" indent="0">
+            <a:lvl3pPr marL="836676" indent="0">
               <a:buNone/>
-              <a:defRPr sz="1200"/>
+              <a:defRPr sz="1098"/>
             </a:lvl3pPr>
-            <a:lvl4pPr marL="1371600" indent="0">
+            <a:lvl4pPr marL="1255014" indent="0">
               <a:buNone/>
-              <a:defRPr sz="1000"/>
+              <a:defRPr sz="915"/>
             </a:lvl4pPr>
-            <a:lvl5pPr marL="1828800" indent="0">
+            <a:lvl5pPr marL="1673352" indent="0">
               <a:buNone/>
-              <a:defRPr sz="1000"/>
+              <a:defRPr sz="915"/>
             </a:lvl5pPr>
-            <a:lvl6pPr marL="2286000" indent="0">
+            <a:lvl6pPr marL="2091690" indent="0">
               <a:buNone/>
-              <a:defRPr sz="1000"/>
+              <a:defRPr sz="915"/>
             </a:lvl6pPr>
-            <a:lvl7pPr marL="2743200" indent="0">
+            <a:lvl7pPr marL="2510028" indent="0">
               <a:buNone/>
-              <a:defRPr sz="1000"/>
+              <a:defRPr sz="915"/>
             </a:lvl7pPr>
-            <a:lvl8pPr marL="3200400" indent="0">
+            <a:lvl8pPr marL="2928366" indent="0">
               <a:buNone/>
-              <a:defRPr sz="1000"/>
+              <a:defRPr sz="915"/>
             </a:lvl8pPr>
-            <a:lvl9pPr marL="3657600" indent="0">
+            <a:lvl9pPr marL="3346704" indent="0">
               <a:buNone/>
-              <a:defRPr sz="1000"/>
+              <a:defRPr sz="915"/>
             </a:lvl9pPr>
           </a:lstStyle>
           <a:p>
@@ -3127,13 +4593,7 @@
       </p:sp>
       <p:sp>
         <p:nvSpPr>
-          <p:cNvPr id="5" name="Date Placeholder 4">
-            <a:extLst>
-              <a:ext uri="{FF2B5EF4-FFF2-40B4-BE49-F238E27FC236}">
-                <a16:creationId xmlns:a16="http://schemas.microsoft.com/office/drawing/2014/main" id="{17D8E0C3-2419-2577-832A-919354A9B273}"/>
-              </a:ext>
-            </a:extLst>
-          </p:cNvPr>
+          <p:cNvPr id="5" name="Date Placeholder 4"/>
           <p:cNvSpPr>
             <a:spLocks noGrp="1"/>
           </p:cNvSpPr>
@@ -3148,7 +4608,7 @@
           <a:p>
             <a:fld id="{69B944B8-7A9A-4030-BC91-8FDE173981C2}" type="datetimeFigureOut">
               <a:rPr lang="en-US" smtClean="0"/>
-              <a:t>6/5/2026</a:t>
+              <a:t>7/8/2026</a:t>
             </a:fld>
             <a:endParaRPr lang="en-US"/>
           </a:p>
@@ -3156,13 +4616,7 @@
       </p:sp>
       <p:sp>
         <p:nvSpPr>
-          <p:cNvPr id="6" name="Footer Placeholder 5">
-            <a:extLst>
-              <a:ext uri="{FF2B5EF4-FFF2-40B4-BE49-F238E27FC236}">
-                <a16:creationId xmlns:a16="http://schemas.microsoft.com/office/drawing/2014/main" id="{F90DDD0C-587E-04B1-2443-8B155C9E0D4F}"/>
-              </a:ext>
-            </a:extLst>
-          </p:cNvPr>
+          <p:cNvPr id="6" name="Footer Placeholder 5"/>
           <p:cNvSpPr>
             <a:spLocks noGrp="1"/>
           </p:cNvSpPr>
@@ -3181,13 +4635,7 @@
       </p:sp>
       <p:sp>
         <p:nvSpPr>
-          <p:cNvPr id="7" name="Slide Number Placeholder 6">
-            <a:extLst>
-              <a:ext uri="{FF2B5EF4-FFF2-40B4-BE49-F238E27FC236}">
-                <a16:creationId xmlns:a16="http://schemas.microsoft.com/office/drawing/2014/main" id="{05A601CD-E65E-0B78-F73C-11FC2DBE65E2}"/>
-              </a:ext>
-            </a:extLst>
-          </p:cNvPr>
+          <p:cNvPr id="7" name="Slide Number Placeholder 6"/>
           <p:cNvSpPr>
             <a:spLocks noGrp="1"/>
           </p:cNvSpPr>
@@ -3211,7 +4659,7 @@
     </p:spTree>
     <p:extLst>
       <p:ext uri="{BB962C8B-B14F-4D97-AF65-F5344CB8AC3E}">
-        <p14:creationId xmlns:p14="http://schemas.microsoft.com/office/powerpoint/2010/main" val="165316123"/>
+        <p14:creationId xmlns:p14="http://schemas.microsoft.com/office/powerpoint/2010/main" val="1889566653"/>
       </p:ext>
     </p:extLst>
   </p:cSld>
@@ -3245,13 +4693,7 @@
       </p:grpSpPr>
       <p:sp>
         <p:nvSpPr>
-          <p:cNvPr id="2" name="Title Placeholder 1">
-            <a:extLst>
-              <a:ext uri="{FF2B5EF4-FFF2-40B4-BE49-F238E27FC236}">
-                <a16:creationId xmlns:a16="http://schemas.microsoft.com/office/drawing/2014/main" id="{DAF09356-AC00-2248-FAD8-139CDAB0B8C1}"/>
-              </a:ext>
-            </a:extLst>
-          </p:cNvPr>
+          <p:cNvPr id="2" name="Title Placeholder 1"/>
           <p:cNvSpPr>
             <a:spLocks noGrp="1"/>
           </p:cNvSpPr>
@@ -3261,8 +4703,8 @@
         </p:nvSpPr>
         <p:spPr>
           <a:xfrm>
-            <a:off x="838200" y="365125"/>
-            <a:ext cx="10515600" cy="1325563"/>
+            <a:off x="766931" y="355406"/>
+            <a:ext cx="9621501" cy="1290276"/>
           </a:xfrm>
           <a:prstGeom prst="rect">
             <a:avLst/>
@@ -3278,18 +4720,13 @@
               <a:rPr lang="en-US"/>
               <a:t>Click to edit Master title style</a:t>
             </a:r>
+            <a:endParaRPr lang="en-US" dirty="0"/>
           </a:p>
         </p:txBody>
       </p:sp>
       <p:sp>
         <p:nvSpPr>
-          <p:cNvPr id="3" name="Text Placeholder 2">
-            <a:extLst>
-              <a:ext uri="{FF2B5EF4-FFF2-40B4-BE49-F238E27FC236}">
-                <a16:creationId xmlns:a16="http://schemas.microsoft.com/office/drawing/2014/main" id="{C3F43D1F-96B9-3F1E-A247-D3CBD08632E8}"/>
-              </a:ext>
-            </a:extLst>
-          </p:cNvPr>
+          <p:cNvPr id="3" name="Text Placeholder 2"/>
           <p:cNvSpPr>
             <a:spLocks noGrp="1"/>
           </p:cNvSpPr>
@@ -3299,8 +4736,8 @@
         </p:nvSpPr>
         <p:spPr>
           <a:xfrm>
-            <a:off x="838200" y="1825625"/>
-            <a:ext cx="10515600" cy="4351338"/>
+            <a:off x="766931" y="1777026"/>
+            <a:ext cx="9621501" cy="4235504"/>
           </a:xfrm>
           <a:prstGeom prst="rect">
             <a:avLst/>
@@ -3345,18 +4782,13 @@
               <a:rPr lang="en-US"/>
               <a:t>Fifth level</a:t>
             </a:r>
+            <a:endParaRPr lang="en-US" dirty="0"/>
           </a:p>
         </p:txBody>
       </p:sp>
       <p:sp>
         <p:nvSpPr>
-          <p:cNvPr id="4" name="Date Placeholder 3">
-            <a:extLst>
-              <a:ext uri="{FF2B5EF4-FFF2-40B4-BE49-F238E27FC236}">
-                <a16:creationId xmlns:a16="http://schemas.microsoft.com/office/drawing/2014/main" id="{7FBCB3C1-3133-6926-CEB1-E4B9E5F2CC8F}"/>
-              </a:ext>
-            </a:extLst>
-          </p:cNvPr>
+          <p:cNvPr id="4" name="Date Placeholder 3"/>
           <p:cNvSpPr>
             <a:spLocks noGrp="1"/>
           </p:cNvSpPr>
@@ -3366,8 +4798,8 @@
         </p:nvSpPr>
         <p:spPr>
           <a:xfrm>
-            <a:off x="838200" y="6356350"/>
-            <a:ext cx="2743200" cy="365125"/>
+            <a:off x="766931" y="6187143"/>
+            <a:ext cx="2509957" cy="355405"/>
           </a:xfrm>
           <a:prstGeom prst="rect">
             <a:avLst/>
@@ -3377,7 +4809,7 @@
           <a:bodyPr vert="horz" lIns="91440" tIns="45720" rIns="91440" bIns="45720" rtlCol="0" anchor="ctr"/>
           <a:lstStyle>
             <a:lvl1pPr algn="l">
-              <a:defRPr sz="1200">
+              <a:defRPr sz="1098">
                 <a:solidFill>
                   <a:schemeClr val="tx1">
                     <a:tint val="82000"/>
@@ -3389,7 +4821,7 @@
           <a:p>
             <a:fld id="{69B944B8-7A9A-4030-BC91-8FDE173981C2}" type="datetimeFigureOut">
               <a:rPr lang="en-US" smtClean="0"/>
-              <a:t>6/5/2026</a:t>
+              <a:t>7/8/2026</a:t>
             </a:fld>
             <a:endParaRPr lang="en-US"/>
           </a:p>
@@ -3397,13 +4829,7 @@
       </p:sp>
       <p:sp>
         <p:nvSpPr>
-          <p:cNvPr id="5" name="Footer Placeholder 4">
-            <a:extLst>
-              <a:ext uri="{FF2B5EF4-FFF2-40B4-BE49-F238E27FC236}">
-                <a16:creationId xmlns:a16="http://schemas.microsoft.com/office/drawing/2014/main" id="{B6C063FE-BB49-AC04-787E-E63D968BB8CE}"/>
-              </a:ext>
-            </a:extLst>
-          </p:cNvPr>
+          <p:cNvPr id="5" name="Footer Placeholder 4"/>
           <p:cNvSpPr>
             <a:spLocks noGrp="1"/>
           </p:cNvSpPr>
@@ -3413,8 +4839,8 @@
         </p:nvSpPr>
         <p:spPr>
           <a:xfrm>
-            <a:off x="4038600" y="6356350"/>
-            <a:ext cx="4114800" cy="365125"/>
+            <a:off x="3695214" y="6187143"/>
+            <a:ext cx="3764935" cy="355405"/>
           </a:xfrm>
           <a:prstGeom prst="rect">
             <a:avLst/>
@@ -3424,7 +4850,7 @@
           <a:bodyPr vert="horz" lIns="91440" tIns="45720" rIns="91440" bIns="45720" rtlCol="0" anchor="ctr"/>
           <a:lstStyle>
             <a:lvl1pPr algn="ctr">
-              <a:defRPr sz="1200">
+              <a:defRPr sz="1098">
                 <a:solidFill>
                   <a:schemeClr val="tx1">
                     <a:tint val="82000"/>
@@ -3440,13 +4866,7 @@
       </p:sp>
       <p:sp>
         <p:nvSpPr>
-          <p:cNvPr id="6" name="Slide Number Placeholder 5">
-            <a:extLst>
-              <a:ext uri="{FF2B5EF4-FFF2-40B4-BE49-F238E27FC236}">
-                <a16:creationId xmlns:a16="http://schemas.microsoft.com/office/drawing/2014/main" id="{70C4F7C2-9C48-C204-32EB-E2BA5565742E}"/>
-              </a:ext>
-            </a:extLst>
-          </p:cNvPr>
+          <p:cNvPr id="6" name="Slide Number Placeholder 5"/>
           <p:cNvSpPr>
             <a:spLocks noGrp="1"/>
           </p:cNvSpPr>
@@ -3456,8 +4876,8 @@
         </p:nvSpPr>
         <p:spPr>
           <a:xfrm>
-            <a:off x="8610600" y="6356350"/>
-            <a:ext cx="2743200" cy="365125"/>
+            <a:off x="7878475" y="6187143"/>
+            <a:ext cx="2509957" cy="355405"/>
           </a:xfrm>
           <a:prstGeom prst="rect">
             <a:avLst/>
@@ -3467,7 +4887,7 @@
           <a:bodyPr vert="horz" lIns="91440" tIns="45720" rIns="91440" bIns="45720" rtlCol="0" anchor="ctr"/>
           <a:lstStyle>
             <a:lvl1pPr algn="r">
-              <a:defRPr sz="1200">
+              <a:defRPr sz="1098">
                 <a:solidFill>
                   <a:schemeClr val="tx1">
                     <a:tint val="82000"/>
@@ -3488,27 +4908,27 @@
     </p:spTree>
     <p:extLst>
       <p:ext uri="{BB962C8B-B14F-4D97-AF65-F5344CB8AC3E}">
-        <p14:creationId xmlns:p14="http://schemas.microsoft.com/office/powerpoint/2010/main" val="1580284056"/>
+        <p14:creationId xmlns:p14="http://schemas.microsoft.com/office/powerpoint/2010/main" val="2498417282"/>
       </p:ext>
     </p:extLst>
   </p:cSld>
   <p:clrMap bg1="lt1" tx1="dk1" bg2="lt2" tx2="dk2" accent1="accent1" accent2="accent2" accent3="accent3" accent4="accent4" accent5="accent5" accent6="accent6" hlink="hlink" folHlink="folHlink"/>
   <p:sldLayoutIdLst>
-    <p:sldLayoutId id="2147483649" r:id="rId1"/>
-    <p:sldLayoutId id="2147483650" r:id="rId2"/>
-    <p:sldLayoutId id="2147483651" r:id="rId3"/>
-    <p:sldLayoutId id="2147483652" r:id="rId4"/>
-    <p:sldLayoutId id="2147483653" r:id="rId5"/>
-    <p:sldLayoutId id="2147483654" r:id="rId6"/>
-    <p:sldLayoutId id="2147483655" r:id="rId7"/>
-    <p:sldLayoutId id="2147483656" r:id="rId8"/>
-    <p:sldLayoutId id="2147483657" r:id="rId9"/>
-    <p:sldLayoutId id="2147483658" r:id="rId10"/>
-    <p:sldLayoutId id="2147483659" r:id="rId11"/>
+    <p:sldLayoutId id="2147483709" r:id="rId1"/>
+    <p:sldLayoutId id="2147483710" r:id="rId2"/>
+    <p:sldLayoutId id="2147483711" r:id="rId3"/>
+    <p:sldLayoutId id="2147483712" r:id="rId4"/>
+    <p:sldLayoutId id="2147483713" r:id="rId5"/>
+    <p:sldLayoutId id="2147483714" r:id="rId6"/>
+    <p:sldLayoutId id="2147483715" r:id="rId7"/>
+    <p:sldLayoutId id="2147483716" r:id="rId8"/>
+    <p:sldLayoutId id="2147483717" r:id="rId9"/>
+    <p:sldLayoutId id="2147483718" r:id="rId10"/>
+    <p:sldLayoutId id="2147483719" r:id="rId11"/>
   </p:sldLayoutIdLst>
   <p:txStyles>
     <p:titleStyle>
-      <a:lvl1pPr algn="l" defTabSz="914400" rtl="0" eaLnBrk="1" latinLnBrk="0" hangingPunct="1">
+      <a:lvl1pPr algn="l" defTabSz="836676" rtl="0" eaLnBrk="1" latinLnBrk="0" hangingPunct="1">
         <a:lnSpc>
           <a:spcPct val="90000"/>
         </a:lnSpc>
@@ -3516,7 +4936,7 @@
           <a:spcPct val="0"/>
         </a:spcBef>
         <a:buNone/>
-        <a:defRPr sz="4400" kern="1200">
+        <a:defRPr sz="4026" kern="1200">
           <a:solidFill>
             <a:schemeClr val="tx1"/>
           </a:solidFill>
@@ -3527,16 +4947,16 @@
       </a:lvl1pPr>
     </p:titleStyle>
     <p:bodyStyle>
-      <a:lvl1pPr marL="228600" indent="-228600" algn="l" defTabSz="914400" rtl="0" eaLnBrk="1" latinLnBrk="0" hangingPunct="1">
+      <a:lvl1pPr marL="209169" indent="-209169" algn="l" defTabSz="836676" rtl="0" eaLnBrk="1" latinLnBrk="0" hangingPunct="1">
         <a:lnSpc>
           <a:spcPct val="90000"/>
         </a:lnSpc>
         <a:spcBef>
-          <a:spcPts val="1000"/>
+          <a:spcPts val="915"/>
         </a:spcBef>
         <a:buFont typeface="Arial" panose="020B0604020202020204" pitchFamily="34" charset="0"/>
         <a:buChar char="•"/>
-        <a:defRPr sz="2800" kern="1200">
+        <a:defRPr sz="2562" kern="1200">
           <a:solidFill>
             <a:schemeClr val="tx1"/>
           </a:solidFill>
@@ -3545,16 +4965,16 @@
           <a:cs typeface="+mn-cs"/>
         </a:defRPr>
       </a:lvl1pPr>
-      <a:lvl2pPr marL="685800" indent="-228600" algn="l" defTabSz="914400" rtl="0" eaLnBrk="1" latinLnBrk="0" hangingPunct="1">
+      <a:lvl2pPr marL="627507" indent="-209169" algn="l" defTabSz="836676" rtl="0" eaLnBrk="1" latinLnBrk="0" hangingPunct="1">
         <a:lnSpc>
           <a:spcPct val="90000"/>
         </a:lnSpc>
         <a:spcBef>
-          <a:spcPts val="500"/>
+          <a:spcPts val="458"/>
         </a:spcBef>
         <a:buFont typeface="Arial" panose="020B0604020202020204" pitchFamily="34" charset="0"/>
         <a:buChar char="•"/>
-        <a:defRPr sz="2400" kern="1200">
+        <a:defRPr sz="2196" kern="1200">
           <a:solidFill>
             <a:schemeClr val="tx1"/>
           </a:solidFill>
@@ -3563,16 +4983,16 @@
           <a:cs typeface="+mn-cs"/>
         </a:defRPr>
       </a:lvl2pPr>
-      <a:lvl3pPr marL="1143000" indent="-228600" algn="l" defTabSz="914400" rtl="0" eaLnBrk="1" latinLnBrk="0" hangingPunct="1">
+      <a:lvl3pPr marL="1045845" indent="-209169" algn="l" defTabSz="836676" rtl="0" eaLnBrk="1" latinLnBrk="0" hangingPunct="1">
         <a:lnSpc>
           <a:spcPct val="90000"/>
         </a:lnSpc>
         <a:spcBef>
-          <a:spcPts val="500"/>
+          <a:spcPts val="458"/>
         </a:spcBef>
         <a:buFont typeface="Arial" panose="020B0604020202020204" pitchFamily="34" charset="0"/>
         <a:buChar char="•"/>
-        <a:defRPr sz="2000" kern="1200">
+        <a:defRPr sz="1830" kern="1200">
           <a:solidFill>
             <a:schemeClr val="tx1"/>
           </a:solidFill>
@@ -3581,16 +5001,16 @@
           <a:cs typeface="+mn-cs"/>
         </a:defRPr>
       </a:lvl3pPr>
-      <a:lvl4pPr marL="1600200" indent="-228600" algn="l" defTabSz="914400" rtl="0" eaLnBrk="1" latinLnBrk="0" hangingPunct="1">
+      <a:lvl4pPr marL="1464183" indent="-209169" algn="l" defTabSz="836676" rtl="0" eaLnBrk="1" latinLnBrk="0" hangingPunct="1">
         <a:lnSpc>
           <a:spcPct val="90000"/>
         </a:lnSpc>
         <a:spcBef>
-          <a:spcPts val="500"/>
+          <a:spcPts val="458"/>
         </a:spcBef>
         <a:buFont typeface="Arial" panose="020B0604020202020204" pitchFamily="34" charset="0"/>
         <a:buChar char="•"/>
-        <a:defRPr sz="1800" kern="1200">
+        <a:defRPr sz="1647" kern="1200">
           <a:solidFill>
             <a:schemeClr val="tx1"/>
           </a:solidFill>
@@ -3599,16 +5019,16 @@
           <a:cs typeface="+mn-cs"/>
         </a:defRPr>
       </a:lvl4pPr>
-      <a:lvl5pPr marL="2057400" indent="-228600" algn="l" defTabSz="914400" rtl="0" eaLnBrk="1" latinLnBrk="0" hangingPunct="1">
+      <a:lvl5pPr marL="1882521" indent="-209169" algn="l" defTabSz="836676" rtl="0" eaLnBrk="1" latinLnBrk="0" hangingPunct="1">
         <a:lnSpc>
           <a:spcPct val="90000"/>
         </a:lnSpc>
         <a:spcBef>
-          <a:spcPts val="500"/>
+          <a:spcPts val="458"/>
         </a:spcBef>
         <a:buFont typeface="Arial" panose="020B0604020202020204" pitchFamily="34" charset="0"/>
         <a:buChar char="•"/>
-        <a:defRPr sz="1800" kern="1200">
+        <a:defRPr sz="1647" kern="1200">
           <a:solidFill>
             <a:schemeClr val="tx1"/>
           </a:solidFill>
@@ -3617,16 +5037,16 @@
           <a:cs typeface="+mn-cs"/>
         </a:defRPr>
       </a:lvl5pPr>
-      <a:lvl6pPr marL="2514600" indent="-228600" algn="l" defTabSz="914400" rtl="0" eaLnBrk="1" latinLnBrk="0" hangingPunct="1">
+      <a:lvl6pPr marL="2300859" indent="-209169" algn="l" defTabSz="836676" rtl="0" eaLnBrk="1" latinLnBrk="0" hangingPunct="1">
         <a:lnSpc>
           <a:spcPct val="90000"/>
         </a:lnSpc>
         <a:spcBef>
-          <a:spcPts val="500"/>
+          <a:spcPts val="458"/>
         </a:spcBef>
         <a:buFont typeface="Arial" panose="020B0604020202020204" pitchFamily="34" charset="0"/>
         <a:buChar char="•"/>
-        <a:defRPr sz="1800" kern="1200">
+        <a:defRPr sz="1647" kern="1200">
           <a:solidFill>
             <a:schemeClr val="tx1"/>
           </a:solidFill>
@@ -3635,16 +5055,16 @@
           <a:cs typeface="+mn-cs"/>
         </a:defRPr>
       </a:lvl6pPr>
-      <a:lvl7pPr marL="2971800" indent="-228600" algn="l" defTabSz="914400" rtl="0" eaLnBrk="1" latinLnBrk="0" hangingPunct="1">
+      <a:lvl7pPr marL="2719197" indent="-209169" algn="l" defTabSz="836676" rtl="0" eaLnBrk="1" latinLnBrk="0" hangingPunct="1">
         <a:lnSpc>
           <a:spcPct val="90000"/>
         </a:lnSpc>
         <a:spcBef>
-          <a:spcPts val="500"/>
+          <a:spcPts val="458"/>
         </a:spcBef>
         <a:buFont typeface="Arial" panose="020B0604020202020204" pitchFamily="34" charset="0"/>
         <a:buChar char="•"/>
-        <a:defRPr sz="1800" kern="1200">
+        <a:defRPr sz="1647" kern="1200">
           <a:solidFill>
             <a:schemeClr val="tx1"/>
           </a:solidFill>
@@ -3653,16 +5073,16 @@
           <a:cs typeface="+mn-cs"/>
         </a:defRPr>
       </a:lvl7pPr>
-      <a:lvl8pPr marL="3429000" indent="-228600" algn="l" defTabSz="914400" rtl="0" eaLnBrk="1" latinLnBrk="0" hangingPunct="1">
+      <a:lvl8pPr marL="3137535" indent="-209169" algn="l" defTabSz="836676" rtl="0" eaLnBrk="1" latinLnBrk="0" hangingPunct="1">
         <a:lnSpc>
           <a:spcPct val="90000"/>
         </a:lnSpc>
         <a:spcBef>
-          <a:spcPts val="500"/>
+          <a:spcPts val="458"/>
         </a:spcBef>
         <a:buFont typeface="Arial" panose="020B0604020202020204" pitchFamily="34" charset="0"/>
         <a:buChar char="•"/>
-        <a:defRPr sz="1800" kern="1200">
+        <a:defRPr sz="1647" kern="1200">
           <a:solidFill>
             <a:schemeClr val="tx1"/>
           </a:solidFill>
@@ -3671,16 +5091,16 @@
           <a:cs typeface="+mn-cs"/>
         </a:defRPr>
       </a:lvl8pPr>
-      <a:lvl9pPr marL="3886200" indent="-228600" algn="l" defTabSz="914400" rtl="0" eaLnBrk="1" latinLnBrk="0" hangingPunct="1">
+      <a:lvl9pPr marL="3555873" indent="-209169" algn="l" defTabSz="836676" rtl="0" eaLnBrk="1" latinLnBrk="0" hangingPunct="1">
         <a:lnSpc>
           <a:spcPct val="90000"/>
         </a:lnSpc>
         <a:spcBef>
-          <a:spcPts val="500"/>
+          <a:spcPts val="458"/>
         </a:spcBef>
         <a:buFont typeface="Arial" panose="020B0604020202020204" pitchFamily="34" charset="0"/>
         <a:buChar char="•"/>
-        <a:defRPr sz="1800" kern="1200">
+        <a:defRPr sz="1647" kern="1200">
           <a:solidFill>
             <a:schemeClr val="tx1"/>
           </a:solidFill>
@@ -3694,8 +5114,8 @@
       <a:defPPr>
         <a:defRPr lang="en-US"/>
       </a:defPPr>
-      <a:lvl1pPr marL="0" algn="l" defTabSz="914400" rtl="0" eaLnBrk="1" latinLnBrk="0" hangingPunct="1">
-        <a:defRPr sz="1800" kern="1200">
+      <a:lvl1pPr marL="0" algn="l" defTabSz="836676" rtl="0" eaLnBrk="1" latinLnBrk="0" hangingPunct="1">
+        <a:defRPr sz="1647" kern="1200">
           <a:solidFill>
             <a:schemeClr val="tx1"/>
           </a:solidFill>
@@ -3704,8 +5124,8 @@
           <a:cs typeface="+mn-cs"/>
         </a:defRPr>
       </a:lvl1pPr>
-      <a:lvl2pPr marL="457200" algn="l" defTabSz="914400" rtl="0" eaLnBrk="1" latinLnBrk="0" hangingPunct="1">
-        <a:defRPr sz="1800" kern="1200">
+      <a:lvl2pPr marL="418338" algn="l" defTabSz="836676" rtl="0" eaLnBrk="1" latinLnBrk="0" hangingPunct="1">
+        <a:defRPr sz="1647" kern="1200">
           <a:solidFill>
             <a:schemeClr val="tx1"/>
           </a:solidFill>
@@ -3714,8 +5134,8 @@
           <a:cs typeface="+mn-cs"/>
         </a:defRPr>
       </a:lvl2pPr>
-      <a:lvl3pPr marL="914400" algn="l" defTabSz="914400" rtl="0" eaLnBrk="1" latinLnBrk="0" hangingPunct="1">
-        <a:defRPr sz="1800" kern="1200">
+      <a:lvl3pPr marL="836676" algn="l" defTabSz="836676" rtl="0" eaLnBrk="1" latinLnBrk="0" hangingPunct="1">
+        <a:defRPr sz="1647" kern="1200">
           <a:solidFill>
             <a:schemeClr val="tx1"/>
           </a:solidFill>
@@ -3724,8 +5144,8 @@
           <a:cs typeface="+mn-cs"/>
         </a:defRPr>
       </a:lvl3pPr>
-      <a:lvl4pPr marL="1371600" algn="l" defTabSz="914400" rtl="0" eaLnBrk="1" latinLnBrk="0" hangingPunct="1">
-        <a:defRPr sz="1800" kern="1200">
+      <a:lvl4pPr marL="1255014" algn="l" defTabSz="836676" rtl="0" eaLnBrk="1" latinLnBrk="0" hangingPunct="1">
+        <a:defRPr sz="1647" kern="1200">
           <a:solidFill>
             <a:schemeClr val="tx1"/>
           </a:solidFill>
@@ -3734,8 +5154,8 @@
           <a:cs typeface="+mn-cs"/>
         </a:defRPr>
       </a:lvl4pPr>
-      <a:lvl5pPr marL="1828800" algn="l" defTabSz="914400" rtl="0" eaLnBrk="1" latinLnBrk="0" hangingPunct="1">
-        <a:defRPr sz="1800" kern="1200">
+      <a:lvl5pPr marL="1673352" algn="l" defTabSz="836676" rtl="0" eaLnBrk="1" latinLnBrk="0" hangingPunct="1">
+        <a:defRPr sz="1647" kern="1200">
           <a:solidFill>
             <a:schemeClr val="tx1"/>
           </a:solidFill>
@@ -3744,8 +5164,8 @@
           <a:cs typeface="+mn-cs"/>
         </a:defRPr>
       </a:lvl5pPr>
-      <a:lvl6pPr marL="2286000" algn="l" defTabSz="914400" rtl="0" eaLnBrk="1" latinLnBrk="0" hangingPunct="1">
-        <a:defRPr sz="1800" kern="1200">
+      <a:lvl6pPr marL="2091690" algn="l" defTabSz="836676" rtl="0" eaLnBrk="1" latinLnBrk="0" hangingPunct="1">
+        <a:defRPr sz="1647" kern="1200">
           <a:solidFill>
             <a:schemeClr val="tx1"/>
           </a:solidFill>
@@ -3754,8 +5174,8 @@
           <a:cs typeface="+mn-cs"/>
         </a:defRPr>
       </a:lvl6pPr>
-      <a:lvl7pPr marL="2743200" algn="l" defTabSz="914400" rtl="0" eaLnBrk="1" latinLnBrk="0" hangingPunct="1">
-        <a:defRPr sz="1800" kern="1200">
+      <a:lvl7pPr marL="2510028" algn="l" defTabSz="836676" rtl="0" eaLnBrk="1" latinLnBrk="0" hangingPunct="1">
+        <a:defRPr sz="1647" kern="1200">
           <a:solidFill>
             <a:schemeClr val="tx1"/>
           </a:solidFill>
@@ -3764,8 +5184,8 @@
           <a:cs typeface="+mn-cs"/>
         </a:defRPr>
       </a:lvl7pPr>
-      <a:lvl8pPr marL="3200400" algn="l" defTabSz="914400" rtl="0" eaLnBrk="1" latinLnBrk="0" hangingPunct="1">
-        <a:defRPr sz="1800" kern="1200">
+      <a:lvl8pPr marL="2928366" algn="l" defTabSz="836676" rtl="0" eaLnBrk="1" latinLnBrk="0" hangingPunct="1">
+        <a:defRPr sz="1647" kern="1200">
           <a:solidFill>
             <a:schemeClr val="tx1"/>
           </a:solidFill>
@@ -3774,8 +5194,8 @@
           <a:cs typeface="+mn-cs"/>
         </a:defRPr>
       </a:lvl8pPr>
-      <a:lvl9pPr marL="3657600" algn="l" defTabSz="914400" rtl="0" eaLnBrk="1" latinLnBrk="0" hangingPunct="1">
-        <a:defRPr sz="1800" kern="1200">
+      <a:lvl9pPr marL="3346704" algn="l" defTabSz="836676" rtl="0" eaLnBrk="1" latinLnBrk="0" hangingPunct="1">
+        <a:defRPr sz="1647" kern="1200">
           <a:solidFill>
             <a:schemeClr val="tx1"/>
           </a:solidFill>
@@ -3808,6 +5228,109 @@
       </p:grpSpPr>
       <p:sp>
         <p:nvSpPr>
+          <p:cNvPr id="9" name="Rectangle 8">
+            <a:extLst>
+              <a:ext uri="{FF2B5EF4-FFF2-40B4-BE49-F238E27FC236}">
+                <a16:creationId xmlns:a16="http://schemas.microsoft.com/office/drawing/2014/main" id="{2C7F6973-6353-7E3C-79F2-F40AF40FF49D}"/>
+              </a:ext>
+            </a:extLst>
+          </p:cNvPr>
+          <p:cNvSpPr/>
+          <p:nvPr/>
+        </p:nvSpPr>
+        <p:spPr>
+          <a:xfrm>
+            <a:off x="5616489" y="4189597"/>
+            <a:ext cx="5229311" cy="1092748"/>
+          </a:xfrm>
+          <a:prstGeom prst="rect">
+            <a:avLst/>
+          </a:prstGeom>
+          <a:solidFill>
+            <a:srgbClr val="F1EE6B">
+              <a:alpha val="25000"/>
+            </a:srgbClr>
+          </a:solidFill>
+        </p:spPr>
+        <p:style>
+          <a:lnRef idx="2">
+            <a:schemeClr val="accent1">
+              <a:shade val="15000"/>
+            </a:schemeClr>
+          </a:lnRef>
+          <a:fillRef idx="1">
+            <a:schemeClr val="accent1"/>
+          </a:fillRef>
+          <a:effectRef idx="0">
+            <a:schemeClr val="accent1"/>
+          </a:effectRef>
+          <a:fontRef idx="minor">
+            <a:schemeClr val="lt1"/>
+          </a:fontRef>
+        </p:style>
+        <p:txBody>
+          <a:bodyPr rtlCol="0" anchor="ctr"/>
+          <a:lstStyle/>
+          <a:p>
+            <a:pPr algn="ctr"/>
+            <a:endParaRPr lang="en-US"/>
+          </a:p>
+        </p:txBody>
+      </p:sp>
+      <p:sp>
+        <p:nvSpPr>
+          <p:cNvPr id="8" name="Rectangle 7">
+            <a:extLst>
+              <a:ext uri="{FF2B5EF4-FFF2-40B4-BE49-F238E27FC236}">
+                <a16:creationId xmlns:a16="http://schemas.microsoft.com/office/drawing/2014/main" id="{52749A71-B24D-04EF-E2F8-4D6BA7F7D5BF}"/>
+              </a:ext>
+            </a:extLst>
+          </p:cNvPr>
+          <p:cNvSpPr/>
+          <p:nvPr/>
+        </p:nvSpPr>
+        <p:spPr>
+          <a:xfrm>
+            <a:off x="5616489" y="5282345"/>
+            <a:ext cx="5229311" cy="1092748"/>
+          </a:xfrm>
+          <a:prstGeom prst="rect">
+            <a:avLst/>
+          </a:prstGeom>
+          <a:solidFill>
+            <a:schemeClr val="accent1">
+              <a:lumMod val="20000"/>
+              <a:lumOff val="80000"/>
+            </a:schemeClr>
+          </a:solidFill>
+        </p:spPr>
+        <p:style>
+          <a:lnRef idx="2">
+            <a:schemeClr val="accent1">
+              <a:shade val="15000"/>
+            </a:schemeClr>
+          </a:lnRef>
+          <a:fillRef idx="1">
+            <a:schemeClr val="accent1"/>
+          </a:fillRef>
+          <a:effectRef idx="0">
+            <a:schemeClr val="accent1"/>
+          </a:effectRef>
+          <a:fontRef idx="minor">
+            <a:schemeClr val="lt1"/>
+          </a:fontRef>
+        </p:style>
+        <p:txBody>
+          <a:bodyPr rtlCol="0" anchor="ctr"/>
+          <a:lstStyle/>
+          <a:p>
+            <a:pPr algn="ctr"/>
+            <a:endParaRPr lang="en-US"/>
+          </a:p>
+        </p:txBody>
+      </p:sp>
+      <p:sp>
+        <p:nvSpPr>
           <p:cNvPr id="78" name="TextBox 77">
             <a:extLst>
               <a:ext uri="{FF2B5EF4-FFF2-40B4-BE49-F238E27FC236}">
@@ -3820,7 +5343,7 @@
         </p:nvSpPr>
         <p:spPr>
           <a:xfrm>
-            <a:off x="103156" y="126607"/>
+            <a:off x="106045" y="35331"/>
             <a:ext cx="7594582" cy="461665"/>
           </a:xfrm>
           <a:prstGeom prst="rect">
@@ -3861,7 +5384,7 @@
         </p:nvGrpSpPr>
         <p:grpSpPr>
           <a:xfrm>
-            <a:off x="2376371" y="4124956"/>
+            <a:off x="2379269" y="4033675"/>
             <a:ext cx="1055989" cy="196898"/>
             <a:chOff x="2089708" y="3816965"/>
             <a:chExt cx="1055989" cy="196898"/>
@@ -3966,7 +5489,7 @@
         </p:nvGrpSpPr>
         <p:grpSpPr>
           <a:xfrm>
-            <a:off x="3530961" y="4134927"/>
+            <a:off x="3533858" y="4043646"/>
             <a:ext cx="1055989" cy="196898"/>
             <a:chOff x="2089708" y="3816965"/>
             <a:chExt cx="1055989" cy="196898"/>
@@ -4071,7 +5594,7 @@
         </p:nvGrpSpPr>
         <p:grpSpPr>
           <a:xfrm>
-            <a:off x="2376371" y="4404583"/>
+            <a:off x="2379269" y="4313311"/>
             <a:ext cx="2210579" cy="206869"/>
             <a:chOff x="1901277" y="3836997"/>
             <a:chExt cx="2210579" cy="206869"/>
@@ -4302,7 +5825,7 @@
         </p:nvGrpSpPr>
         <p:grpSpPr>
           <a:xfrm>
-            <a:off x="2376371" y="4685036"/>
+            <a:off x="2379269" y="4593764"/>
             <a:ext cx="2210579" cy="206869"/>
             <a:chOff x="1901276" y="4111019"/>
             <a:chExt cx="2210579" cy="206869"/>
@@ -4533,7 +6056,7 @@
         </p:nvGrpSpPr>
         <p:grpSpPr>
           <a:xfrm>
-            <a:off x="2376371" y="4975834"/>
+            <a:off x="2379269" y="4884563"/>
             <a:ext cx="2210579" cy="206869"/>
             <a:chOff x="1901276" y="4398401"/>
             <a:chExt cx="2210579" cy="206869"/>
@@ -4764,8 +6287,8 @@
         </p:nvSpPr>
         <p:spPr>
           <a:xfrm>
-            <a:off x="258697" y="3831026"/>
-            <a:ext cx="1818448" cy="584775"/>
+            <a:off x="261586" y="3739751"/>
+            <a:ext cx="1818448" cy="605871"/>
           </a:xfrm>
           <a:prstGeom prst="rect">
             <a:avLst/>
@@ -4813,7 +6336,7 @@
         </p:nvSpPr>
         <p:spPr>
           <a:xfrm>
-            <a:off x="2149296" y="5317628"/>
+            <a:off x="2152195" y="5226357"/>
             <a:ext cx="544903" cy="526621"/>
           </a:xfrm>
           <a:prstGeom prst="ellipse">
@@ -4855,454 +6378,6 @@
           </a:p>
         </p:txBody>
       </p:sp>
-      <p:grpSp>
-        <p:nvGrpSpPr>
-          <p:cNvPr id="152" name="Group 151">
-            <a:extLst>
-              <a:ext uri="{FF2B5EF4-FFF2-40B4-BE49-F238E27FC236}">
-                <a16:creationId xmlns:a16="http://schemas.microsoft.com/office/drawing/2014/main" id="{9C19FC45-9CFF-A7FC-A4EF-37FB2A3031B0}"/>
-              </a:ext>
-            </a:extLst>
-          </p:cNvPr>
-          <p:cNvGrpSpPr/>
-          <p:nvPr/>
-        </p:nvGrpSpPr>
-        <p:grpSpPr>
-          <a:xfrm>
-            <a:off x="3127887" y="5310228"/>
-            <a:ext cx="700197" cy="607594"/>
-            <a:chOff x="2817584" y="2959188"/>
-            <a:chExt cx="700197" cy="607594"/>
-          </a:xfrm>
-        </p:grpSpPr>
-        <p:sp>
-          <p:nvSpPr>
-            <p:cNvPr id="153" name="Oval 152">
-              <a:extLst>
-                <a:ext uri="{FF2B5EF4-FFF2-40B4-BE49-F238E27FC236}">
-                  <a16:creationId xmlns:a16="http://schemas.microsoft.com/office/drawing/2014/main" id="{3DC199A0-168A-7EAE-47FD-FF7A29C57D0A}"/>
-                </a:ext>
-              </a:extLst>
-            </p:cNvPr>
-            <p:cNvSpPr>
-              <a:spLocks noChangeAspect="1"/>
-            </p:cNvSpPr>
-            <p:nvPr/>
-          </p:nvSpPr>
-          <p:spPr>
-            <a:xfrm>
-              <a:off x="2890323" y="2959188"/>
-              <a:ext cx="544903" cy="526621"/>
-            </a:xfrm>
-            <a:prstGeom prst="ellipse">
-              <a:avLst/>
-            </a:prstGeom>
-            <a:noFill/>
-            <a:ln w="38100">
-              <a:solidFill>
-                <a:srgbClr val="198FA3"/>
-              </a:solidFill>
-            </a:ln>
-          </p:spPr>
-          <p:style>
-            <a:lnRef idx="2">
-              <a:schemeClr val="accent1">
-                <a:shade val="50000"/>
-              </a:schemeClr>
-            </a:lnRef>
-            <a:fillRef idx="1">
-              <a:schemeClr val="accent1"/>
-            </a:fillRef>
-            <a:effectRef idx="0">
-              <a:schemeClr val="accent1"/>
-            </a:effectRef>
-            <a:fontRef idx="minor">
-              <a:schemeClr val="lt1"/>
-            </a:fontRef>
-          </p:style>
-          <p:txBody>
-            <a:bodyPr rtlCol="0" anchor="ctr"/>
-            <a:lstStyle/>
-            <a:p>
-              <a:pPr algn="ctr"/>
-              <a:endParaRPr lang="en-US">
-                <a:solidFill>
-                  <a:schemeClr val="tx1"/>
-                </a:solidFill>
-              </a:endParaRPr>
-            </a:p>
-          </p:txBody>
-        </p:sp>
-        <p:sp>
-          <p:nvSpPr>
-            <p:cNvPr id="154" name="Arrow: Right 153">
-              <a:extLst>
-                <a:ext uri="{FF2B5EF4-FFF2-40B4-BE49-F238E27FC236}">
-                  <a16:creationId xmlns:a16="http://schemas.microsoft.com/office/drawing/2014/main" id="{CCF40FE6-EB8D-0E6A-43DE-EC3BD2A66285}"/>
-                </a:ext>
-              </a:extLst>
-            </p:cNvPr>
-            <p:cNvSpPr/>
-            <p:nvPr/>
-          </p:nvSpPr>
-          <p:spPr>
-            <a:xfrm rot="17255756">
-              <a:off x="2830261" y="3076591"/>
-              <a:ext cx="142644" cy="167997"/>
-            </a:xfrm>
-            <a:prstGeom prst="rightArrow">
-              <a:avLst>
-                <a:gd name="adj1" fmla="val 50000"/>
-                <a:gd name="adj2" fmla="val 78284"/>
-              </a:avLst>
-            </a:prstGeom>
-            <a:solidFill>
-              <a:srgbClr val="198FA3"/>
-            </a:solidFill>
-            <a:ln>
-              <a:solidFill>
-                <a:schemeClr val="tx1"/>
-              </a:solidFill>
-            </a:ln>
-          </p:spPr>
-          <p:style>
-            <a:lnRef idx="2">
-              <a:schemeClr val="accent1">
-                <a:shade val="50000"/>
-              </a:schemeClr>
-            </a:lnRef>
-            <a:fillRef idx="1">
-              <a:schemeClr val="accent1"/>
-            </a:fillRef>
-            <a:effectRef idx="0">
-              <a:schemeClr val="accent1"/>
-            </a:effectRef>
-            <a:fontRef idx="minor">
-              <a:schemeClr val="lt1"/>
-            </a:fontRef>
-          </p:style>
-          <p:txBody>
-            <a:bodyPr rtlCol="0" anchor="ctr"/>
-            <a:lstStyle/>
-            <a:p>
-              <a:pPr algn="ctr"/>
-              <a:endParaRPr lang="en-US">
-                <a:solidFill>
-                  <a:schemeClr val="tx1"/>
-                </a:solidFill>
-              </a:endParaRPr>
-            </a:p>
-          </p:txBody>
-        </p:sp>
-        <p:sp>
-          <p:nvSpPr>
-            <p:cNvPr id="155" name="Arrow: Right 154">
-              <a:extLst>
-                <a:ext uri="{FF2B5EF4-FFF2-40B4-BE49-F238E27FC236}">
-                  <a16:creationId xmlns:a16="http://schemas.microsoft.com/office/drawing/2014/main" id="{639B6B91-17D5-4739-C5CA-928CE3FCAD48}"/>
-                </a:ext>
-              </a:extLst>
-            </p:cNvPr>
-            <p:cNvSpPr/>
-            <p:nvPr/>
-          </p:nvSpPr>
-          <p:spPr>
-            <a:xfrm rot="5400000">
-              <a:off x="3362461" y="3090064"/>
-              <a:ext cx="142644" cy="167997"/>
-            </a:xfrm>
-            <a:prstGeom prst="rightArrow">
-              <a:avLst>
-                <a:gd name="adj1" fmla="val 50000"/>
-                <a:gd name="adj2" fmla="val 78284"/>
-              </a:avLst>
-            </a:prstGeom>
-            <a:solidFill>
-              <a:srgbClr val="198FA3"/>
-            </a:solidFill>
-            <a:ln>
-              <a:solidFill>
-                <a:schemeClr val="tx1"/>
-              </a:solidFill>
-            </a:ln>
-          </p:spPr>
-          <p:style>
-            <a:lnRef idx="2">
-              <a:schemeClr val="accent1">
-                <a:shade val="50000"/>
-              </a:schemeClr>
-            </a:lnRef>
-            <a:fillRef idx="1">
-              <a:schemeClr val="accent1"/>
-            </a:fillRef>
-            <a:effectRef idx="0">
-              <a:schemeClr val="accent1"/>
-            </a:effectRef>
-            <a:fontRef idx="minor">
-              <a:schemeClr val="lt1"/>
-            </a:fontRef>
-          </p:style>
-          <p:txBody>
-            <a:bodyPr rtlCol="0" anchor="ctr"/>
-            <a:lstStyle/>
-            <a:p>
-              <a:pPr algn="ctr"/>
-              <a:endParaRPr lang="en-US">
-                <a:solidFill>
-                  <a:schemeClr val="tx1"/>
-                </a:solidFill>
-              </a:endParaRPr>
-            </a:p>
-          </p:txBody>
-        </p:sp>
-        <p:sp>
-          <p:nvSpPr>
-            <p:cNvPr id="156" name="Arrow: Right 155">
-              <a:extLst>
-                <a:ext uri="{FF2B5EF4-FFF2-40B4-BE49-F238E27FC236}">
-                  <a16:creationId xmlns:a16="http://schemas.microsoft.com/office/drawing/2014/main" id="{9A7C78AE-8788-FC92-00DA-1F0498D85098}"/>
-                </a:ext>
-              </a:extLst>
-            </p:cNvPr>
-            <p:cNvSpPr/>
-            <p:nvPr/>
-          </p:nvSpPr>
-          <p:spPr>
-            <a:xfrm rot="11112171">
-              <a:off x="3094028" y="3398785"/>
-              <a:ext cx="142644" cy="167997"/>
-            </a:xfrm>
-            <a:prstGeom prst="rightArrow">
-              <a:avLst>
-                <a:gd name="adj1" fmla="val 50000"/>
-                <a:gd name="adj2" fmla="val 78284"/>
-              </a:avLst>
-            </a:prstGeom>
-            <a:solidFill>
-              <a:srgbClr val="198FA3"/>
-            </a:solidFill>
-            <a:ln>
-              <a:solidFill>
-                <a:schemeClr val="tx1"/>
-              </a:solidFill>
-            </a:ln>
-          </p:spPr>
-          <p:style>
-            <a:lnRef idx="2">
-              <a:schemeClr val="accent1">
-                <a:shade val="50000"/>
-              </a:schemeClr>
-            </a:lnRef>
-            <a:fillRef idx="1">
-              <a:schemeClr val="accent1"/>
-            </a:fillRef>
-            <a:effectRef idx="0">
-              <a:schemeClr val="accent1"/>
-            </a:effectRef>
-            <a:fontRef idx="minor">
-              <a:schemeClr val="lt1"/>
-            </a:fontRef>
-          </p:style>
-          <p:txBody>
-            <a:bodyPr rtlCol="0" anchor="ctr"/>
-            <a:lstStyle/>
-            <a:p>
-              <a:pPr algn="ctr"/>
-              <a:endParaRPr lang="en-US">
-                <a:solidFill>
-                  <a:schemeClr val="tx1"/>
-                </a:solidFill>
-              </a:endParaRPr>
-            </a:p>
-          </p:txBody>
-        </p:sp>
-      </p:grpSp>
-      <p:grpSp>
-        <p:nvGrpSpPr>
-          <p:cNvPr id="158" name="Group 157">
-            <a:extLst>
-              <a:ext uri="{FF2B5EF4-FFF2-40B4-BE49-F238E27FC236}">
-                <a16:creationId xmlns:a16="http://schemas.microsoft.com/office/drawing/2014/main" id="{5E52FF83-AD58-BAE0-1C33-10976D596311}"/>
-              </a:ext>
-            </a:extLst>
-          </p:cNvPr>
-          <p:cNvGrpSpPr/>
-          <p:nvPr/>
-        </p:nvGrpSpPr>
-        <p:grpSpPr>
-          <a:xfrm>
-            <a:off x="4211840" y="5312106"/>
-            <a:ext cx="879252" cy="624153"/>
-            <a:chOff x="7380159" y="2994967"/>
-            <a:chExt cx="879252" cy="624153"/>
-          </a:xfrm>
-        </p:grpSpPr>
-        <p:sp>
-          <p:nvSpPr>
-            <p:cNvPr id="159" name="Oval 158">
-              <a:extLst>
-                <a:ext uri="{FF2B5EF4-FFF2-40B4-BE49-F238E27FC236}">
-                  <a16:creationId xmlns:a16="http://schemas.microsoft.com/office/drawing/2014/main" id="{13B9DC66-AD18-CCCA-A0DD-FBE6FBD2CF1A}"/>
-                </a:ext>
-              </a:extLst>
-            </p:cNvPr>
-            <p:cNvSpPr>
-              <a:spLocks noChangeAspect="1"/>
-            </p:cNvSpPr>
-            <p:nvPr/>
-          </p:nvSpPr>
-          <p:spPr>
-            <a:xfrm>
-              <a:off x="7452898" y="2994967"/>
-              <a:ext cx="544903" cy="526621"/>
-            </a:xfrm>
-            <a:prstGeom prst="ellipse">
-              <a:avLst/>
-            </a:prstGeom>
-            <a:noFill/>
-            <a:ln w="38100">
-              <a:solidFill>
-                <a:srgbClr val="198FA3"/>
-              </a:solidFill>
-            </a:ln>
-          </p:spPr>
-          <p:style>
-            <a:lnRef idx="2">
-              <a:schemeClr val="accent1">
-                <a:shade val="50000"/>
-              </a:schemeClr>
-            </a:lnRef>
-            <a:fillRef idx="1">
-              <a:schemeClr val="accent1"/>
-            </a:fillRef>
-            <a:effectRef idx="0">
-              <a:schemeClr val="accent1"/>
-            </a:effectRef>
-            <a:fontRef idx="minor">
-              <a:schemeClr val="lt1"/>
-            </a:fontRef>
-          </p:style>
-          <p:txBody>
-            <a:bodyPr rtlCol="0" anchor="ctr"/>
-            <a:lstStyle/>
-            <a:p>
-              <a:pPr algn="ctr"/>
-              <a:endParaRPr lang="en-US">
-                <a:solidFill>
-                  <a:schemeClr val="tx1"/>
-                </a:solidFill>
-              </a:endParaRPr>
-            </a:p>
-          </p:txBody>
-        </p:sp>
-        <p:sp>
-          <p:nvSpPr>
-            <p:cNvPr id="160" name="Arrow: Right 159">
-              <a:extLst>
-                <a:ext uri="{FF2B5EF4-FFF2-40B4-BE49-F238E27FC236}">
-                  <a16:creationId xmlns:a16="http://schemas.microsoft.com/office/drawing/2014/main" id="{753DCC75-46CA-B5B3-20F9-119EDA0BC3F7}"/>
-                </a:ext>
-              </a:extLst>
-            </p:cNvPr>
-            <p:cNvSpPr/>
-            <p:nvPr/>
-          </p:nvSpPr>
-          <p:spPr>
-            <a:xfrm rot="17255756">
-              <a:off x="7392836" y="3112370"/>
-              <a:ext cx="142644" cy="167997"/>
-            </a:xfrm>
-            <a:prstGeom prst="rightArrow">
-              <a:avLst>
-                <a:gd name="adj1" fmla="val 50000"/>
-                <a:gd name="adj2" fmla="val 78284"/>
-              </a:avLst>
-            </a:prstGeom>
-            <a:solidFill>
-              <a:srgbClr val="198FA3"/>
-            </a:solidFill>
-            <a:ln>
-              <a:solidFill>
-                <a:schemeClr val="tx1"/>
-              </a:solidFill>
-            </a:ln>
-          </p:spPr>
-          <p:style>
-            <a:lnRef idx="2">
-              <a:schemeClr val="accent1">
-                <a:shade val="50000"/>
-              </a:schemeClr>
-            </a:lnRef>
-            <a:fillRef idx="1">
-              <a:schemeClr val="accent1"/>
-            </a:fillRef>
-            <a:effectRef idx="0">
-              <a:schemeClr val="accent1"/>
-            </a:effectRef>
-            <a:fontRef idx="minor">
-              <a:schemeClr val="lt1"/>
-            </a:fontRef>
-          </p:style>
-          <p:txBody>
-            <a:bodyPr rtlCol="0" anchor="ctr"/>
-            <a:lstStyle/>
-            <a:p>
-              <a:pPr algn="ctr"/>
-              <a:endParaRPr lang="en-US">
-                <a:solidFill>
-                  <a:schemeClr val="tx1"/>
-                </a:solidFill>
-              </a:endParaRPr>
-            </a:p>
-          </p:txBody>
-        </p:sp>
-        <p:sp>
-          <p:nvSpPr>
-            <p:cNvPr id="161" name="TextBox 160">
-              <a:extLst>
-                <a:ext uri="{FF2B5EF4-FFF2-40B4-BE49-F238E27FC236}">
-                  <a16:creationId xmlns:a16="http://schemas.microsoft.com/office/drawing/2014/main" id="{EDF052A1-9EE4-6091-84CE-D0FCA66D3FA1}"/>
-                </a:ext>
-              </a:extLst>
-            </p:cNvPr>
-            <p:cNvSpPr txBox="1"/>
-            <p:nvPr/>
-          </p:nvSpPr>
-          <p:spPr>
-            <a:xfrm rot="5400000">
-              <a:off x="7725349" y="3085059"/>
-              <a:ext cx="544903" cy="523220"/>
-            </a:xfrm>
-            <a:prstGeom prst="rect">
-              <a:avLst/>
-            </a:prstGeom>
-            <a:noFill/>
-          </p:spPr>
-          <p:txBody>
-            <a:bodyPr wrap="square" rtlCol="0">
-              <a:spAutoFit/>
-            </a:bodyPr>
-            <a:lstStyle/>
-            <a:p>
-              <a:pPr algn="l"/>
-              <a:r>
-                <a:rPr lang="en-US" sz="2800" b="1" i="0" u="none" strike="noStrike" dirty="0">
-                  <a:effectLst/>
-                  <a:latin typeface="+mj-lt"/>
-                </a:rPr>
-                <a:t>X</a:t>
-              </a:r>
-              <a:r>
-                <a:rPr lang="en-US" sz="2000" b="0" i="0" dirty="0">
-                  <a:effectLst/>
-                  <a:latin typeface="Arial" panose="020B0604020202020204" pitchFamily="34" charset="0"/>
-                </a:rPr>
-                <a:t> </a:t>
-              </a:r>
-            </a:p>
-          </p:txBody>
-        </p:sp>
-      </p:grpSp>
       <p:sp>
         <p:nvSpPr>
           <p:cNvPr id="162" name="TextBox 161">
@@ -5317,7 +6392,7 @@
         </p:nvSpPr>
         <p:spPr>
           <a:xfrm>
-            <a:off x="1869743" y="5939869"/>
+            <a:off x="1872640" y="5848597"/>
             <a:ext cx="1419621" cy="584775"/>
           </a:xfrm>
           <a:prstGeom prst="rect">
@@ -5367,7 +6442,7 @@
         </p:nvSpPr>
         <p:spPr>
           <a:xfrm>
-            <a:off x="2840335" y="5993961"/>
+            <a:off x="2843233" y="5902681"/>
             <a:ext cx="2317361" cy="523220"/>
           </a:xfrm>
           <a:prstGeom prst="rect">
@@ -5428,7 +6503,7 @@
         </p:nvSpPr>
         <p:spPr>
           <a:xfrm>
-            <a:off x="4074713" y="5973030"/>
+            <a:off x="4077611" y="5881758"/>
             <a:ext cx="1192309" cy="584775"/>
           </a:xfrm>
           <a:prstGeom prst="rect">
@@ -5495,7 +6570,7 @@
         </p:nvSpPr>
         <p:spPr>
           <a:xfrm>
-            <a:off x="2121430" y="3860128"/>
+            <a:off x="2124326" y="3768855"/>
             <a:ext cx="951437" cy="307777"/>
           </a:xfrm>
           <a:prstGeom prst="rect">
@@ -5533,7 +6608,7 @@
         </p:nvSpPr>
         <p:spPr>
           <a:xfrm>
-            <a:off x="3085815" y="3851072"/>
+            <a:off x="3088712" y="3759800"/>
             <a:ext cx="951437" cy="307777"/>
           </a:xfrm>
           <a:prstGeom prst="rect">
@@ -5571,7 +6646,7 @@
         </p:nvSpPr>
         <p:spPr>
           <a:xfrm>
-            <a:off x="4243179" y="3852226"/>
+            <a:off x="4246075" y="3760954"/>
             <a:ext cx="951437" cy="307777"/>
           </a:xfrm>
           <a:prstGeom prst="rect">
@@ -5609,10 +6684,10 @@
         </p:nvGrpSpPr>
         <p:grpSpPr>
           <a:xfrm>
-            <a:off x="6072889" y="4373985"/>
-            <a:ext cx="5997761" cy="2191350"/>
-            <a:chOff x="6070625" y="4208009"/>
-            <a:chExt cx="5997761" cy="2191350"/>
+            <a:off x="6179174" y="4285957"/>
+            <a:ext cx="4721092" cy="1888366"/>
+            <a:chOff x="6174020" y="4302701"/>
+            <a:chExt cx="4721092" cy="1888367"/>
           </a:xfrm>
         </p:grpSpPr>
         <p:sp>
@@ -5629,7 +6704,7 @@
           </p:nvSpPr>
           <p:spPr>
             <a:xfrm>
-              <a:off x="7777437" y="4919168"/>
+              <a:off x="7614119" y="4737828"/>
               <a:ext cx="1390321" cy="1385053"/>
             </a:xfrm>
             <a:prstGeom prst="ellipse">
@@ -5685,7 +6760,7 @@
           </p:nvSpPr>
           <p:spPr>
             <a:xfrm>
-              <a:off x="6070625" y="5647839"/>
+              <a:off x="6433149" y="5667848"/>
               <a:ext cx="1174668" cy="523220"/>
             </a:xfrm>
             <a:prstGeom prst="rect">
@@ -5709,119 +6784,11 @@
                 <a:rPr lang="en-US" sz="1400" dirty="0">
                   <a:latin typeface="+mj-lt"/>
                 </a:rPr>
-                <a:t>Retrieve all resources</a:t>
+                <a:t>Retrieve all resources </a:t>
               </a:r>
             </a:p>
           </p:txBody>
         </p:sp>
-        <p:pic>
-          <p:nvPicPr>
-            <p:cNvPr id="171" name="Picture 170" descr="A person wearing a hat&#10;&#10;Description automatically generated">
-              <a:extLst>
-                <a:ext uri="{FF2B5EF4-FFF2-40B4-BE49-F238E27FC236}">
-                  <a16:creationId xmlns:a16="http://schemas.microsoft.com/office/drawing/2014/main" id="{351EBC78-D79F-E8D3-335B-2283E7A6D3E2}"/>
-                </a:ext>
-              </a:extLst>
-            </p:cNvPr>
-            <p:cNvPicPr>
-              <a:picLocks noChangeAspect="1"/>
-            </p:cNvPicPr>
-            <p:nvPr/>
-          </p:nvPicPr>
-          <p:blipFill rotWithShape="1">
-            <a:blip r:embed="rId3">
-              <a:alphaModFix amt="84000"/>
-              <a:extLst>
-                <a:ext uri="{28A0092B-C50C-407E-A947-70E740481C1C}">
-                  <a14:useLocalDpi xmlns:a14="http://schemas.microsoft.com/office/drawing/2010/main" val="0"/>
-                </a:ext>
-              </a:extLst>
-            </a:blip>
-            <a:srcRect l="17162" r="13432"/>
-            <a:stretch/>
-          </p:blipFill>
-          <p:spPr>
-            <a:xfrm rot="5400000">
-              <a:off x="8042029" y="4238086"/>
-              <a:ext cx="811210" cy="876593"/>
-            </a:xfrm>
-            <a:prstGeom prst="rect">
-              <a:avLst/>
-            </a:prstGeom>
-          </p:spPr>
-        </p:pic>
-        <p:pic>
-          <p:nvPicPr>
-            <p:cNvPr id="172" name="Picture 171" descr="A picture containing fish, window, sitting, beach&#10;&#10;Description automatically generated">
-              <a:extLst>
-                <a:ext uri="{FF2B5EF4-FFF2-40B4-BE49-F238E27FC236}">
-                  <a16:creationId xmlns:a16="http://schemas.microsoft.com/office/drawing/2014/main" id="{AC7A8F1F-75AA-05FD-2918-D5B9102F4CEE}"/>
-                </a:ext>
-              </a:extLst>
-            </p:cNvPr>
-            <p:cNvPicPr>
-              <a:picLocks noChangeAspect="1"/>
-            </p:cNvPicPr>
-            <p:nvPr/>
-          </p:nvPicPr>
-          <p:blipFill rotWithShape="1">
-            <a:blip r:embed="rId4">
-              <a:alphaModFix amt="84000"/>
-              <a:extLst>
-                <a:ext uri="{28A0092B-C50C-407E-A947-70E740481C1C}">
-                  <a14:useLocalDpi xmlns:a14="http://schemas.microsoft.com/office/drawing/2010/main" val="0"/>
-                </a:ext>
-              </a:extLst>
-            </a:blip>
-            <a:srcRect l="10941" t="27376" r="18263" b="18657"/>
-            <a:stretch/>
-          </p:blipFill>
-          <p:spPr>
-            <a:xfrm>
-              <a:off x="8920596" y="5634966"/>
-              <a:ext cx="1098648" cy="628143"/>
-            </a:xfrm>
-            <a:prstGeom prst="rect">
-              <a:avLst/>
-            </a:prstGeom>
-          </p:spPr>
-        </p:pic>
-        <p:pic>
-          <p:nvPicPr>
-            <p:cNvPr id="173" name="Picture 172" descr="A person swimming in the water&#10;&#10;Description automatically generated">
-              <a:extLst>
-                <a:ext uri="{FF2B5EF4-FFF2-40B4-BE49-F238E27FC236}">
-                  <a16:creationId xmlns:a16="http://schemas.microsoft.com/office/drawing/2014/main" id="{9602297B-9890-1291-9C8F-02EB6DCD4F5A}"/>
-                </a:ext>
-              </a:extLst>
-            </p:cNvPr>
-            <p:cNvPicPr>
-              <a:picLocks noChangeAspect="1"/>
-            </p:cNvPicPr>
-            <p:nvPr/>
-          </p:nvPicPr>
-          <p:blipFill rotWithShape="1">
-            <a:blip r:embed="rId5">
-              <a:alphaModFix amt="84000"/>
-              <a:extLst>
-                <a:ext uri="{28A0092B-C50C-407E-A947-70E740481C1C}">
-                  <a14:useLocalDpi xmlns:a14="http://schemas.microsoft.com/office/drawing/2010/main" val="0"/>
-                </a:ext>
-              </a:extLst>
-            </a:blip>
-            <a:srcRect l="14450" r="26338"/>
-            <a:stretch/>
-          </p:blipFill>
-          <p:spPr>
-            <a:xfrm>
-              <a:off x="7349863" y="5465727"/>
-              <a:ext cx="698638" cy="884912"/>
-            </a:xfrm>
-            <a:prstGeom prst="rect">
-              <a:avLst/>
-            </a:prstGeom>
-          </p:spPr>
-        </p:pic>
         <p:sp>
           <p:nvSpPr>
             <p:cNvPr id="174" name="TextBox 173">
@@ -5836,8 +6803,8 @@
           </p:nvSpPr>
           <p:spPr>
             <a:xfrm>
-              <a:off x="6483080" y="4312850"/>
-              <a:ext cx="1433151" cy="738664"/>
+              <a:off x="6174020" y="4372565"/>
+              <a:ext cx="2135259" cy="523220"/>
             </a:xfrm>
             <a:prstGeom prst="rect">
               <a:avLst/>
@@ -5879,8 +6846,8 @@
           </p:nvSpPr>
           <p:spPr>
             <a:xfrm>
-              <a:off x="9242327" y="4208009"/>
-              <a:ext cx="1729131" cy="954107"/>
+              <a:off x="9016642" y="4302701"/>
+              <a:ext cx="1820033" cy="738664"/>
             </a:xfrm>
             <a:prstGeom prst="rect">
               <a:avLst/>
@@ -5903,7 +6870,7 @@
                 <a:rPr lang="en-US" sz="1400" dirty="0">
                   <a:latin typeface="+mj-lt"/>
                 </a:rPr>
-                <a:t>Bring all resources across all treatments back up to their original biomass </a:t>
+                <a:t>Bring all treatments back up to their original biomass </a:t>
               </a:r>
             </a:p>
           </p:txBody>
@@ -5922,8 +6889,8 @@
           </p:nvSpPr>
           <p:spPr>
             <a:xfrm>
-              <a:off x="10106892" y="5641260"/>
-              <a:ext cx="1961494" cy="307777"/>
+              <a:off x="9089955" y="5721519"/>
+              <a:ext cx="1805157" cy="307777"/>
             </a:xfrm>
             <a:prstGeom prst="rect">
               <a:avLst/>
@@ -5967,8 +6934,8 @@
             <p:nvPr/>
           </p:nvSpPr>
           <p:spPr>
-            <a:xfrm rot="17971951">
-              <a:off x="7771475" y="5125454"/>
+            <a:xfrm rot="18882819">
+              <a:off x="7702060" y="4845678"/>
               <a:ext cx="235517" cy="232672"/>
             </a:xfrm>
             <a:prstGeom prst="rightArrow">
@@ -6028,8 +6995,8 @@
             <p:nvPr/>
           </p:nvSpPr>
           <p:spPr>
-            <a:xfrm rot="3876053">
-              <a:off x="8968968" y="5169230"/>
+            <a:xfrm rot="2823530">
+              <a:off x="8713552" y="4887761"/>
               <a:ext cx="235517" cy="232672"/>
             </a:xfrm>
             <a:prstGeom prst="rightArrow">
@@ -6089,8 +7056,8 @@
             <p:nvPr/>
           </p:nvSpPr>
           <p:spPr>
-            <a:xfrm rot="10459484">
-              <a:off x="8522620" y="6163949"/>
+            <a:xfrm rot="13585631">
+              <a:off x="7667938" y="5742645"/>
               <a:ext cx="235517" cy="235410"/>
             </a:xfrm>
             <a:prstGeom prst="rightArrow">
@@ -6152,8 +7119,8 @@
         </p:nvGrpSpPr>
         <p:grpSpPr>
           <a:xfrm>
-            <a:off x="180316" y="720402"/>
-            <a:ext cx="10855498" cy="2698886"/>
+            <a:off x="172727" y="630184"/>
+            <a:ext cx="10855498" cy="2698887"/>
             <a:chOff x="156204" y="563207"/>
             <a:chExt cx="10855498" cy="2698886"/>
           </a:xfrm>
@@ -7508,10 +8475,10 @@
           </p:nvGrpSpPr>
           <p:grpSpPr>
             <a:xfrm>
-              <a:off x="4246887" y="2029010"/>
-              <a:ext cx="700197" cy="607594"/>
-              <a:chOff x="2817584" y="2959188"/>
-              <a:chExt cx="700197" cy="607594"/>
+              <a:off x="4319626" y="2029010"/>
+              <a:ext cx="544903" cy="534497"/>
+              <a:chOff x="2890323" y="2959188"/>
+              <a:chExt cx="544903" cy="534497"/>
             </a:xfrm>
           </p:grpSpPr>
           <p:sp>
@@ -7574,128 +8541,6 @@
           </p:sp>
           <p:sp>
             <p:nvSpPr>
-              <p:cNvPr id="58" name="Arrow: Right 57">
-                <a:extLst>
-                  <a:ext uri="{FF2B5EF4-FFF2-40B4-BE49-F238E27FC236}">
-                    <a16:creationId xmlns:a16="http://schemas.microsoft.com/office/drawing/2014/main" id="{482EE87C-5214-779E-8173-974CE82A394E}"/>
-                  </a:ext>
-                </a:extLst>
-              </p:cNvPr>
-              <p:cNvSpPr/>
-              <p:nvPr/>
-            </p:nvSpPr>
-            <p:spPr>
-              <a:xfrm rot="17255756">
-                <a:off x="2830261" y="3076591"/>
-                <a:ext cx="142644" cy="167997"/>
-              </a:xfrm>
-              <a:prstGeom prst="rightArrow">
-                <a:avLst>
-                  <a:gd name="adj1" fmla="val 50000"/>
-                  <a:gd name="adj2" fmla="val 78284"/>
-                </a:avLst>
-              </a:prstGeom>
-              <a:solidFill>
-                <a:srgbClr val="198FA3"/>
-              </a:solidFill>
-              <a:ln>
-                <a:solidFill>
-                  <a:schemeClr val="tx1"/>
-                </a:solidFill>
-              </a:ln>
-            </p:spPr>
-            <p:style>
-              <a:lnRef idx="2">
-                <a:schemeClr val="accent1">
-                  <a:shade val="50000"/>
-                </a:schemeClr>
-              </a:lnRef>
-              <a:fillRef idx="1">
-                <a:schemeClr val="accent1"/>
-              </a:fillRef>
-              <a:effectRef idx="0">
-                <a:schemeClr val="accent1"/>
-              </a:effectRef>
-              <a:fontRef idx="minor">
-                <a:schemeClr val="lt1"/>
-              </a:fontRef>
-            </p:style>
-            <p:txBody>
-              <a:bodyPr rtlCol="0" anchor="ctr"/>
-              <a:lstStyle/>
-              <a:p>
-                <a:pPr algn="ctr"/>
-                <a:endParaRPr lang="en-US">
-                  <a:solidFill>
-                    <a:schemeClr val="tx1"/>
-                  </a:solidFill>
-                </a:endParaRPr>
-              </a:p>
-            </p:txBody>
-          </p:sp>
-          <p:sp>
-            <p:nvSpPr>
-              <p:cNvPr id="59" name="Arrow: Right 58">
-                <a:extLst>
-                  <a:ext uri="{FF2B5EF4-FFF2-40B4-BE49-F238E27FC236}">
-                    <a16:creationId xmlns:a16="http://schemas.microsoft.com/office/drawing/2014/main" id="{DAFDA21A-26D8-E30F-B443-6F06602468B8}"/>
-                  </a:ext>
-                </a:extLst>
-              </p:cNvPr>
-              <p:cNvSpPr/>
-              <p:nvPr/>
-            </p:nvSpPr>
-            <p:spPr>
-              <a:xfrm rot="5400000">
-                <a:off x="3362461" y="3090064"/>
-                <a:ext cx="142644" cy="167997"/>
-              </a:xfrm>
-              <a:prstGeom prst="rightArrow">
-                <a:avLst>
-                  <a:gd name="adj1" fmla="val 50000"/>
-                  <a:gd name="adj2" fmla="val 78284"/>
-                </a:avLst>
-              </a:prstGeom>
-              <a:solidFill>
-                <a:srgbClr val="198FA3"/>
-              </a:solidFill>
-              <a:ln>
-                <a:solidFill>
-                  <a:schemeClr val="tx1"/>
-                </a:solidFill>
-              </a:ln>
-            </p:spPr>
-            <p:style>
-              <a:lnRef idx="2">
-                <a:schemeClr val="accent1">
-                  <a:shade val="50000"/>
-                </a:schemeClr>
-              </a:lnRef>
-              <a:fillRef idx="1">
-                <a:schemeClr val="accent1"/>
-              </a:fillRef>
-              <a:effectRef idx="0">
-                <a:schemeClr val="accent1"/>
-              </a:effectRef>
-              <a:fontRef idx="minor">
-                <a:schemeClr val="lt1"/>
-              </a:fontRef>
-            </p:style>
-            <p:txBody>
-              <a:bodyPr rtlCol="0" anchor="ctr"/>
-              <a:lstStyle/>
-              <a:p>
-                <a:pPr algn="ctr"/>
-                <a:endParaRPr lang="en-US">
-                  <a:solidFill>
-                    <a:schemeClr val="tx1"/>
-                  </a:solidFill>
-                </a:endParaRPr>
-              </a:p>
-            </p:txBody>
-          </p:sp>
-          <p:sp>
-            <p:nvSpPr>
               <p:cNvPr id="60" name="Arrow: Right 59">
                 <a:extLst>
                   <a:ext uri="{FF2B5EF4-FFF2-40B4-BE49-F238E27FC236}">
@@ -7707,270 +8552,8 @@
               <p:nvPr/>
             </p:nvSpPr>
             <p:spPr>
-              <a:xfrm rot="11112171">
-                <a:off x="3094028" y="3398785"/>
-                <a:ext cx="142644" cy="167997"/>
-              </a:xfrm>
-              <a:prstGeom prst="rightArrow">
-                <a:avLst>
-                  <a:gd name="adj1" fmla="val 50000"/>
-                  <a:gd name="adj2" fmla="val 78284"/>
-                </a:avLst>
-              </a:prstGeom>
-              <a:solidFill>
-                <a:srgbClr val="198FA3"/>
-              </a:solidFill>
-              <a:ln>
-                <a:solidFill>
-                  <a:schemeClr val="tx1"/>
-                </a:solidFill>
-              </a:ln>
-            </p:spPr>
-            <p:style>
-              <a:lnRef idx="2">
-                <a:schemeClr val="accent1">
-                  <a:shade val="50000"/>
-                </a:schemeClr>
-              </a:lnRef>
-              <a:fillRef idx="1">
-                <a:schemeClr val="accent1"/>
-              </a:fillRef>
-              <a:effectRef idx="0">
-                <a:schemeClr val="accent1"/>
-              </a:effectRef>
-              <a:fontRef idx="minor">
-                <a:schemeClr val="lt1"/>
-              </a:fontRef>
-            </p:style>
-            <p:txBody>
-              <a:bodyPr rtlCol="0" anchor="ctr"/>
-              <a:lstStyle/>
-              <a:p>
-                <a:pPr algn="ctr"/>
-                <a:endParaRPr lang="en-US">
-                  <a:solidFill>
-                    <a:schemeClr val="tx1"/>
-                  </a:solidFill>
-                </a:endParaRPr>
-              </a:p>
-            </p:txBody>
-          </p:sp>
-        </p:grpSp>
-        <p:grpSp>
-          <p:nvGrpSpPr>
-            <p:cNvPr id="61" name="Group 60">
-              <a:extLst>
-                <a:ext uri="{FF2B5EF4-FFF2-40B4-BE49-F238E27FC236}">
-                  <a16:creationId xmlns:a16="http://schemas.microsoft.com/office/drawing/2014/main" id="{18E167C0-94D7-5A98-3055-6D08EFD01011}"/>
-                </a:ext>
-              </a:extLst>
-            </p:cNvPr>
-            <p:cNvGrpSpPr/>
-            <p:nvPr/>
-          </p:nvGrpSpPr>
-          <p:grpSpPr>
-            <a:xfrm>
-              <a:off x="6621291" y="2012425"/>
-              <a:ext cx="700197" cy="607594"/>
-              <a:chOff x="5126703" y="2901338"/>
-              <a:chExt cx="700197" cy="607594"/>
-            </a:xfrm>
-          </p:grpSpPr>
-          <p:sp>
-            <p:nvSpPr>
-              <p:cNvPr id="62" name="Oval 61">
-                <a:extLst>
-                  <a:ext uri="{FF2B5EF4-FFF2-40B4-BE49-F238E27FC236}">
-                    <a16:creationId xmlns:a16="http://schemas.microsoft.com/office/drawing/2014/main" id="{F1AC08C8-D216-DB1A-F6BF-07960E08E22E}"/>
-                  </a:ext>
-                </a:extLst>
-              </p:cNvPr>
-              <p:cNvSpPr>
-                <a:spLocks noChangeAspect="1"/>
-              </p:cNvSpPr>
-              <p:nvPr/>
-            </p:nvSpPr>
-            <p:spPr>
-              <a:xfrm>
-                <a:off x="5199442" y="2901338"/>
-                <a:ext cx="544903" cy="526621"/>
-              </a:xfrm>
-              <a:prstGeom prst="ellipse">
-                <a:avLst/>
-              </a:prstGeom>
-              <a:noFill/>
-              <a:ln w="38100">
-                <a:solidFill>
-                  <a:srgbClr val="198FA3"/>
-                </a:solidFill>
-              </a:ln>
-            </p:spPr>
-            <p:style>
-              <a:lnRef idx="2">
-                <a:schemeClr val="accent1">
-                  <a:shade val="50000"/>
-                </a:schemeClr>
-              </a:lnRef>
-              <a:fillRef idx="1">
-                <a:schemeClr val="accent1"/>
-              </a:fillRef>
-              <a:effectRef idx="0">
-                <a:schemeClr val="accent1"/>
-              </a:effectRef>
-              <a:fontRef idx="minor">
-                <a:schemeClr val="lt1"/>
-              </a:fontRef>
-            </p:style>
-            <p:txBody>
-              <a:bodyPr rtlCol="0" anchor="ctr"/>
-              <a:lstStyle/>
-              <a:p>
-                <a:pPr algn="ctr"/>
-                <a:endParaRPr lang="en-US">
-                  <a:solidFill>
-                    <a:schemeClr val="tx1"/>
-                  </a:solidFill>
-                </a:endParaRPr>
-              </a:p>
-            </p:txBody>
-          </p:sp>
-          <p:sp>
-            <p:nvSpPr>
-              <p:cNvPr id="63" name="Arrow: Right 62">
-                <a:extLst>
-                  <a:ext uri="{FF2B5EF4-FFF2-40B4-BE49-F238E27FC236}">
-                    <a16:creationId xmlns:a16="http://schemas.microsoft.com/office/drawing/2014/main" id="{3C1B6B22-2898-5C3C-E57C-2BB5F2343942}"/>
-                  </a:ext>
-                </a:extLst>
-              </p:cNvPr>
-              <p:cNvSpPr/>
-              <p:nvPr/>
-            </p:nvSpPr>
-            <p:spPr>
-              <a:xfrm rot="17255756">
-                <a:off x="5139380" y="3018741"/>
-                <a:ext cx="142644" cy="167997"/>
-              </a:xfrm>
-              <a:prstGeom prst="rightArrow">
-                <a:avLst>
-                  <a:gd name="adj1" fmla="val 50000"/>
-                  <a:gd name="adj2" fmla="val 78284"/>
-                </a:avLst>
-              </a:prstGeom>
-              <a:solidFill>
-                <a:srgbClr val="198FA3"/>
-              </a:solidFill>
-              <a:ln>
-                <a:solidFill>
-                  <a:schemeClr val="tx1"/>
-                </a:solidFill>
-              </a:ln>
-            </p:spPr>
-            <p:style>
-              <a:lnRef idx="2">
-                <a:schemeClr val="accent1">
-                  <a:shade val="50000"/>
-                </a:schemeClr>
-              </a:lnRef>
-              <a:fillRef idx="1">
-                <a:schemeClr val="accent1"/>
-              </a:fillRef>
-              <a:effectRef idx="0">
-                <a:schemeClr val="accent1"/>
-              </a:effectRef>
-              <a:fontRef idx="minor">
-                <a:schemeClr val="lt1"/>
-              </a:fontRef>
-            </p:style>
-            <p:txBody>
-              <a:bodyPr rtlCol="0" anchor="ctr"/>
-              <a:lstStyle/>
-              <a:p>
-                <a:pPr algn="ctr"/>
-                <a:endParaRPr lang="en-US">
-                  <a:solidFill>
-                    <a:schemeClr val="tx1"/>
-                  </a:solidFill>
-                </a:endParaRPr>
-              </a:p>
-            </p:txBody>
-          </p:sp>
-          <p:sp>
-            <p:nvSpPr>
-              <p:cNvPr id="64" name="Arrow: Right 63">
-                <a:extLst>
-                  <a:ext uri="{FF2B5EF4-FFF2-40B4-BE49-F238E27FC236}">
-                    <a16:creationId xmlns:a16="http://schemas.microsoft.com/office/drawing/2014/main" id="{650E410A-CD5D-1A61-3292-DA001213AD5D}"/>
-                  </a:ext>
-                </a:extLst>
-              </p:cNvPr>
-              <p:cNvSpPr/>
-              <p:nvPr/>
-            </p:nvSpPr>
-            <p:spPr>
-              <a:xfrm rot="5400000">
-                <a:off x="5671580" y="3032214"/>
-                <a:ext cx="142644" cy="167997"/>
-              </a:xfrm>
-              <a:prstGeom prst="rightArrow">
-                <a:avLst>
-                  <a:gd name="adj1" fmla="val 50000"/>
-                  <a:gd name="adj2" fmla="val 78284"/>
-                </a:avLst>
-              </a:prstGeom>
-              <a:solidFill>
-                <a:srgbClr val="198FA3"/>
-              </a:solidFill>
-              <a:ln>
-                <a:solidFill>
-                  <a:schemeClr val="tx1"/>
-                </a:solidFill>
-              </a:ln>
-            </p:spPr>
-            <p:style>
-              <a:lnRef idx="2">
-                <a:schemeClr val="accent1">
-                  <a:shade val="50000"/>
-                </a:schemeClr>
-              </a:lnRef>
-              <a:fillRef idx="1">
-                <a:schemeClr val="accent1"/>
-              </a:fillRef>
-              <a:effectRef idx="0">
-                <a:schemeClr val="accent1"/>
-              </a:effectRef>
-              <a:fontRef idx="minor">
-                <a:schemeClr val="lt1"/>
-              </a:fontRef>
-            </p:style>
-            <p:txBody>
-              <a:bodyPr rtlCol="0" anchor="ctr"/>
-              <a:lstStyle/>
-              <a:p>
-                <a:pPr algn="ctr"/>
-                <a:endParaRPr lang="en-US">
-                  <a:solidFill>
-                    <a:schemeClr val="tx1"/>
-                  </a:solidFill>
-                </a:endParaRPr>
-              </a:p>
-            </p:txBody>
-          </p:sp>
-          <p:sp>
-            <p:nvSpPr>
-              <p:cNvPr id="65" name="Arrow: Right 64">
-                <a:extLst>
-                  <a:ext uri="{FF2B5EF4-FFF2-40B4-BE49-F238E27FC236}">
-                    <a16:creationId xmlns:a16="http://schemas.microsoft.com/office/drawing/2014/main" id="{959ECC21-24EC-F657-2D6A-60B3B7E4C0ED}"/>
-                  </a:ext>
-                </a:extLst>
-              </p:cNvPr>
-              <p:cNvSpPr/>
-              <p:nvPr/>
-            </p:nvSpPr>
-            <p:spPr>
-              <a:xfrm rot="11112171">
-                <a:off x="5403147" y="3340935"/>
+              <a:xfrm rot="8716448">
+                <a:off x="3284576" y="3325688"/>
                 <a:ext cx="142644" cy="167997"/>
               </a:xfrm>
               <a:prstGeom prst="rightArrow">
@@ -8032,10 +8615,10 @@
           </p:nvGrpSpPr>
           <p:grpSpPr>
             <a:xfrm>
-              <a:off x="8832508" y="2022911"/>
-              <a:ext cx="879252" cy="624153"/>
-              <a:chOff x="7380159" y="2994967"/>
-              <a:chExt cx="879252" cy="624153"/>
+              <a:off x="8905247" y="2022911"/>
+              <a:ext cx="796901" cy="607993"/>
+              <a:chOff x="7452898" y="2994967"/>
+              <a:chExt cx="796901" cy="607993"/>
             </a:xfrm>
           </p:grpSpPr>
           <p:sp>
@@ -8109,8 +8692,8 @@
               <p:nvPr/>
             </p:nvSpPr>
             <p:spPr>
-              <a:xfrm rot="17255756">
-                <a:off x="7392836" y="3112370"/>
+              <a:xfrm rot="18667055">
+                <a:off x="7481602" y="2992197"/>
                 <a:ext cx="142644" cy="167997"/>
               </a:xfrm>
               <a:prstGeom prst="rightArrow">
@@ -8171,7 +8754,7 @@
             </p:nvSpPr>
             <p:spPr>
               <a:xfrm rot="5400000">
-                <a:off x="7725349" y="3085059"/>
+                <a:off x="7715737" y="3068899"/>
                 <a:ext cx="544903" cy="523220"/>
               </a:xfrm>
               <a:prstGeom prst="rect">
@@ -8187,15 +8770,13 @@
               <a:p>
                 <a:pPr algn="l"/>
                 <a:r>
-                  <a:rPr lang="en-US" sz="2800" b="1" i="0" u="none" strike="noStrike" dirty="0">
-                    <a:effectLst/>
+                  <a:rPr lang="en-US" sz="2800" b="1" dirty="0">
                     <a:latin typeface="+mj-lt"/>
                   </a:rPr>
                   <a:t>X</a:t>
                 </a:r>
                 <a:r>
-                  <a:rPr lang="en-US" sz="2000" b="0" i="0" dirty="0">
-                    <a:effectLst/>
+                  <a:rPr lang="en-US" sz="2000" dirty="0">
                     <a:latin typeface="Arial" panose="020B0604020202020204" pitchFamily="34" charset="0"/>
                   </a:rPr>
                   <a:t> </a:t>
@@ -8301,7 +8882,7 @@
                   <a:latin typeface="+mj-lt"/>
                   <a:ea typeface="Gadugi" panose="020B0502040204020203" pitchFamily="34" charset="0"/>
                 </a:rPr>
-                <a:t> datapoint</a:t>
+                <a:t> data point</a:t>
               </a:r>
             </a:p>
             <a:p>
@@ -8637,8 +9218,8 @@
             <p:nvPr/>
           </p:nvSpPr>
           <p:spPr>
-            <a:xfrm rot="5400000">
-              <a:off x="2595651" y="2168470"/>
+            <a:xfrm rot="2965767">
+              <a:off x="2514522" y="2002556"/>
               <a:ext cx="142644" cy="167997"/>
             </a:xfrm>
             <a:prstGeom prst="rightArrow">
@@ -8698,8 +9279,8 @@
             <p:nvPr/>
           </p:nvSpPr>
           <p:spPr>
-            <a:xfrm rot="11112171">
-              <a:off x="9086022" y="2460479"/>
+            <a:xfrm rot="13063689">
+              <a:off x="8933950" y="2384534"/>
               <a:ext cx="142644" cy="167997"/>
             </a:xfrm>
             <a:prstGeom prst="rightArrow">
@@ -8968,8 +9549,8 @@
           <p:nvPr/>
         </p:nvSpPr>
         <p:spPr>
-          <a:xfrm rot="5400000">
-            <a:off x="2620345" y="5483170"/>
+          <a:xfrm rot="8366558">
+            <a:off x="2534246" y="5597401"/>
             <a:ext cx="142644" cy="167997"/>
           </a:xfrm>
           <a:prstGeom prst="rightArrow">
@@ -9030,7 +9611,7 @@
         </p:nvSpPr>
         <p:spPr>
           <a:xfrm>
-            <a:off x="156203" y="3763436"/>
+            <a:off x="159099" y="3672155"/>
             <a:ext cx="5110819" cy="2855478"/>
           </a:xfrm>
           <a:prstGeom prst="rect">
@@ -9082,7 +9663,7 @@
         </p:nvSpPr>
         <p:spPr>
           <a:xfrm>
-            <a:off x="1790368" y="4058819"/>
+            <a:off x="1793259" y="3967547"/>
             <a:ext cx="615376" cy="307777"/>
           </a:xfrm>
           <a:prstGeom prst="rect">
@@ -9121,7 +9702,7 @@
         </p:nvSpPr>
         <p:spPr>
           <a:xfrm>
-            <a:off x="1790368" y="4324938"/>
+            <a:off x="1793259" y="4233666"/>
             <a:ext cx="615376" cy="307777"/>
           </a:xfrm>
           <a:prstGeom prst="rect">
@@ -9160,7 +9741,7 @@
         </p:nvSpPr>
         <p:spPr>
           <a:xfrm>
-            <a:off x="1786055" y="4609272"/>
+            <a:off x="1788945" y="4517998"/>
             <a:ext cx="615376" cy="307777"/>
           </a:xfrm>
           <a:prstGeom prst="rect">
@@ -9199,7 +9780,7 @@
         </p:nvSpPr>
         <p:spPr>
           <a:xfrm>
-            <a:off x="1790368" y="4893606"/>
+            <a:off x="1793259" y="4802333"/>
             <a:ext cx="615376" cy="307777"/>
           </a:xfrm>
           <a:prstGeom prst="rect">
@@ -9238,8 +9819,8 @@
         </p:nvSpPr>
         <p:spPr>
           <a:xfrm>
-            <a:off x="5524821" y="3763436"/>
-            <a:ext cx="6032180" cy="2842324"/>
+            <a:off x="5527720" y="3672156"/>
+            <a:ext cx="5392657" cy="2842324"/>
           </a:xfrm>
           <a:prstGeom prst="rect">
             <a:avLst/>
@@ -9247,7 +9828,7 @@
           <a:noFill/>
           <a:ln w="15875">
             <a:solidFill>
-              <a:srgbClr val="198FA3"/>
+              <a:schemeClr val="tx1"/>
             </a:solidFill>
           </a:ln>
         </p:spPr>
@@ -9290,7 +9871,7 @@
         </p:nvSpPr>
         <p:spPr>
           <a:xfrm>
-            <a:off x="5557705" y="3765199"/>
+            <a:off x="5541284" y="3718359"/>
             <a:ext cx="3961320" cy="369332"/>
           </a:xfrm>
           <a:prstGeom prst="rect">
@@ -9309,6 +9890,1274 @@
                 <a:latin typeface="+mj-lt"/>
               </a:rPr>
               <a:t>Sampling and restocking procedure</a:t>
+            </a:r>
+          </a:p>
+        </p:txBody>
+      </p:sp>
+      <p:sp>
+        <p:nvSpPr>
+          <p:cNvPr id="2" name="Arrow: Right 1">
+            <a:extLst>
+              <a:ext uri="{FF2B5EF4-FFF2-40B4-BE49-F238E27FC236}">
+                <a16:creationId xmlns:a16="http://schemas.microsoft.com/office/drawing/2014/main" id="{BCB49A15-9E4E-9DD9-36A0-F59887725B5C}"/>
+              </a:ext>
+            </a:extLst>
+          </p:cNvPr>
+          <p:cNvSpPr/>
+          <p:nvPr/>
+        </p:nvSpPr>
+        <p:spPr>
+          <a:xfrm rot="8068225">
+            <a:off x="8712650" y="5763271"/>
+            <a:ext cx="235517" cy="232672"/>
+          </a:xfrm>
+          <a:prstGeom prst="rightArrow">
+            <a:avLst>
+              <a:gd name="adj1" fmla="val 50000"/>
+              <a:gd name="adj2" fmla="val 78284"/>
+            </a:avLst>
+          </a:prstGeom>
+          <a:solidFill>
+            <a:srgbClr val="198FA3"/>
+          </a:solidFill>
+          <a:ln>
+            <a:solidFill>
+              <a:schemeClr val="tx1"/>
+            </a:solidFill>
+          </a:ln>
+        </p:spPr>
+        <p:style>
+          <a:lnRef idx="2">
+            <a:schemeClr val="accent1">
+              <a:shade val="50000"/>
+            </a:schemeClr>
+          </a:lnRef>
+          <a:fillRef idx="1">
+            <a:schemeClr val="accent1"/>
+          </a:fillRef>
+          <a:effectRef idx="0">
+            <a:schemeClr val="accent1"/>
+          </a:effectRef>
+          <a:fontRef idx="minor">
+            <a:schemeClr val="lt1"/>
+          </a:fontRef>
+        </p:style>
+        <p:txBody>
+          <a:bodyPr rtlCol="0" anchor="ctr"/>
+          <a:lstStyle/>
+          <a:p>
+            <a:pPr algn="ctr"/>
+            <a:endParaRPr lang="en-US">
+              <a:solidFill>
+                <a:schemeClr val="tx1"/>
+              </a:solidFill>
+            </a:endParaRPr>
+          </a:p>
+        </p:txBody>
+      </p:sp>
+      <p:sp>
+        <p:nvSpPr>
+          <p:cNvPr id="3" name="Arrow: Right 2">
+            <a:extLst>
+              <a:ext uri="{FF2B5EF4-FFF2-40B4-BE49-F238E27FC236}">
+                <a16:creationId xmlns:a16="http://schemas.microsoft.com/office/drawing/2014/main" id="{40432DBF-1891-684C-29D8-944D319DFEC8}"/>
+              </a:ext>
+            </a:extLst>
+          </p:cNvPr>
+          <p:cNvSpPr/>
+          <p:nvPr/>
+        </p:nvSpPr>
+        <p:spPr>
+          <a:xfrm rot="13888093">
+            <a:off x="4342374" y="2454520"/>
+            <a:ext cx="142644" cy="167997"/>
+          </a:xfrm>
+          <a:prstGeom prst="rightArrow">
+            <a:avLst>
+              <a:gd name="adj1" fmla="val 50000"/>
+              <a:gd name="adj2" fmla="val 78284"/>
+            </a:avLst>
+          </a:prstGeom>
+          <a:solidFill>
+            <a:srgbClr val="198FA3"/>
+          </a:solidFill>
+          <a:ln>
+            <a:solidFill>
+              <a:schemeClr val="tx1"/>
+            </a:solidFill>
+          </a:ln>
+        </p:spPr>
+        <p:style>
+          <a:lnRef idx="2">
+            <a:schemeClr val="accent1">
+              <a:shade val="50000"/>
+            </a:schemeClr>
+          </a:lnRef>
+          <a:fillRef idx="1">
+            <a:schemeClr val="accent1"/>
+          </a:fillRef>
+          <a:effectRef idx="0">
+            <a:schemeClr val="accent1"/>
+          </a:effectRef>
+          <a:fontRef idx="minor">
+            <a:schemeClr val="lt1"/>
+          </a:fontRef>
+        </p:style>
+        <p:txBody>
+          <a:bodyPr rtlCol="0" anchor="ctr"/>
+          <a:lstStyle/>
+          <a:p>
+            <a:pPr algn="ctr"/>
+            <a:endParaRPr lang="en-US">
+              <a:solidFill>
+                <a:schemeClr val="tx1"/>
+              </a:solidFill>
+            </a:endParaRPr>
+          </a:p>
+        </p:txBody>
+      </p:sp>
+      <p:sp>
+        <p:nvSpPr>
+          <p:cNvPr id="6" name="Arrow: Right 5">
+            <a:extLst>
+              <a:ext uri="{FF2B5EF4-FFF2-40B4-BE49-F238E27FC236}">
+                <a16:creationId xmlns:a16="http://schemas.microsoft.com/office/drawing/2014/main" id="{689ED5F1-D754-1AF2-278D-3A394CD16D80}"/>
+              </a:ext>
+            </a:extLst>
+          </p:cNvPr>
+          <p:cNvSpPr/>
+          <p:nvPr/>
+        </p:nvSpPr>
+        <p:spPr>
+          <a:xfrm rot="18448465">
+            <a:off x="4329035" y="2117701"/>
+            <a:ext cx="142644" cy="167997"/>
+          </a:xfrm>
+          <a:prstGeom prst="rightArrow">
+            <a:avLst>
+              <a:gd name="adj1" fmla="val 50000"/>
+              <a:gd name="adj2" fmla="val 78284"/>
+            </a:avLst>
+          </a:prstGeom>
+          <a:solidFill>
+            <a:srgbClr val="198FA3"/>
+          </a:solidFill>
+          <a:ln>
+            <a:solidFill>
+              <a:schemeClr val="tx1"/>
+            </a:solidFill>
+          </a:ln>
+        </p:spPr>
+        <p:style>
+          <a:lnRef idx="2">
+            <a:schemeClr val="accent1">
+              <a:shade val="50000"/>
+            </a:schemeClr>
+          </a:lnRef>
+          <a:fillRef idx="1">
+            <a:schemeClr val="accent1"/>
+          </a:fillRef>
+          <a:effectRef idx="0">
+            <a:schemeClr val="accent1"/>
+          </a:effectRef>
+          <a:fontRef idx="minor">
+            <a:schemeClr val="lt1"/>
+          </a:fontRef>
+        </p:style>
+        <p:txBody>
+          <a:bodyPr rtlCol="0" anchor="ctr"/>
+          <a:lstStyle/>
+          <a:p>
+            <a:pPr algn="ctr"/>
+            <a:endParaRPr lang="en-US">
+              <a:solidFill>
+                <a:schemeClr val="tx1"/>
+              </a:solidFill>
+            </a:endParaRPr>
+          </a:p>
+        </p:txBody>
+      </p:sp>
+      <p:sp>
+        <p:nvSpPr>
+          <p:cNvPr id="7" name="Arrow: Right 6">
+            <a:extLst>
+              <a:ext uri="{FF2B5EF4-FFF2-40B4-BE49-F238E27FC236}">
+                <a16:creationId xmlns:a16="http://schemas.microsoft.com/office/drawing/2014/main" id="{2F5FBA4C-371A-F9C7-444E-84BE2A495ED3}"/>
+              </a:ext>
+            </a:extLst>
+          </p:cNvPr>
+          <p:cNvSpPr/>
+          <p:nvPr/>
+        </p:nvSpPr>
+        <p:spPr>
+          <a:xfrm rot="3112325">
+            <a:off x="4747903" y="2127481"/>
+            <a:ext cx="142644" cy="167997"/>
+          </a:xfrm>
+          <a:prstGeom prst="rightArrow">
+            <a:avLst>
+              <a:gd name="adj1" fmla="val 50000"/>
+              <a:gd name="adj2" fmla="val 78284"/>
+            </a:avLst>
+          </a:prstGeom>
+          <a:solidFill>
+            <a:srgbClr val="198FA3"/>
+          </a:solidFill>
+          <a:ln>
+            <a:solidFill>
+              <a:schemeClr val="tx1"/>
+            </a:solidFill>
+          </a:ln>
+        </p:spPr>
+        <p:style>
+          <a:lnRef idx="2">
+            <a:schemeClr val="accent1">
+              <a:shade val="50000"/>
+            </a:schemeClr>
+          </a:lnRef>
+          <a:fillRef idx="1">
+            <a:schemeClr val="accent1"/>
+          </a:fillRef>
+          <a:effectRef idx="0">
+            <a:schemeClr val="accent1"/>
+          </a:effectRef>
+          <a:fontRef idx="minor">
+            <a:schemeClr val="lt1"/>
+          </a:fontRef>
+        </p:style>
+        <p:txBody>
+          <a:bodyPr rtlCol="0" anchor="ctr"/>
+          <a:lstStyle/>
+          <a:p>
+            <a:pPr algn="ctr"/>
+            <a:endParaRPr lang="en-US">
+              <a:solidFill>
+                <a:schemeClr val="tx1"/>
+              </a:solidFill>
+            </a:endParaRPr>
+          </a:p>
+        </p:txBody>
+      </p:sp>
+      <p:sp>
+        <p:nvSpPr>
+          <p:cNvPr id="48" name="TextBox 47">
+            <a:extLst>
+              <a:ext uri="{FF2B5EF4-FFF2-40B4-BE49-F238E27FC236}">
+                <a16:creationId xmlns:a16="http://schemas.microsoft.com/office/drawing/2014/main" id="{7428E576-E80C-B291-62C9-C68949747DBF}"/>
+              </a:ext>
+            </a:extLst>
+          </p:cNvPr>
+          <p:cNvSpPr txBox="1"/>
+          <p:nvPr/>
+        </p:nvSpPr>
+        <p:spPr>
+          <a:xfrm>
+            <a:off x="5624626" y="5297622"/>
+            <a:ext cx="1317711" cy="338554"/>
+          </a:xfrm>
+          <a:prstGeom prst="rect">
+            <a:avLst/>
+          </a:prstGeom>
+          <a:noFill/>
+        </p:spPr>
+        <p:txBody>
+          <a:bodyPr wrap="square" rtlCol="0">
+            <a:spAutoFit/>
+          </a:bodyPr>
+          <a:lstStyle/>
+          <a:p>
+            <a:r>
+              <a:rPr lang="en-US" sz="1600" b="1" dirty="0">
+                <a:latin typeface="+mj-lt"/>
+              </a:rPr>
+              <a:t>Underwater</a:t>
+            </a:r>
+          </a:p>
+        </p:txBody>
+      </p:sp>
+      <p:sp>
+        <p:nvSpPr>
+          <p:cNvPr id="49" name="TextBox 48">
+            <a:extLst>
+              <a:ext uri="{FF2B5EF4-FFF2-40B4-BE49-F238E27FC236}">
+                <a16:creationId xmlns:a16="http://schemas.microsoft.com/office/drawing/2014/main" id="{F619EC85-CFC2-1A8A-754E-A51E3B6BEDAB}"/>
+              </a:ext>
+            </a:extLst>
+          </p:cNvPr>
+          <p:cNvSpPr txBox="1"/>
+          <p:nvPr/>
+        </p:nvSpPr>
+        <p:spPr>
+          <a:xfrm>
+            <a:off x="5604287" y="4952979"/>
+            <a:ext cx="1492478" cy="338554"/>
+          </a:xfrm>
+          <a:prstGeom prst="rect">
+            <a:avLst/>
+          </a:prstGeom>
+          <a:noFill/>
+        </p:spPr>
+        <p:txBody>
+          <a:bodyPr wrap="square" rtlCol="0">
+            <a:spAutoFit/>
+          </a:bodyPr>
+          <a:lstStyle/>
+          <a:p>
+            <a:r>
+              <a:rPr lang="en-US" sz="1600" b="1" dirty="0">
+                <a:latin typeface="+mj-lt"/>
+              </a:rPr>
+              <a:t>On the surface</a:t>
+            </a:r>
+          </a:p>
+        </p:txBody>
+      </p:sp>
+      <p:sp>
+        <p:nvSpPr>
+          <p:cNvPr id="50" name="Arrow: Right 49">
+            <a:extLst>
+              <a:ext uri="{FF2B5EF4-FFF2-40B4-BE49-F238E27FC236}">
+                <a16:creationId xmlns:a16="http://schemas.microsoft.com/office/drawing/2014/main" id="{50C3CFC2-67A8-136D-5894-1D24997CA6B9}"/>
+              </a:ext>
+            </a:extLst>
+          </p:cNvPr>
+          <p:cNvSpPr/>
+          <p:nvPr/>
+        </p:nvSpPr>
+        <p:spPr>
+          <a:xfrm rot="7904237">
+            <a:off x="2539235" y="2423295"/>
+            <a:ext cx="142644" cy="167997"/>
+          </a:xfrm>
+          <a:prstGeom prst="rightArrow">
+            <a:avLst>
+              <a:gd name="adj1" fmla="val 50000"/>
+              <a:gd name="adj2" fmla="val 78284"/>
+            </a:avLst>
+          </a:prstGeom>
+          <a:solidFill>
+            <a:srgbClr val="198FA3"/>
+          </a:solidFill>
+          <a:ln>
+            <a:solidFill>
+              <a:schemeClr val="tx1"/>
+            </a:solidFill>
+          </a:ln>
+        </p:spPr>
+        <p:style>
+          <a:lnRef idx="2">
+            <a:schemeClr val="accent1">
+              <a:shade val="50000"/>
+            </a:schemeClr>
+          </a:lnRef>
+          <a:fillRef idx="1">
+            <a:schemeClr val="accent1"/>
+          </a:fillRef>
+          <a:effectRef idx="0">
+            <a:schemeClr val="accent1"/>
+          </a:effectRef>
+          <a:fontRef idx="minor">
+            <a:schemeClr val="lt1"/>
+          </a:fontRef>
+        </p:style>
+        <p:txBody>
+          <a:bodyPr rtlCol="0" anchor="ctr"/>
+          <a:lstStyle/>
+          <a:p>
+            <a:pPr algn="ctr"/>
+            <a:endParaRPr lang="en-US">
+              <a:solidFill>
+                <a:schemeClr val="tx1"/>
+              </a:solidFill>
+            </a:endParaRPr>
+          </a:p>
+        </p:txBody>
+      </p:sp>
+      <p:sp>
+        <p:nvSpPr>
+          <p:cNvPr id="210" name="Oval 209">
+            <a:extLst>
+              <a:ext uri="{FF2B5EF4-FFF2-40B4-BE49-F238E27FC236}">
+                <a16:creationId xmlns:a16="http://schemas.microsoft.com/office/drawing/2014/main" id="{F904CA26-9B1A-9B8E-0571-9F83A3E48143}"/>
+              </a:ext>
+            </a:extLst>
+          </p:cNvPr>
+          <p:cNvSpPr>
+            <a:spLocks noChangeAspect="1"/>
+          </p:cNvSpPr>
+          <p:nvPr/>
+        </p:nvSpPr>
+        <p:spPr>
+          <a:xfrm>
+            <a:off x="6661359" y="2098990"/>
+            <a:ext cx="544903" cy="526621"/>
+          </a:xfrm>
+          <a:prstGeom prst="ellipse">
+            <a:avLst/>
+          </a:prstGeom>
+          <a:noFill/>
+          <a:ln w="38100">
+            <a:solidFill>
+              <a:srgbClr val="198FA3"/>
+            </a:solidFill>
+          </a:ln>
+        </p:spPr>
+        <p:style>
+          <a:lnRef idx="2">
+            <a:schemeClr val="accent1">
+              <a:shade val="50000"/>
+            </a:schemeClr>
+          </a:lnRef>
+          <a:fillRef idx="1">
+            <a:schemeClr val="accent1"/>
+          </a:fillRef>
+          <a:effectRef idx="0">
+            <a:schemeClr val="accent1"/>
+          </a:effectRef>
+          <a:fontRef idx="minor">
+            <a:schemeClr val="lt1"/>
+          </a:fontRef>
+        </p:style>
+        <p:txBody>
+          <a:bodyPr rtlCol="0" anchor="ctr"/>
+          <a:lstStyle/>
+          <a:p>
+            <a:pPr algn="ctr"/>
+            <a:endParaRPr lang="en-US">
+              <a:solidFill>
+                <a:schemeClr val="tx1"/>
+              </a:solidFill>
+            </a:endParaRPr>
+          </a:p>
+        </p:txBody>
+      </p:sp>
+      <p:sp>
+        <p:nvSpPr>
+          <p:cNvPr id="211" name="Arrow: Right 210">
+            <a:extLst>
+              <a:ext uri="{FF2B5EF4-FFF2-40B4-BE49-F238E27FC236}">
+                <a16:creationId xmlns:a16="http://schemas.microsoft.com/office/drawing/2014/main" id="{E9B3412E-B3F9-5C27-BFF7-1C4754206E22}"/>
+              </a:ext>
+            </a:extLst>
+          </p:cNvPr>
+          <p:cNvSpPr/>
+          <p:nvPr/>
+        </p:nvSpPr>
+        <p:spPr>
+          <a:xfrm rot="13888093">
+            <a:off x="6670789" y="2456249"/>
+            <a:ext cx="142644" cy="167997"/>
+          </a:xfrm>
+          <a:prstGeom prst="rightArrow">
+            <a:avLst>
+              <a:gd name="adj1" fmla="val 50000"/>
+              <a:gd name="adj2" fmla="val 78284"/>
+            </a:avLst>
+          </a:prstGeom>
+          <a:solidFill>
+            <a:srgbClr val="198FA3"/>
+          </a:solidFill>
+          <a:ln>
+            <a:solidFill>
+              <a:schemeClr val="tx1"/>
+            </a:solidFill>
+          </a:ln>
+        </p:spPr>
+        <p:style>
+          <a:lnRef idx="2">
+            <a:schemeClr val="accent1">
+              <a:shade val="50000"/>
+            </a:schemeClr>
+          </a:lnRef>
+          <a:fillRef idx="1">
+            <a:schemeClr val="accent1"/>
+          </a:fillRef>
+          <a:effectRef idx="0">
+            <a:schemeClr val="accent1"/>
+          </a:effectRef>
+          <a:fontRef idx="minor">
+            <a:schemeClr val="lt1"/>
+          </a:fontRef>
+        </p:style>
+        <p:txBody>
+          <a:bodyPr rtlCol="0" anchor="ctr"/>
+          <a:lstStyle/>
+          <a:p>
+            <a:pPr algn="ctr"/>
+            <a:endParaRPr lang="en-US">
+              <a:solidFill>
+                <a:schemeClr val="tx1"/>
+              </a:solidFill>
+            </a:endParaRPr>
+          </a:p>
+        </p:txBody>
+      </p:sp>
+      <p:sp>
+        <p:nvSpPr>
+          <p:cNvPr id="212" name="Arrow: Right 211">
+            <a:extLst>
+              <a:ext uri="{FF2B5EF4-FFF2-40B4-BE49-F238E27FC236}">
+                <a16:creationId xmlns:a16="http://schemas.microsoft.com/office/drawing/2014/main" id="{87B7528A-E860-75D9-CCA0-DAEE1CCC2ECF}"/>
+              </a:ext>
+            </a:extLst>
+          </p:cNvPr>
+          <p:cNvSpPr/>
+          <p:nvPr/>
+        </p:nvSpPr>
+        <p:spPr>
+          <a:xfrm rot="18448465">
+            <a:off x="6657450" y="2119430"/>
+            <a:ext cx="142644" cy="167997"/>
+          </a:xfrm>
+          <a:prstGeom prst="rightArrow">
+            <a:avLst>
+              <a:gd name="adj1" fmla="val 50000"/>
+              <a:gd name="adj2" fmla="val 78284"/>
+            </a:avLst>
+          </a:prstGeom>
+          <a:solidFill>
+            <a:srgbClr val="198FA3"/>
+          </a:solidFill>
+          <a:ln>
+            <a:solidFill>
+              <a:schemeClr val="tx1"/>
+            </a:solidFill>
+          </a:ln>
+        </p:spPr>
+        <p:style>
+          <a:lnRef idx="2">
+            <a:schemeClr val="accent1">
+              <a:shade val="50000"/>
+            </a:schemeClr>
+          </a:lnRef>
+          <a:fillRef idx="1">
+            <a:schemeClr val="accent1"/>
+          </a:fillRef>
+          <a:effectRef idx="0">
+            <a:schemeClr val="accent1"/>
+          </a:effectRef>
+          <a:fontRef idx="minor">
+            <a:schemeClr val="lt1"/>
+          </a:fontRef>
+        </p:style>
+        <p:txBody>
+          <a:bodyPr rtlCol="0" anchor="ctr"/>
+          <a:lstStyle/>
+          <a:p>
+            <a:pPr algn="ctr"/>
+            <a:endParaRPr lang="en-US">
+              <a:solidFill>
+                <a:schemeClr val="tx1"/>
+              </a:solidFill>
+            </a:endParaRPr>
+          </a:p>
+        </p:txBody>
+      </p:sp>
+      <p:sp>
+        <p:nvSpPr>
+          <p:cNvPr id="213" name="Arrow: Right 212">
+            <a:extLst>
+              <a:ext uri="{FF2B5EF4-FFF2-40B4-BE49-F238E27FC236}">
+                <a16:creationId xmlns:a16="http://schemas.microsoft.com/office/drawing/2014/main" id="{7E0CD7AA-E26A-867B-BA0A-C7E4CD9E715B}"/>
+              </a:ext>
+            </a:extLst>
+          </p:cNvPr>
+          <p:cNvSpPr/>
+          <p:nvPr/>
+        </p:nvSpPr>
+        <p:spPr>
+          <a:xfrm rot="3112325">
+            <a:off x="7076318" y="2129210"/>
+            <a:ext cx="142644" cy="167997"/>
+          </a:xfrm>
+          <a:prstGeom prst="rightArrow">
+            <a:avLst>
+              <a:gd name="adj1" fmla="val 50000"/>
+              <a:gd name="adj2" fmla="val 78284"/>
+            </a:avLst>
+          </a:prstGeom>
+          <a:solidFill>
+            <a:srgbClr val="198FA3"/>
+          </a:solidFill>
+          <a:ln>
+            <a:solidFill>
+              <a:schemeClr val="tx1"/>
+            </a:solidFill>
+          </a:ln>
+        </p:spPr>
+        <p:style>
+          <a:lnRef idx="2">
+            <a:schemeClr val="accent1">
+              <a:shade val="50000"/>
+            </a:schemeClr>
+          </a:lnRef>
+          <a:fillRef idx="1">
+            <a:schemeClr val="accent1"/>
+          </a:fillRef>
+          <a:effectRef idx="0">
+            <a:schemeClr val="accent1"/>
+          </a:effectRef>
+          <a:fontRef idx="minor">
+            <a:schemeClr val="lt1"/>
+          </a:fontRef>
+        </p:style>
+        <p:txBody>
+          <a:bodyPr rtlCol="0" anchor="ctr"/>
+          <a:lstStyle/>
+          <a:p>
+            <a:pPr algn="ctr"/>
+            <a:endParaRPr lang="en-US">
+              <a:solidFill>
+                <a:schemeClr val="tx1"/>
+              </a:solidFill>
+            </a:endParaRPr>
+          </a:p>
+        </p:txBody>
+      </p:sp>
+      <p:sp>
+        <p:nvSpPr>
+          <p:cNvPr id="214" name="Arrow: Right 213">
+            <a:extLst>
+              <a:ext uri="{FF2B5EF4-FFF2-40B4-BE49-F238E27FC236}">
+                <a16:creationId xmlns:a16="http://schemas.microsoft.com/office/drawing/2014/main" id="{E2ED6F38-A368-73CC-F62E-ED3ABCF28C0E}"/>
+              </a:ext>
+            </a:extLst>
+          </p:cNvPr>
+          <p:cNvSpPr/>
+          <p:nvPr/>
+        </p:nvSpPr>
+        <p:spPr>
+          <a:xfrm rot="8716448">
+            <a:off x="7060783" y="2462067"/>
+            <a:ext cx="142644" cy="167997"/>
+          </a:xfrm>
+          <a:prstGeom prst="rightArrow">
+            <a:avLst>
+              <a:gd name="adj1" fmla="val 50000"/>
+              <a:gd name="adj2" fmla="val 78284"/>
+            </a:avLst>
+          </a:prstGeom>
+          <a:solidFill>
+            <a:srgbClr val="198FA3"/>
+          </a:solidFill>
+          <a:ln>
+            <a:solidFill>
+              <a:schemeClr val="tx1"/>
+            </a:solidFill>
+          </a:ln>
+        </p:spPr>
+        <p:style>
+          <a:lnRef idx="2">
+            <a:schemeClr val="accent1">
+              <a:shade val="50000"/>
+            </a:schemeClr>
+          </a:lnRef>
+          <a:fillRef idx="1">
+            <a:schemeClr val="accent1"/>
+          </a:fillRef>
+          <a:effectRef idx="0">
+            <a:schemeClr val="accent1"/>
+          </a:effectRef>
+          <a:fontRef idx="minor">
+            <a:schemeClr val="lt1"/>
+          </a:fontRef>
+        </p:style>
+        <p:txBody>
+          <a:bodyPr rtlCol="0" anchor="ctr"/>
+          <a:lstStyle/>
+          <a:p>
+            <a:pPr algn="ctr"/>
+            <a:endParaRPr lang="en-US">
+              <a:solidFill>
+                <a:schemeClr val="tx1"/>
+              </a:solidFill>
+            </a:endParaRPr>
+          </a:p>
+        </p:txBody>
+      </p:sp>
+      <p:sp>
+        <p:nvSpPr>
+          <p:cNvPr id="215" name="Oval 214">
+            <a:extLst>
+              <a:ext uri="{FF2B5EF4-FFF2-40B4-BE49-F238E27FC236}">
+                <a16:creationId xmlns:a16="http://schemas.microsoft.com/office/drawing/2014/main" id="{E17981C2-8E90-7FC8-8C06-7DB460966024}"/>
+              </a:ext>
+            </a:extLst>
+          </p:cNvPr>
+          <p:cNvSpPr>
+            <a:spLocks noChangeAspect="1"/>
+          </p:cNvSpPr>
+          <p:nvPr/>
+        </p:nvSpPr>
+        <p:spPr>
+          <a:xfrm>
+            <a:off x="3192028" y="5217784"/>
+            <a:ext cx="544903" cy="526621"/>
+          </a:xfrm>
+          <a:prstGeom prst="ellipse">
+            <a:avLst/>
+          </a:prstGeom>
+          <a:noFill/>
+          <a:ln w="38100">
+            <a:solidFill>
+              <a:srgbClr val="198FA3"/>
+            </a:solidFill>
+          </a:ln>
+        </p:spPr>
+        <p:style>
+          <a:lnRef idx="2">
+            <a:schemeClr val="accent1">
+              <a:shade val="50000"/>
+            </a:schemeClr>
+          </a:lnRef>
+          <a:fillRef idx="1">
+            <a:schemeClr val="accent1"/>
+          </a:fillRef>
+          <a:effectRef idx="0">
+            <a:schemeClr val="accent1"/>
+          </a:effectRef>
+          <a:fontRef idx="minor">
+            <a:schemeClr val="lt1"/>
+          </a:fontRef>
+        </p:style>
+        <p:txBody>
+          <a:bodyPr rtlCol="0" anchor="ctr"/>
+          <a:lstStyle/>
+          <a:p>
+            <a:pPr algn="ctr"/>
+            <a:endParaRPr lang="en-US">
+              <a:solidFill>
+                <a:schemeClr val="tx1"/>
+              </a:solidFill>
+            </a:endParaRPr>
+          </a:p>
+        </p:txBody>
+      </p:sp>
+      <p:sp>
+        <p:nvSpPr>
+          <p:cNvPr id="216" name="Arrow: Right 215">
+            <a:extLst>
+              <a:ext uri="{FF2B5EF4-FFF2-40B4-BE49-F238E27FC236}">
+                <a16:creationId xmlns:a16="http://schemas.microsoft.com/office/drawing/2014/main" id="{E619E826-65E6-D710-4BA3-6FA54527602C}"/>
+              </a:ext>
+            </a:extLst>
+          </p:cNvPr>
+          <p:cNvSpPr/>
+          <p:nvPr/>
+        </p:nvSpPr>
+        <p:spPr>
+          <a:xfrm rot="13888093">
+            <a:off x="3201458" y="5575043"/>
+            <a:ext cx="142644" cy="167997"/>
+          </a:xfrm>
+          <a:prstGeom prst="rightArrow">
+            <a:avLst>
+              <a:gd name="adj1" fmla="val 50000"/>
+              <a:gd name="adj2" fmla="val 78284"/>
+            </a:avLst>
+          </a:prstGeom>
+          <a:solidFill>
+            <a:srgbClr val="198FA3"/>
+          </a:solidFill>
+          <a:ln>
+            <a:solidFill>
+              <a:schemeClr val="tx1"/>
+            </a:solidFill>
+          </a:ln>
+        </p:spPr>
+        <p:style>
+          <a:lnRef idx="2">
+            <a:schemeClr val="accent1">
+              <a:shade val="50000"/>
+            </a:schemeClr>
+          </a:lnRef>
+          <a:fillRef idx="1">
+            <a:schemeClr val="accent1"/>
+          </a:fillRef>
+          <a:effectRef idx="0">
+            <a:schemeClr val="accent1"/>
+          </a:effectRef>
+          <a:fontRef idx="minor">
+            <a:schemeClr val="lt1"/>
+          </a:fontRef>
+        </p:style>
+        <p:txBody>
+          <a:bodyPr rtlCol="0" anchor="ctr"/>
+          <a:lstStyle/>
+          <a:p>
+            <a:pPr algn="ctr"/>
+            <a:endParaRPr lang="en-US">
+              <a:solidFill>
+                <a:schemeClr val="tx1"/>
+              </a:solidFill>
+            </a:endParaRPr>
+          </a:p>
+        </p:txBody>
+      </p:sp>
+      <p:sp>
+        <p:nvSpPr>
+          <p:cNvPr id="217" name="Arrow: Right 216">
+            <a:extLst>
+              <a:ext uri="{FF2B5EF4-FFF2-40B4-BE49-F238E27FC236}">
+                <a16:creationId xmlns:a16="http://schemas.microsoft.com/office/drawing/2014/main" id="{46DC274D-A801-D442-F41A-097722E4A451}"/>
+              </a:ext>
+            </a:extLst>
+          </p:cNvPr>
+          <p:cNvSpPr/>
+          <p:nvPr/>
+        </p:nvSpPr>
+        <p:spPr>
+          <a:xfrm rot="18448465">
+            <a:off x="3188119" y="5238224"/>
+            <a:ext cx="142644" cy="167997"/>
+          </a:xfrm>
+          <a:prstGeom prst="rightArrow">
+            <a:avLst>
+              <a:gd name="adj1" fmla="val 50000"/>
+              <a:gd name="adj2" fmla="val 78284"/>
+            </a:avLst>
+          </a:prstGeom>
+          <a:solidFill>
+            <a:srgbClr val="198FA3"/>
+          </a:solidFill>
+          <a:ln>
+            <a:solidFill>
+              <a:schemeClr val="tx1"/>
+            </a:solidFill>
+          </a:ln>
+        </p:spPr>
+        <p:style>
+          <a:lnRef idx="2">
+            <a:schemeClr val="accent1">
+              <a:shade val="50000"/>
+            </a:schemeClr>
+          </a:lnRef>
+          <a:fillRef idx="1">
+            <a:schemeClr val="accent1"/>
+          </a:fillRef>
+          <a:effectRef idx="0">
+            <a:schemeClr val="accent1"/>
+          </a:effectRef>
+          <a:fontRef idx="minor">
+            <a:schemeClr val="lt1"/>
+          </a:fontRef>
+        </p:style>
+        <p:txBody>
+          <a:bodyPr rtlCol="0" anchor="ctr"/>
+          <a:lstStyle/>
+          <a:p>
+            <a:pPr algn="ctr"/>
+            <a:endParaRPr lang="en-US">
+              <a:solidFill>
+                <a:schemeClr val="tx1"/>
+              </a:solidFill>
+            </a:endParaRPr>
+          </a:p>
+        </p:txBody>
+      </p:sp>
+      <p:sp>
+        <p:nvSpPr>
+          <p:cNvPr id="218" name="Arrow: Right 217">
+            <a:extLst>
+              <a:ext uri="{FF2B5EF4-FFF2-40B4-BE49-F238E27FC236}">
+                <a16:creationId xmlns:a16="http://schemas.microsoft.com/office/drawing/2014/main" id="{9B0AD713-2710-AE06-A13E-7B9E97E68837}"/>
+              </a:ext>
+            </a:extLst>
+          </p:cNvPr>
+          <p:cNvSpPr/>
+          <p:nvPr/>
+        </p:nvSpPr>
+        <p:spPr>
+          <a:xfrm rot="3112325">
+            <a:off x="3606987" y="5248004"/>
+            <a:ext cx="142644" cy="167997"/>
+          </a:xfrm>
+          <a:prstGeom prst="rightArrow">
+            <a:avLst>
+              <a:gd name="adj1" fmla="val 50000"/>
+              <a:gd name="adj2" fmla="val 78284"/>
+            </a:avLst>
+          </a:prstGeom>
+          <a:solidFill>
+            <a:srgbClr val="198FA3"/>
+          </a:solidFill>
+          <a:ln>
+            <a:solidFill>
+              <a:schemeClr val="tx1"/>
+            </a:solidFill>
+          </a:ln>
+        </p:spPr>
+        <p:style>
+          <a:lnRef idx="2">
+            <a:schemeClr val="accent1">
+              <a:shade val="50000"/>
+            </a:schemeClr>
+          </a:lnRef>
+          <a:fillRef idx="1">
+            <a:schemeClr val="accent1"/>
+          </a:fillRef>
+          <a:effectRef idx="0">
+            <a:schemeClr val="accent1"/>
+          </a:effectRef>
+          <a:fontRef idx="minor">
+            <a:schemeClr val="lt1"/>
+          </a:fontRef>
+        </p:style>
+        <p:txBody>
+          <a:bodyPr rtlCol="0" anchor="ctr"/>
+          <a:lstStyle/>
+          <a:p>
+            <a:pPr algn="ctr"/>
+            <a:endParaRPr lang="en-US">
+              <a:solidFill>
+                <a:schemeClr val="tx1"/>
+              </a:solidFill>
+            </a:endParaRPr>
+          </a:p>
+        </p:txBody>
+      </p:sp>
+      <p:sp>
+        <p:nvSpPr>
+          <p:cNvPr id="219" name="Arrow: Right 218">
+            <a:extLst>
+              <a:ext uri="{FF2B5EF4-FFF2-40B4-BE49-F238E27FC236}">
+                <a16:creationId xmlns:a16="http://schemas.microsoft.com/office/drawing/2014/main" id="{BDECCE29-FFBE-D9D5-2F39-2F6E18E6444E}"/>
+              </a:ext>
+            </a:extLst>
+          </p:cNvPr>
+          <p:cNvSpPr/>
+          <p:nvPr/>
+        </p:nvSpPr>
+        <p:spPr>
+          <a:xfrm rot="8716448">
+            <a:off x="3591452" y="5580861"/>
+            <a:ext cx="142644" cy="167997"/>
+          </a:xfrm>
+          <a:prstGeom prst="rightArrow">
+            <a:avLst>
+              <a:gd name="adj1" fmla="val 50000"/>
+              <a:gd name="adj2" fmla="val 78284"/>
+            </a:avLst>
+          </a:prstGeom>
+          <a:solidFill>
+            <a:srgbClr val="198FA3"/>
+          </a:solidFill>
+          <a:ln>
+            <a:solidFill>
+              <a:schemeClr val="tx1"/>
+            </a:solidFill>
+          </a:ln>
+        </p:spPr>
+        <p:style>
+          <a:lnRef idx="2">
+            <a:schemeClr val="accent1">
+              <a:shade val="50000"/>
+            </a:schemeClr>
+          </a:lnRef>
+          <a:fillRef idx="1">
+            <a:schemeClr val="accent1"/>
+          </a:fillRef>
+          <a:effectRef idx="0">
+            <a:schemeClr val="accent1"/>
+          </a:effectRef>
+          <a:fontRef idx="minor">
+            <a:schemeClr val="lt1"/>
+          </a:fontRef>
+        </p:style>
+        <p:txBody>
+          <a:bodyPr rtlCol="0" anchor="ctr"/>
+          <a:lstStyle/>
+          <a:p>
+            <a:pPr algn="ctr"/>
+            <a:endParaRPr lang="en-US">
+              <a:solidFill>
+                <a:schemeClr val="tx1"/>
+              </a:solidFill>
+            </a:endParaRPr>
+          </a:p>
+        </p:txBody>
+      </p:sp>
+      <p:sp>
+        <p:nvSpPr>
+          <p:cNvPr id="220" name="Arrow: Right 219">
+            <a:extLst>
+              <a:ext uri="{FF2B5EF4-FFF2-40B4-BE49-F238E27FC236}">
+                <a16:creationId xmlns:a16="http://schemas.microsoft.com/office/drawing/2014/main" id="{E8D84639-F51D-FC2F-5288-60BA38F6217B}"/>
+              </a:ext>
+            </a:extLst>
+          </p:cNvPr>
+          <p:cNvSpPr/>
+          <p:nvPr/>
+        </p:nvSpPr>
+        <p:spPr>
+          <a:xfrm rot="3021807">
+            <a:off x="2554721" y="5248545"/>
+            <a:ext cx="142644" cy="167997"/>
+          </a:xfrm>
+          <a:prstGeom prst="rightArrow">
+            <a:avLst>
+              <a:gd name="adj1" fmla="val 50000"/>
+              <a:gd name="adj2" fmla="val 78284"/>
+            </a:avLst>
+          </a:prstGeom>
+          <a:solidFill>
+            <a:srgbClr val="198FA3"/>
+          </a:solidFill>
+          <a:ln>
+            <a:solidFill>
+              <a:schemeClr val="tx1"/>
+            </a:solidFill>
+          </a:ln>
+        </p:spPr>
+        <p:style>
+          <a:lnRef idx="2">
+            <a:schemeClr val="accent1">
+              <a:shade val="50000"/>
+            </a:schemeClr>
+          </a:lnRef>
+          <a:fillRef idx="1">
+            <a:schemeClr val="accent1"/>
+          </a:fillRef>
+          <a:effectRef idx="0">
+            <a:schemeClr val="accent1"/>
+          </a:effectRef>
+          <a:fontRef idx="minor">
+            <a:schemeClr val="lt1"/>
+          </a:fontRef>
+        </p:style>
+        <p:txBody>
+          <a:bodyPr rtlCol="0" anchor="ctr"/>
+          <a:lstStyle/>
+          <a:p>
+            <a:pPr algn="ctr"/>
+            <a:endParaRPr lang="en-US">
+              <a:solidFill>
+                <a:schemeClr val="tx1"/>
+              </a:solidFill>
+            </a:endParaRPr>
+          </a:p>
+        </p:txBody>
+      </p:sp>
+      <p:sp>
+        <p:nvSpPr>
+          <p:cNvPr id="223" name="Oval 222">
+            <a:extLst>
+              <a:ext uri="{FF2B5EF4-FFF2-40B4-BE49-F238E27FC236}">
+                <a16:creationId xmlns:a16="http://schemas.microsoft.com/office/drawing/2014/main" id="{96784F57-6DDB-F1E3-DA1A-FAAE8627EF27}"/>
+              </a:ext>
+            </a:extLst>
+          </p:cNvPr>
+          <p:cNvSpPr>
+            <a:spLocks noChangeAspect="1"/>
+          </p:cNvSpPr>
+          <p:nvPr/>
+        </p:nvSpPr>
+        <p:spPr>
+          <a:xfrm>
+            <a:off x="4211431" y="5227750"/>
+            <a:ext cx="544903" cy="526621"/>
+          </a:xfrm>
+          <a:prstGeom prst="ellipse">
+            <a:avLst/>
+          </a:prstGeom>
+          <a:noFill/>
+          <a:ln w="38100">
+            <a:solidFill>
+              <a:srgbClr val="198FA3"/>
+            </a:solidFill>
+          </a:ln>
+        </p:spPr>
+        <p:style>
+          <a:lnRef idx="2">
+            <a:schemeClr val="accent1">
+              <a:shade val="50000"/>
+            </a:schemeClr>
+          </a:lnRef>
+          <a:fillRef idx="1">
+            <a:schemeClr val="accent1"/>
+          </a:fillRef>
+          <a:effectRef idx="0">
+            <a:schemeClr val="accent1"/>
+          </a:effectRef>
+          <a:fontRef idx="minor">
+            <a:schemeClr val="lt1"/>
+          </a:fontRef>
+        </p:style>
+        <p:txBody>
+          <a:bodyPr rtlCol="0" anchor="ctr"/>
+          <a:lstStyle/>
+          <a:p>
+            <a:pPr algn="ctr"/>
+            <a:endParaRPr lang="en-US">
+              <a:solidFill>
+                <a:schemeClr val="tx1"/>
+              </a:solidFill>
+            </a:endParaRPr>
+          </a:p>
+        </p:txBody>
+      </p:sp>
+      <p:sp>
+        <p:nvSpPr>
+          <p:cNvPr id="225" name="Arrow: Right 224">
+            <a:extLst>
+              <a:ext uri="{FF2B5EF4-FFF2-40B4-BE49-F238E27FC236}">
+                <a16:creationId xmlns:a16="http://schemas.microsoft.com/office/drawing/2014/main" id="{D7C5B2B9-1844-E39F-A738-72289CC32AB9}"/>
+              </a:ext>
+            </a:extLst>
+          </p:cNvPr>
+          <p:cNvSpPr/>
+          <p:nvPr/>
+        </p:nvSpPr>
+        <p:spPr>
+          <a:xfrm rot="18667055">
+            <a:off x="4234248" y="5215713"/>
+            <a:ext cx="142644" cy="167997"/>
+          </a:xfrm>
+          <a:prstGeom prst="rightArrow">
+            <a:avLst>
+              <a:gd name="adj1" fmla="val 50000"/>
+              <a:gd name="adj2" fmla="val 78284"/>
+            </a:avLst>
+          </a:prstGeom>
+          <a:solidFill>
+            <a:srgbClr val="198FA3"/>
+          </a:solidFill>
+          <a:ln>
+            <a:solidFill>
+              <a:schemeClr val="tx1"/>
+            </a:solidFill>
+          </a:ln>
+        </p:spPr>
+        <p:style>
+          <a:lnRef idx="2">
+            <a:schemeClr val="accent1">
+              <a:shade val="50000"/>
+            </a:schemeClr>
+          </a:lnRef>
+          <a:fillRef idx="1">
+            <a:schemeClr val="accent1"/>
+          </a:fillRef>
+          <a:effectRef idx="0">
+            <a:schemeClr val="accent1"/>
+          </a:effectRef>
+          <a:fontRef idx="minor">
+            <a:schemeClr val="lt1"/>
+          </a:fontRef>
+        </p:style>
+        <p:txBody>
+          <a:bodyPr rtlCol="0" anchor="ctr"/>
+          <a:lstStyle/>
+          <a:p>
+            <a:pPr algn="ctr"/>
+            <a:endParaRPr lang="en-US">
+              <a:solidFill>
+                <a:schemeClr val="tx1"/>
+              </a:solidFill>
+            </a:endParaRPr>
+          </a:p>
+        </p:txBody>
+      </p:sp>
+      <p:sp>
+        <p:nvSpPr>
+          <p:cNvPr id="226" name="Arrow: Right 225">
+            <a:extLst>
+              <a:ext uri="{FF2B5EF4-FFF2-40B4-BE49-F238E27FC236}">
+                <a16:creationId xmlns:a16="http://schemas.microsoft.com/office/drawing/2014/main" id="{D0CD8B7E-DD3B-CEFB-CFD5-DB3445135E40}"/>
+              </a:ext>
+            </a:extLst>
+          </p:cNvPr>
+          <p:cNvSpPr/>
+          <p:nvPr/>
+        </p:nvSpPr>
+        <p:spPr>
+          <a:xfrm rot="13063689">
+            <a:off x="4234247" y="5580106"/>
+            <a:ext cx="142644" cy="167997"/>
+          </a:xfrm>
+          <a:prstGeom prst="rightArrow">
+            <a:avLst>
+              <a:gd name="adj1" fmla="val 50000"/>
+              <a:gd name="adj2" fmla="val 78284"/>
+            </a:avLst>
+          </a:prstGeom>
+          <a:solidFill>
+            <a:srgbClr val="198FA3"/>
+          </a:solidFill>
+          <a:ln>
+            <a:solidFill>
+              <a:schemeClr val="tx1"/>
+            </a:solidFill>
+          </a:ln>
+        </p:spPr>
+        <p:style>
+          <a:lnRef idx="2">
+            <a:schemeClr val="accent1">
+              <a:shade val="50000"/>
+            </a:schemeClr>
+          </a:lnRef>
+          <a:fillRef idx="1">
+            <a:schemeClr val="accent1"/>
+          </a:fillRef>
+          <a:effectRef idx="0">
+            <a:schemeClr val="accent1"/>
+          </a:effectRef>
+          <a:fontRef idx="minor">
+            <a:schemeClr val="lt1"/>
+          </a:fontRef>
+        </p:style>
+        <p:txBody>
+          <a:bodyPr rtlCol="0" anchor="ctr"/>
+          <a:lstStyle/>
+          <a:p>
+            <a:pPr algn="ctr"/>
+            <a:endParaRPr lang="en-US">
+              <a:solidFill>
+                <a:schemeClr val="tx1"/>
+              </a:solidFill>
+            </a:endParaRPr>
+          </a:p>
+        </p:txBody>
+      </p:sp>
+      <p:sp>
+        <p:nvSpPr>
+          <p:cNvPr id="227" name="TextBox 226">
+            <a:extLst>
+              <a:ext uri="{FF2B5EF4-FFF2-40B4-BE49-F238E27FC236}">
+                <a16:creationId xmlns:a16="http://schemas.microsoft.com/office/drawing/2014/main" id="{1798572C-FB70-EEF2-F3FA-720B930E11A1}"/>
+              </a:ext>
+            </a:extLst>
+          </p:cNvPr>
+          <p:cNvSpPr txBox="1"/>
+          <p:nvPr/>
+        </p:nvSpPr>
+        <p:spPr>
+          <a:xfrm rot="5400000">
+            <a:off x="4487033" y="5283619"/>
+            <a:ext cx="544903" cy="523220"/>
+          </a:xfrm>
+          <a:prstGeom prst="rect">
+            <a:avLst/>
+          </a:prstGeom>
+          <a:noFill/>
+        </p:spPr>
+        <p:txBody>
+          <a:bodyPr wrap="square" rtlCol="0">
+            <a:spAutoFit/>
+          </a:bodyPr>
+          <a:lstStyle/>
+          <a:p>
+            <a:pPr algn="l"/>
+            <a:r>
+              <a:rPr lang="en-US" sz="2800" b="1" dirty="0">
+                <a:latin typeface="+mj-lt"/>
+              </a:rPr>
+              <a:t>X</a:t>
+            </a:r>
+            <a:r>
+              <a:rPr lang="en-US" sz="2000" dirty="0">
+                <a:latin typeface="Arial" panose="020B0604020202020204" pitchFamily="34" charset="0"/>
+              </a:rPr>
+              <a:t> </a:t>
             </a:r>
           </a:p>
         </p:txBody>
@@ -9329,7 +11178,7 @@
 <file path=ppt/theme/theme1.xml><?xml version="1.0" encoding="utf-8"?>
 <a:theme xmlns:a="http://schemas.openxmlformats.org/drawingml/2006/main" name="Office Theme">
   <a:themeElements>
-    <a:clrScheme name="Office">
+    <a:clrScheme name="Office Theme">
       <a:dk1>
         <a:sysClr val="windowText" lastClr="000000"/>
       </a:dk1>
@@ -9367,7 +11216,7 @@
         <a:srgbClr val="96607D"/>
       </a:folHlink>
     </a:clrScheme>
-    <a:fontScheme name="Office">
+    <a:fontScheme name="Office Theme">
       <a:majorFont>
         <a:latin typeface="Aptos Display" panose="02110004020202020204"/>
         <a:ea typeface=""/>
@@ -9473,7 +11322,7 @@
         <a:font script="Tfng" typeface="Ebrima"/>
       </a:minorFont>
     </a:fontScheme>
-    <a:fmtScheme name="Office">
+    <a:fmtScheme name="Office Theme">
       <a:fillStyleLst>
         <a:solidFill>
           <a:schemeClr val="phClr"/>

--- a/figs/experimental_design_time.pptx
+++ b/figs/experimental_design_time.pptx
@@ -128,7 +128,7 @@
   <pc:docChgLst>
     <pc:chgData name="Zachary Randell" userId="4632875424_tp_dropbox_plus" providerId="OAuth2" clId="{94F170DD-8542-47A7-905C-5CC9F103855A}"/>
     <pc:docChg chg="undo custSel delSld modSld modMainMaster modNotesMaster">
-      <pc:chgData name="Zachary Randell" userId="4632875424_tp_dropbox_plus" providerId="OAuth2" clId="{94F170DD-8542-47A7-905C-5CC9F103855A}" dt="2026-07-08T22:41:50.102" v="374" actId="1076"/>
+      <pc:chgData name="Zachary Randell" userId="4632875424_tp_dropbox_plus" providerId="OAuth2" clId="{94F170DD-8542-47A7-905C-5CC9F103855A}" dt="2026-07-09T00:20:13.812" v="376" actId="113"/>
       <pc:docMkLst>
         <pc:docMk/>
       </pc:docMkLst>
@@ -140,7 +140,7 @@
         </pc:sldMkLst>
       </pc:sldChg>
       <pc:sldChg chg="addSp delSp modSp mod modNotes">
-        <pc:chgData name="Zachary Randell" userId="4632875424_tp_dropbox_plus" providerId="OAuth2" clId="{94F170DD-8542-47A7-905C-5CC9F103855A}" dt="2026-07-08T22:41:50.102" v="374" actId="1076"/>
+        <pc:chgData name="Zachary Randell" userId="4632875424_tp_dropbox_plus" providerId="OAuth2" clId="{94F170DD-8542-47A7-905C-5CC9F103855A}" dt="2026-07-09T00:20:13.812" v="376" actId="113"/>
         <pc:sldMkLst>
           <pc:docMk/>
           <pc:sldMk cId="2849075591" sldId="257"/>
@@ -210,7 +210,7 @@
           </ac:spMkLst>
         </pc:spChg>
         <pc:spChg chg="add mod">
-          <ac:chgData name="Zachary Randell" userId="4632875424_tp_dropbox_plus" providerId="OAuth2" clId="{94F170DD-8542-47A7-905C-5CC9F103855A}" dt="2026-07-08T22:31:01.742" v="316" actId="113"/>
+          <ac:chgData name="Zachary Randell" userId="4632875424_tp_dropbox_plus" providerId="OAuth2" clId="{94F170DD-8542-47A7-905C-5CC9F103855A}" dt="2026-07-09T00:20:13.812" v="376" actId="113"/>
           <ac:spMkLst>
             <pc:docMk/>
             <pc:sldMk cId="2849075591" sldId="257"/>
@@ -218,7 +218,7 @@
           </ac:spMkLst>
         </pc:spChg>
         <pc:spChg chg="add mod">
-          <ac:chgData name="Zachary Randell" userId="4632875424_tp_dropbox_plus" providerId="OAuth2" clId="{94F170DD-8542-47A7-905C-5CC9F103855A}" dt="2026-07-08T22:30:58.844" v="315" actId="113"/>
+          <ac:chgData name="Zachary Randell" userId="4632875424_tp_dropbox_plus" providerId="OAuth2" clId="{94F170DD-8542-47A7-905C-5CC9F103855A}" dt="2026-07-09T00:20:12.010" v="375" actId="113"/>
           <ac:spMkLst>
             <pc:docMk/>
             <pc:sldMk cId="2849075591" sldId="257"/>
@@ -10167,7 +10167,7 @@
           <a:lstStyle/>
           <a:p>
             <a:r>
-              <a:rPr lang="en-US" sz="1600" b="1" dirty="0">
+              <a:rPr lang="en-US" sz="1600" dirty="0">
                 <a:latin typeface="+mj-lt"/>
               </a:rPr>
               <a:t>Underwater</a:t>
@@ -10204,7 +10204,7 @@
           <a:lstStyle/>
           <a:p>
             <a:r>
-              <a:rPr lang="en-US" sz="1600" b="1" dirty="0">
+              <a:rPr lang="en-US" sz="1600" dirty="0">
                 <a:latin typeface="+mj-lt"/>
               </a:rPr>
               <a:t>On the surface</a:t>
